--- a/Chaumaz_Ludovic_6_presentation_102025.pptx
+++ b/Chaumaz_Ludovic_6_presentation_102025.pptx
@@ -5,7 +5,7 @@
     <p:sldMasterId id="2147483672" r:id="rId1"/>
   </p:sldMasterIdLst>
   <p:notesMasterIdLst>
-    <p:notesMasterId r:id="rId10"/>
+    <p:notesMasterId r:id="rId21"/>
   </p:notesMasterIdLst>
   <p:sldIdLst>
     <p:sldId id="257" r:id="rId2"/>
@@ -15,7 +15,18 @@
     <p:sldId id="261" r:id="rId6"/>
     <p:sldId id="262" r:id="rId7"/>
     <p:sldId id="263" r:id="rId8"/>
-    <p:sldId id="264" r:id="rId9"/>
+    <p:sldId id="271" r:id="rId9"/>
+    <p:sldId id="264" r:id="rId10"/>
+    <p:sldId id="265" r:id="rId11"/>
+    <p:sldId id="275" r:id="rId12"/>
+    <p:sldId id="266" r:id="rId13"/>
+    <p:sldId id="274" r:id="rId14"/>
+    <p:sldId id="270" r:id="rId15"/>
+    <p:sldId id="272" r:id="rId16"/>
+    <p:sldId id="273" r:id="rId17"/>
+    <p:sldId id="267" r:id="rId18"/>
+    <p:sldId id="268" r:id="rId19"/>
+    <p:sldId id="269" r:id="rId20"/>
   </p:sldIdLst>
   <p:sldSz cx="12192000" cy="6858000"/>
   <p:notesSz cx="6858000" cy="9144000"/>
@@ -114,6 +125,11 @@
       </a:defRPr>
     </a:lvl9pPr>
   </p:defaultTextStyle>
+  <p:extLst>
+    <p:ext uri="{EFAFB233-063F-42B5-8137-9DF3F51BA10A}">
+      <p15:sldGuideLst xmlns:p15="http://schemas.microsoft.com/office/powerpoint/2012/main"/>
+    </p:ext>
+  </p:extLst>
 </p:presentation>
 </file>
 
@@ -199,7 +215,7 @@
           <a:p>
             <a:fld id="{73FE8E35-F60A-4488-AAF8-000CBC3CB0C8}" type="datetimeFigureOut">
               <a:rPr lang="fr-FR" smtClean="0"/>
-              <a:t>04/12/2025</a:t>
+              <a:t>12/12/2025</a:t>
             </a:fld>
             <a:endParaRPr lang="fr-FR"/>
           </a:p>
@@ -711,7 +727,7 @@
           <a:p>
             <a:fld id="{85A8AEA9-4A83-4514-8314-CAAC6BB424E7}" type="datetime1">
               <a:rPr lang="fr-FR" smtClean="0"/>
-              <a:t>04/12/2025</a:t>
+              <a:t>12/12/2025</a:t>
             </a:fld>
             <a:endParaRPr lang="fr-FR"/>
           </a:p>
@@ -973,7 +989,7 @@
           <a:p>
             <a:fld id="{B098F633-EE6D-44A7-9E75-72C2FD5B7BAB}" type="datetime1">
               <a:rPr lang="fr-FR" smtClean="0"/>
-              <a:t>04/12/2025</a:t>
+              <a:t>12/12/2025</a:t>
             </a:fld>
             <a:endParaRPr lang="fr-FR"/>
           </a:p>
@@ -1208,7 +1224,7 @@
           <a:p>
             <a:fld id="{D1404B51-B437-4C22-9E27-0FFAA42698D9}" type="datetime1">
               <a:rPr lang="fr-FR" smtClean="0"/>
-              <a:t>04/12/2025</a:t>
+              <a:t>12/12/2025</a:t>
             </a:fld>
             <a:endParaRPr lang="fr-FR"/>
           </a:p>
@@ -1448,7 +1464,7 @@
           <a:p>
             <a:fld id="{65D6E619-AA96-4370-814B-B7263EDE5BEE}" type="datetime1">
               <a:rPr lang="fr-FR" smtClean="0"/>
-              <a:t>04/12/2025</a:t>
+              <a:t>12/12/2025</a:t>
             </a:fld>
             <a:endParaRPr lang="fr-FR"/>
           </a:p>
@@ -1755,7 +1771,7 @@
           <a:p>
             <a:fld id="{207AFFE8-C243-437F-ACCD-2DE4DA4F5631}" type="datetime1">
               <a:rPr lang="fr-FR" smtClean="0"/>
-              <a:t>04/12/2025</a:t>
+              <a:t>12/12/2025</a:t>
             </a:fld>
             <a:endParaRPr lang="fr-FR"/>
           </a:p>
@@ -2057,7 +2073,7 @@
           <a:p>
             <a:fld id="{09D56D03-5254-4E0A-91BD-3F14E781E4E2}" type="datetime1">
               <a:rPr lang="fr-FR" smtClean="0"/>
-              <a:t>04/12/2025</a:t>
+              <a:t>12/12/2025</a:t>
             </a:fld>
             <a:endParaRPr lang="fr-FR"/>
           </a:p>
@@ -2479,7 +2495,7 @@
           <a:p>
             <a:fld id="{0C393EB4-4823-4B53-B0B9-58F9E25A8EE9}" type="datetime1">
               <a:rPr lang="fr-FR" smtClean="0"/>
-              <a:t>04/12/2025</a:t>
+              <a:t>12/12/2025</a:t>
             </a:fld>
             <a:endParaRPr lang="fr-FR"/>
           </a:p>
@@ -2574,7 +2590,7 @@
           <a:p>
             <a:fld id="{E9058721-5E39-4BBC-9BF8-C6E60922CA88}" type="datetime1">
               <a:rPr lang="fr-FR" smtClean="0"/>
-              <a:t>04/12/2025</a:t>
+              <a:t>12/12/2025</a:t>
             </a:fld>
             <a:endParaRPr lang="fr-FR"/>
           </a:p>
@@ -2736,7 +2752,7 @@
           <a:p>
             <a:fld id="{745F4260-FCD6-49A1-B353-AD20383AEFA7}" type="datetime1">
               <a:rPr lang="fr-FR" smtClean="0"/>
-              <a:t>04/12/2025</a:t>
+              <a:t>12/12/2025</a:t>
             </a:fld>
             <a:endParaRPr lang="fr-FR"/>
           </a:p>
@@ -3114,7 +3130,7 @@
           <a:p>
             <a:fld id="{28C70CC8-C2E2-4F25-AD41-5746C43C3AF6}" type="datetime1">
               <a:rPr lang="fr-FR" smtClean="0"/>
-              <a:t>04/12/2025</a:t>
+              <a:t>12/12/2025</a:t>
             </a:fld>
             <a:endParaRPr lang="fr-FR"/>
           </a:p>
@@ -3403,7 +3419,7 @@
           <a:p>
             <a:fld id="{C61480EA-1F7B-4118-88E7-7DD22ACFAD7A}" type="datetime1">
               <a:rPr lang="fr-FR" smtClean="0"/>
-              <a:t>04/12/2025</a:t>
+              <a:t>12/12/2025</a:t>
             </a:fld>
             <a:endParaRPr lang="fr-FR"/>
           </a:p>
@@ -3614,7 +3630,7 @@
           <a:p>
             <a:fld id="{C366350D-C3F6-47FE-AE80-E681493CF550}" type="datetime1">
               <a:rPr lang="fr-FR" smtClean="0"/>
-              <a:t>04/12/2025</a:t>
+              <a:t>12/12/2025</a:t>
             </a:fld>
             <a:endParaRPr lang="fr-FR"/>
           </a:p>
@@ -4406,6 +4422,4440 @@
 </p:sld>
 </file>
 
+<file path=ppt/slides/slide10.xml><?xml version="1.0" encoding="utf-8"?>
+<p:sld xmlns:a="http://schemas.openxmlformats.org/drawingml/2006/main" xmlns:r="http://schemas.openxmlformats.org/officeDocument/2006/relationships" xmlns:p="http://schemas.openxmlformats.org/presentationml/2006/main">
+  <p:cSld>
+    <p:spTree>
+      <p:nvGrpSpPr>
+        <p:cNvPr id="1" name="">
+          <a:extLst>
+            <a:ext uri="{FF2B5EF4-FFF2-40B4-BE49-F238E27FC236}">
+              <a16:creationId xmlns:a16="http://schemas.microsoft.com/office/drawing/2014/main" id="{327BCBAB-CFAE-F07C-33C5-A21A9B472392}"/>
+            </a:ext>
+          </a:extLst>
+        </p:cNvPr>
+        <p:cNvGrpSpPr/>
+        <p:nvPr/>
+      </p:nvGrpSpPr>
+      <p:grpSpPr>
+        <a:xfrm>
+          <a:off x="0" y="0"/>
+          <a:ext cx="0" cy="0"/>
+          <a:chOff x="0" y="0"/>
+          <a:chExt cx="0" cy="0"/>
+        </a:xfrm>
+      </p:grpSpPr>
+      <p:sp>
+        <p:nvSpPr>
+          <p:cNvPr id="2" name="Titre 1">
+            <a:extLst>
+              <a:ext uri="{FF2B5EF4-FFF2-40B4-BE49-F238E27FC236}">
+                <a16:creationId xmlns:a16="http://schemas.microsoft.com/office/drawing/2014/main" id="{370B17F0-A0AA-1014-B749-2A7AA7E2A070}"/>
+              </a:ext>
+            </a:extLst>
+          </p:cNvPr>
+          <p:cNvSpPr>
+            <a:spLocks noGrp="1"/>
+          </p:cNvSpPr>
+          <p:nvPr>
+            <p:ph type="title"/>
+          </p:nvPr>
+        </p:nvSpPr>
+        <p:spPr/>
+        <p:txBody>
+          <a:bodyPr/>
+          <a:lstStyle/>
+          <a:p>
+            <a:r>
+              <a:rPr lang="fr-FR" dirty="0"/>
+              <a:t>Création du modèle : gestion du déséquilibre</a:t>
+            </a:r>
+          </a:p>
+        </p:txBody>
+      </p:sp>
+      <p:sp>
+        <p:nvSpPr>
+          <p:cNvPr id="6" name="Espace réservé du contenu 5">
+            <a:extLst>
+              <a:ext uri="{FF2B5EF4-FFF2-40B4-BE49-F238E27FC236}">
+                <a16:creationId xmlns:a16="http://schemas.microsoft.com/office/drawing/2014/main" id="{E69599E0-1731-6172-A26F-5D5F8956B8CA}"/>
+              </a:ext>
+            </a:extLst>
+          </p:cNvPr>
+          <p:cNvSpPr>
+            <a:spLocks noGrp="1"/>
+          </p:cNvSpPr>
+          <p:nvPr>
+            <p:ph sz="half" idx="1"/>
+          </p:nvPr>
+        </p:nvSpPr>
+        <p:spPr/>
+        <p:txBody>
+          <a:bodyPr/>
+          <a:lstStyle/>
+          <a:p>
+            <a:r>
+              <a:rPr lang="fr-FR" dirty="0"/>
+              <a:t>Gestion du déséquilibre : </a:t>
+            </a:r>
+          </a:p>
+          <a:p>
+            <a:pPr marL="0" indent="0">
+              <a:buNone/>
+            </a:pPr>
+            <a:r>
+              <a:rPr lang="fr-FR" dirty="0"/>
+              <a:t>	- </a:t>
+            </a:r>
+            <a:r>
+              <a:rPr lang="fr-FR" dirty="0" err="1"/>
+              <a:t>Undersampling</a:t>
+            </a:r>
+            <a:r>
+              <a:rPr lang="fr-FR" dirty="0"/>
+              <a:t>  </a:t>
+            </a:r>
+          </a:p>
+          <a:p>
+            <a:pPr marL="0" indent="0">
+              <a:buNone/>
+            </a:pPr>
+            <a:r>
+              <a:rPr lang="fr-FR" dirty="0"/>
+              <a:t>	- SMOTE + </a:t>
+            </a:r>
+            <a:r>
+              <a:rPr lang="fr-FR" dirty="0" err="1"/>
+              <a:t>undersampling</a:t>
+            </a:r>
+            <a:endParaRPr lang="fr-FR" dirty="0"/>
+          </a:p>
+          <a:p>
+            <a:pPr marL="0" indent="0">
+              <a:buNone/>
+            </a:pPr>
+            <a:r>
+              <a:rPr lang="fr-FR" dirty="0">
+                <a:sym typeface="Wingdings" panose="05000000000000000000" pitchFamily="2" charset="2"/>
+              </a:rPr>
+              <a:t> Meilleur résultat : </a:t>
+            </a:r>
+            <a:r>
+              <a:rPr lang="fr-FR" dirty="0" err="1">
+                <a:sym typeface="Wingdings" panose="05000000000000000000" pitchFamily="2" charset="2"/>
+              </a:rPr>
+              <a:t>LightGBM</a:t>
+            </a:r>
+            <a:r>
+              <a:rPr lang="fr-FR" dirty="0">
+                <a:sym typeface="Wingdings" panose="05000000000000000000" pitchFamily="2" charset="2"/>
+              </a:rPr>
+              <a:t> + </a:t>
+            </a:r>
+            <a:r>
+              <a:rPr lang="fr-FR" dirty="0" err="1">
+                <a:sym typeface="Wingdings" panose="05000000000000000000" pitchFamily="2" charset="2"/>
+              </a:rPr>
+              <a:t>Undersampling</a:t>
+            </a:r>
+            <a:endParaRPr lang="fr-FR" dirty="0"/>
+          </a:p>
+          <a:p>
+            <a:endParaRPr lang="fr-FR" dirty="0"/>
+          </a:p>
+        </p:txBody>
+      </p:sp>
+      <p:pic>
+        <p:nvPicPr>
+          <p:cNvPr id="9" name="Espace réservé du contenu 8" descr="Une image contenant capture d’écran, ligne, diagramme, Rectangle&#10;&#10;Le contenu généré par l’IA peut être incorrect.">
+            <a:extLst>
+              <a:ext uri="{FF2B5EF4-FFF2-40B4-BE49-F238E27FC236}">
+                <a16:creationId xmlns:a16="http://schemas.microsoft.com/office/drawing/2014/main" id="{6D95DBD9-83D3-1911-F90D-DD3FBF7ADC12}"/>
+              </a:ext>
+            </a:extLst>
+          </p:cNvPr>
+          <p:cNvPicPr>
+            <a:picLocks noGrp="1" noChangeAspect="1"/>
+          </p:cNvPicPr>
+          <p:nvPr>
+            <p:ph sz="half" idx="2"/>
+          </p:nvPr>
+        </p:nvPicPr>
+        <p:blipFill>
+          <a:blip r:embed="rId2"/>
+          <a:stretch>
+            <a:fillRect/>
+          </a:stretch>
+        </p:blipFill>
+        <p:spPr>
+          <a:xfrm>
+            <a:off x="6188075" y="2700694"/>
+            <a:ext cx="5422900" cy="2686924"/>
+          </a:xfrm>
+          <a:prstGeom prst="rect">
+            <a:avLst/>
+          </a:prstGeom>
+        </p:spPr>
+      </p:pic>
+      <p:sp>
+        <p:nvSpPr>
+          <p:cNvPr id="5" name="Espace réservé du numéro de diapositive 4">
+            <a:extLst>
+              <a:ext uri="{FF2B5EF4-FFF2-40B4-BE49-F238E27FC236}">
+                <a16:creationId xmlns:a16="http://schemas.microsoft.com/office/drawing/2014/main" id="{8C7E25FB-E90C-AADC-B3FA-C81EEE363537}"/>
+              </a:ext>
+            </a:extLst>
+          </p:cNvPr>
+          <p:cNvSpPr>
+            <a:spLocks noGrp="1"/>
+          </p:cNvSpPr>
+          <p:nvPr>
+            <p:ph type="sldNum" sz="quarter" idx="12"/>
+          </p:nvPr>
+        </p:nvSpPr>
+        <p:spPr/>
+        <p:txBody>
+          <a:bodyPr/>
+          <a:lstStyle/>
+          <a:p>
+            <a:fld id="{682819AE-B619-487D-9152-CB0FE4E70819}" type="slidenum">
+              <a:rPr lang="fr-FR" smtClean="0"/>
+              <a:t>10</a:t>
+            </a:fld>
+            <a:endParaRPr lang="fr-FR"/>
+          </a:p>
+        </p:txBody>
+      </p:sp>
+      <p:sp>
+        <p:nvSpPr>
+          <p:cNvPr id="4" name="ZoneTexte 3">
+            <a:extLst>
+              <a:ext uri="{FF2B5EF4-FFF2-40B4-BE49-F238E27FC236}">
+                <a16:creationId xmlns:a16="http://schemas.microsoft.com/office/drawing/2014/main" id="{0F90463A-3F2B-62FD-B974-E272CFD86467}"/>
+              </a:ext>
+            </a:extLst>
+          </p:cNvPr>
+          <p:cNvSpPr txBox="1"/>
+          <p:nvPr/>
+        </p:nvSpPr>
+        <p:spPr>
+          <a:xfrm>
+            <a:off x="-1" y="6488668"/>
+            <a:ext cx="12192000" cy="338554"/>
+          </a:xfrm>
+          <a:prstGeom prst="rect">
+            <a:avLst/>
+          </a:prstGeom>
+          <a:noFill/>
+        </p:spPr>
+        <p:txBody>
+          <a:bodyPr wrap="square" rtlCol="0">
+            <a:spAutoFit/>
+          </a:bodyPr>
+          <a:lstStyle/>
+          <a:p>
+            <a:pPr algn="ctr"/>
+            <a:r>
+              <a:rPr lang="fr-FR" sz="1600" dirty="0">
+                <a:solidFill>
+                  <a:schemeClr val="bg1">
+                    <a:lumMod val="85000"/>
+                  </a:schemeClr>
+                </a:solidFill>
+              </a:rPr>
+              <a:t>Introduction</a:t>
+            </a:r>
+            <a:r>
+              <a:rPr lang="fr-FR" sz="1600" dirty="0"/>
+              <a:t> </a:t>
+            </a:r>
+            <a:r>
+              <a:rPr lang="fr-FR" sz="1600" dirty="0">
+                <a:solidFill>
+                  <a:schemeClr val="bg1">
+                    <a:lumMod val="85000"/>
+                  </a:schemeClr>
+                </a:solidFill>
+                <a:sym typeface="Wingdings" panose="05000000000000000000" pitchFamily="2" charset="2"/>
+              </a:rPr>
+              <a:t> Description  </a:t>
+            </a:r>
+            <a:r>
+              <a:rPr lang="fr-FR" sz="1600" dirty="0">
+                <a:solidFill>
+                  <a:schemeClr val="bg1">
+                    <a:lumMod val="85000"/>
+                  </a:schemeClr>
+                </a:solidFill>
+              </a:rPr>
+              <a:t>Analyses </a:t>
+            </a:r>
+            <a:r>
+              <a:rPr lang="fr-FR" sz="1600" dirty="0">
+                <a:solidFill>
+                  <a:schemeClr val="bg1">
+                    <a:lumMod val="85000"/>
+                  </a:schemeClr>
+                </a:solidFill>
+                <a:sym typeface="Wingdings" panose="05000000000000000000" pitchFamily="2" charset="2"/>
+              </a:rPr>
+              <a:t> </a:t>
+            </a:r>
+            <a:r>
+              <a:rPr lang="fr-FR" sz="1600" dirty="0" err="1">
+                <a:solidFill>
+                  <a:schemeClr val="bg1">
+                    <a:lumMod val="85000"/>
+                  </a:schemeClr>
+                </a:solidFill>
+                <a:sym typeface="Wingdings" panose="05000000000000000000" pitchFamily="2" charset="2"/>
+              </a:rPr>
+              <a:t>Feature</a:t>
+            </a:r>
+            <a:r>
+              <a:rPr lang="fr-FR" sz="1600" dirty="0">
+                <a:solidFill>
+                  <a:schemeClr val="bg1">
+                    <a:lumMod val="85000"/>
+                  </a:schemeClr>
+                </a:solidFill>
+                <a:sym typeface="Wingdings" panose="05000000000000000000" pitchFamily="2" charset="2"/>
+              </a:rPr>
+              <a:t> engineering  </a:t>
+            </a:r>
+            <a:r>
+              <a:rPr lang="fr-FR" sz="1600" dirty="0">
+                <a:sym typeface="Wingdings" panose="05000000000000000000" pitchFamily="2" charset="2"/>
+              </a:rPr>
+              <a:t>Modélisation</a:t>
+            </a:r>
+            <a:r>
+              <a:rPr lang="fr-FR" sz="1600" dirty="0">
+                <a:solidFill>
+                  <a:schemeClr val="bg1">
+                    <a:lumMod val="85000"/>
+                  </a:schemeClr>
+                </a:solidFill>
+                <a:sym typeface="Wingdings" panose="05000000000000000000" pitchFamily="2" charset="2"/>
+              </a:rPr>
+              <a:t> </a:t>
+            </a:r>
+            <a:r>
+              <a:rPr lang="fr-FR" sz="1600" dirty="0" err="1">
+                <a:solidFill>
+                  <a:schemeClr val="bg1">
+                    <a:lumMod val="85000"/>
+                  </a:schemeClr>
+                </a:solidFill>
+                <a:sym typeface="Wingdings" panose="05000000000000000000" pitchFamily="2" charset="2"/>
+              </a:rPr>
+              <a:t>Feature</a:t>
+            </a:r>
+            <a:r>
+              <a:rPr lang="fr-FR" sz="1600" dirty="0">
+                <a:solidFill>
+                  <a:schemeClr val="bg1">
+                    <a:lumMod val="85000"/>
+                  </a:schemeClr>
+                </a:solidFill>
+                <a:sym typeface="Wingdings" panose="05000000000000000000" pitchFamily="2" charset="2"/>
+              </a:rPr>
+              <a:t> importance  Déploiement  Suivi  Exemple</a:t>
+            </a:r>
+            <a:endParaRPr lang="fr-FR" sz="1600" dirty="0">
+              <a:solidFill>
+                <a:schemeClr val="bg1">
+                  <a:lumMod val="85000"/>
+                </a:schemeClr>
+              </a:solidFill>
+            </a:endParaRPr>
+          </a:p>
+        </p:txBody>
+      </p:sp>
+    </p:spTree>
+    <p:extLst>
+      <p:ext uri="{BB962C8B-B14F-4D97-AF65-F5344CB8AC3E}">
+        <p14:creationId xmlns:p14="http://schemas.microsoft.com/office/powerpoint/2010/main" val="3342341495"/>
+      </p:ext>
+    </p:extLst>
+  </p:cSld>
+  <p:clrMapOvr>
+    <a:masterClrMapping/>
+  </p:clrMapOvr>
+</p:sld>
+</file>
+
+<file path=ppt/slides/slide11.xml><?xml version="1.0" encoding="utf-8"?>
+<p:sld xmlns:a="http://schemas.openxmlformats.org/drawingml/2006/main" xmlns:r="http://schemas.openxmlformats.org/officeDocument/2006/relationships" xmlns:p="http://schemas.openxmlformats.org/presentationml/2006/main">
+  <p:cSld>
+    <p:spTree>
+      <p:nvGrpSpPr>
+        <p:cNvPr id="1" name="">
+          <a:extLst>
+            <a:ext uri="{FF2B5EF4-FFF2-40B4-BE49-F238E27FC236}">
+              <a16:creationId xmlns:a16="http://schemas.microsoft.com/office/drawing/2014/main" id="{26FA992E-45DE-525D-2676-D5CD3F125434}"/>
+            </a:ext>
+          </a:extLst>
+        </p:cNvPr>
+        <p:cNvGrpSpPr/>
+        <p:nvPr/>
+      </p:nvGrpSpPr>
+      <p:grpSpPr>
+        <a:xfrm>
+          <a:off x="0" y="0"/>
+          <a:ext cx="0" cy="0"/>
+          <a:chOff x="0" y="0"/>
+          <a:chExt cx="0" cy="0"/>
+        </a:xfrm>
+      </p:grpSpPr>
+      <p:sp>
+        <p:nvSpPr>
+          <p:cNvPr id="2" name="Titre 1">
+            <a:extLst>
+              <a:ext uri="{FF2B5EF4-FFF2-40B4-BE49-F238E27FC236}">
+                <a16:creationId xmlns:a16="http://schemas.microsoft.com/office/drawing/2014/main" id="{A89BA014-75E3-AF8B-FB38-8A9E7834D131}"/>
+              </a:ext>
+            </a:extLst>
+          </p:cNvPr>
+          <p:cNvSpPr>
+            <a:spLocks noGrp="1"/>
+          </p:cNvSpPr>
+          <p:nvPr>
+            <p:ph type="title"/>
+          </p:nvPr>
+        </p:nvSpPr>
+        <p:spPr/>
+        <p:txBody>
+          <a:bodyPr/>
+          <a:lstStyle/>
+          <a:p>
+            <a:r>
+              <a:rPr lang="fr-FR" dirty="0"/>
+              <a:t>Création du modèle : Exemple de </a:t>
+            </a:r>
+            <a:r>
+              <a:rPr lang="fr-FR" dirty="0" err="1"/>
+              <a:t>tracking</a:t>
+            </a:r>
+            <a:endParaRPr lang="fr-FR" dirty="0"/>
+          </a:p>
+        </p:txBody>
+      </p:sp>
+      <p:pic>
+        <p:nvPicPr>
+          <p:cNvPr id="10" name="Espace réservé du contenu 9" descr="Une image contenant texte, capture d’écran, logiciel, Logiciel multimédia&#10;&#10;Le contenu généré par l’IA peut être incorrect.">
+            <a:extLst>
+              <a:ext uri="{FF2B5EF4-FFF2-40B4-BE49-F238E27FC236}">
+                <a16:creationId xmlns:a16="http://schemas.microsoft.com/office/drawing/2014/main" id="{30985864-3600-B6B7-9448-75C9DFD082D2}"/>
+              </a:ext>
+            </a:extLst>
+          </p:cNvPr>
+          <p:cNvPicPr>
+            <a:picLocks noGrp="1" noChangeAspect="1"/>
+          </p:cNvPicPr>
+          <p:nvPr>
+            <p:ph sz="half" idx="1"/>
+          </p:nvPr>
+        </p:nvPicPr>
+        <p:blipFill>
+          <a:blip r:embed="rId2"/>
+          <a:stretch>
+            <a:fillRect/>
+          </a:stretch>
+        </p:blipFill>
+        <p:spPr>
+          <a:xfrm>
+            <a:off x="581025" y="2764767"/>
+            <a:ext cx="5422900" cy="2558778"/>
+          </a:xfrm>
+          <a:prstGeom prst="rect">
+            <a:avLst/>
+          </a:prstGeom>
+        </p:spPr>
+      </p:pic>
+      <p:sp>
+        <p:nvSpPr>
+          <p:cNvPr id="5" name="Espace réservé du numéro de diapositive 4">
+            <a:extLst>
+              <a:ext uri="{FF2B5EF4-FFF2-40B4-BE49-F238E27FC236}">
+                <a16:creationId xmlns:a16="http://schemas.microsoft.com/office/drawing/2014/main" id="{B690EF10-B7B4-1AB7-F25A-0779D17BEA52}"/>
+              </a:ext>
+            </a:extLst>
+          </p:cNvPr>
+          <p:cNvSpPr>
+            <a:spLocks noGrp="1"/>
+          </p:cNvSpPr>
+          <p:nvPr>
+            <p:ph type="sldNum" sz="quarter" idx="12"/>
+          </p:nvPr>
+        </p:nvSpPr>
+        <p:spPr/>
+        <p:txBody>
+          <a:bodyPr/>
+          <a:lstStyle/>
+          <a:p>
+            <a:fld id="{682819AE-B619-487D-9152-CB0FE4E70819}" type="slidenum">
+              <a:rPr lang="fr-FR" smtClean="0"/>
+              <a:t>11</a:t>
+            </a:fld>
+            <a:endParaRPr lang="fr-FR"/>
+          </a:p>
+        </p:txBody>
+      </p:sp>
+      <p:sp>
+        <p:nvSpPr>
+          <p:cNvPr id="4" name="ZoneTexte 3">
+            <a:extLst>
+              <a:ext uri="{FF2B5EF4-FFF2-40B4-BE49-F238E27FC236}">
+                <a16:creationId xmlns:a16="http://schemas.microsoft.com/office/drawing/2014/main" id="{BD8F17A9-1B47-2C9A-4D65-6319D80DA528}"/>
+              </a:ext>
+            </a:extLst>
+          </p:cNvPr>
+          <p:cNvSpPr txBox="1"/>
+          <p:nvPr/>
+        </p:nvSpPr>
+        <p:spPr>
+          <a:xfrm>
+            <a:off x="-1" y="6488668"/>
+            <a:ext cx="12192000" cy="338554"/>
+          </a:xfrm>
+          <a:prstGeom prst="rect">
+            <a:avLst/>
+          </a:prstGeom>
+          <a:noFill/>
+        </p:spPr>
+        <p:txBody>
+          <a:bodyPr wrap="square" rtlCol="0">
+            <a:spAutoFit/>
+          </a:bodyPr>
+          <a:lstStyle/>
+          <a:p>
+            <a:pPr algn="ctr"/>
+            <a:r>
+              <a:rPr lang="fr-FR" sz="1600" dirty="0">
+                <a:solidFill>
+                  <a:schemeClr val="bg1">
+                    <a:lumMod val="85000"/>
+                  </a:schemeClr>
+                </a:solidFill>
+              </a:rPr>
+              <a:t>Introduction</a:t>
+            </a:r>
+            <a:r>
+              <a:rPr lang="fr-FR" sz="1600" dirty="0"/>
+              <a:t> </a:t>
+            </a:r>
+            <a:r>
+              <a:rPr lang="fr-FR" sz="1600" dirty="0">
+                <a:solidFill>
+                  <a:schemeClr val="bg1">
+                    <a:lumMod val="85000"/>
+                  </a:schemeClr>
+                </a:solidFill>
+                <a:sym typeface="Wingdings" panose="05000000000000000000" pitchFamily="2" charset="2"/>
+              </a:rPr>
+              <a:t> Description  </a:t>
+            </a:r>
+            <a:r>
+              <a:rPr lang="fr-FR" sz="1600" dirty="0">
+                <a:solidFill>
+                  <a:schemeClr val="bg1">
+                    <a:lumMod val="85000"/>
+                  </a:schemeClr>
+                </a:solidFill>
+              </a:rPr>
+              <a:t>Analyses </a:t>
+            </a:r>
+            <a:r>
+              <a:rPr lang="fr-FR" sz="1600" dirty="0">
+                <a:solidFill>
+                  <a:schemeClr val="bg1">
+                    <a:lumMod val="85000"/>
+                  </a:schemeClr>
+                </a:solidFill>
+                <a:sym typeface="Wingdings" panose="05000000000000000000" pitchFamily="2" charset="2"/>
+              </a:rPr>
+              <a:t> </a:t>
+            </a:r>
+            <a:r>
+              <a:rPr lang="fr-FR" sz="1600" dirty="0" err="1">
+                <a:solidFill>
+                  <a:schemeClr val="bg1">
+                    <a:lumMod val="85000"/>
+                  </a:schemeClr>
+                </a:solidFill>
+                <a:sym typeface="Wingdings" panose="05000000000000000000" pitchFamily="2" charset="2"/>
+              </a:rPr>
+              <a:t>Feature</a:t>
+            </a:r>
+            <a:r>
+              <a:rPr lang="fr-FR" sz="1600" dirty="0">
+                <a:solidFill>
+                  <a:schemeClr val="bg1">
+                    <a:lumMod val="85000"/>
+                  </a:schemeClr>
+                </a:solidFill>
+                <a:sym typeface="Wingdings" panose="05000000000000000000" pitchFamily="2" charset="2"/>
+              </a:rPr>
+              <a:t> engineering  </a:t>
+            </a:r>
+            <a:r>
+              <a:rPr lang="fr-FR" sz="1600" dirty="0">
+                <a:sym typeface="Wingdings" panose="05000000000000000000" pitchFamily="2" charset="2"/>
+              </a:rPr>
+              <a:t>Modélisation</a:t>
+            </a:r>
+            <a:r>
+              <a:rPr lang="fr-FR" sz="1600" dirty="0">
+                <a:solidFill>
+                  <a:schemeClr val="bg1">
+                    <a:lumMod val="85000"/>
+                  </a:schemeClr>
+                </a:solidFill>
+                <a:sym typeface="Wingdings" panose="05000000000000000000" pitchFamily="2" charset="2"/>
+              </a:rPr>
+              <a:t> </a:t>
+            </a:r>
+            <a:r>
+              <a:rPr lang="fr-FR" sz="1600" dirty="0" err="1">
+                <a:solidFill>
+                  <a:schemeClr val="bg1">
+                    <a:lumMod val="85000"/>
+                  </a:schemeClr>
+                </a:solidFill>
+                <a:sym typeface="Wingdings" panose="05000000000000000000" pitchFamily="2" charset="2"/>
+              </a:rPr>
+              <a:t>Feature</a:t>
+            </a:r>
+            <a:r>
+              <a:rPr lang="fr-FR" sz="1600" dirty="0">
+                <a:solidFill>
+                  <a:schemeClr val="bg1">
+                    <a:lumMod val="85000"/>
+                  </a:schemeClr>
+                </a:solidFill>
+                <a:sym typeface="Wingdings" panose="05000000000000000000" pitchFamily="2" charset="2"/>
+              </a:rPr>
+              <a:t> importance  Déploiement  Suivi  Exemple</a:t>
+            </a:r>
+            <a:endParaRPr lang="fr-FR" sz="1600" dirty="0">
+              <a:solidFill>
+                <a:schemeClr val="bg1">
+                  <a:lumMod val="85000"/>
+                </a:schemeClr>
+              </a:solidFill>
+            </a:endParaRPr>
+          </a:p>
+        </p:txBody>
+      </p:sp>
+      <p:pic>
+        <p:nvPicPr>
+          <p:cNvPr id="12" name="Espace réservé du contenu 11" descr="Une image contenant texte, capture d’écran, Police, nombre&#10;&#10;Le contenu généré par l’IA peut être incorrect.">
+            <a:extLst>
+              <a:ext uri="{FF2B5EF4-FFF2-40B4-BE49-F238E27FC236}">
+                <a16:creationId xmlns:a16="http://schemas.microsoft.com/office/drawing/2014/main" id="{A9091493-BC26-FE5A-C48D-A40E166CAEDD}"/>
+              </a:ext>
+            </a:extLst>
+          </p:cNvPr>
+          <p:cNvPicPr>
+            <a:picLocks noGrp="1" noChangeAspect="1"/>
+          </p:cNvPicPr>
+          <p:nvPr>
+            <p:ph sz="half" idx="2"/>
+          </p:nvPr>
+        </p:nvPicPr>
+        <p:blipFill>
+          <a:blip r:embed="rId3"/>
+          <a:stretch>
+            <a:fillRect/>
+          </a:stretch>
+        </p:blipFill>
+        <p:spPr>
+          <a:xfrm>
+            <a:off x="6894232" y="3577366"/>
+            <a:ext cx="4010585" cy="933580"/>
+          </a:xfrm>
+          <a:prstGeom prst="rect">
+            <a:avLst/>
+          </a:prstGeom>
+        </p:spPr>
+      </p:pic>
+    </p:spTree>
+    <p:extLst>
+      <p:ext uri="{BB962C8B-B14F-4D97-AF65-F5344CB8AC3E}">
+        <p14:creationId xmlns:p14="http://schemas.microsoft.com/office/powerpoint/2010/main" val="2507001854"/>
+      </p:ext>
+    </p:extLst>
+  </p:cSld>
+  <p:clrMapOvr>
+    <a:masterClrMapping/>
+  </p:clrMapOvr>
+</p:sld>
+</file>
+
+<file path=ppt/slides/slide12.xml><?xml version="1.0" encoding="utf-8"?>
+<p:sld xmlns:a="http://schemas.openxmlformats.org/drawingml/2006/main" xmlns:r="http://schemas.openxmlformats.org/officeDocument/2006/relationships" xmlns:p="http://schemas.openxmlformats.org/presentationml/2006/main">
+  <p:cSld>
+    <p:spTree>
+      <p:nvGrpSpPr>
+        <p:cNvPr id="1" name="">
+          <a:extLst>
+            <a:ext uri="{FF2B5EF4-FFF2-40B4-BE49-F238E27FC236}">
+              <a16:creationId xmlns:a16="http://schemas.microsoft.com/office/drawing/2014/main" id="{2DDBEFC1-EF19-DEA1-41FC-67BD5A4E6697}"/>
+            </a:ext>
+          </a:extLst>
+        </p:cNvPr>
+        <p:cNvGrpSpPr/>
+        <p:nvPr/>
+      </p:nvGrpSpPr>
+      <p:grpSpPr>
+        <a:xfrm>
+          <a:off x="0" y="0"/>
+          <a:ext cx="0" cy="0"/>
+          <a:chOff x="0" y="0"/>
+          <a:chExt cx="0" cy="0"/>
+        </a:xfrm>
+      </p:grpSpPr>
+      <p:sp>
+        <p:nvSpPr>
+          <p:cNvPr id="2" name="Titre 1">
+            <a:extLst>
+              <a:ext uri="{FF2B5EF4-FFF2-40B4-BE49-F238E27FC236}">
+                <a16:creationId xmlns:a16="http://schemas.microsoft.com/office/drawing/2014/main" id="{85DF3FAB-8DED-C1F0-F2F8-D0B08F7223B2}"/>
+              </a:ext>
+            </a:extLst>
+          </p:cNvPr>
+          <p:cNvSpPr>
+            <a:spLocks noGrp="1"/>
+          </p:cNvSpPr>
+          <p:nvPr>
+            <p:ph type="title"/>
+          </p:nvPr>
+        </p:nvSpPr>
+        <p:spPr/>
+        <p:txBody>
+          <a:bodyPr/>
+          <a:lstStyle/>
+          <a:p>
+            <a:r>
+              <a:rPr lang="fr-FR" dirty="0" err="1"/>
+              <a:t>Feature</a:t>
+            </a:r>
+            <a:r>
+              <a:rPr lang="fr-FR" dirty="0"/>
+              <a:t> importance globale</a:t>
+            </a:r>
+          </a:p>
+        </p:txBody>
+      </p:sp>
+      <p:pic>
+        <p:nvPicPr>
+          <p:cNvPr id="10" name="Espace réservé du contenu 9">
+            <a:extLst>
+              <a:ext uri="{FF2B5EF4-FFF2-40B4-BE49-F238E27FC236}">
+                <a16:creationId xmlns:a16="http://schemas.microsoft.com/office/drawing/2014/main" id="{BB47ED87-C05B-E031-7492-AADE354A157D}"/>
+              </a:ext>
+            </a:extLst>
+          </p:cNvPr>
+          <p:cNvPicPr>
+            <a:picLocks noGrp="1" noChangeAspect="1"/>
+          </p:cNvPicPr>
+          <p:nvPr>
+            <p:ph sz="half" idx="1"/>
+          </p:nvPr>
+        </p:nvPicPr>
+        <p:blipFill>
+          <a:blip r:embed="rId2"/>
+          <a:stretch>
+            <a:fillRect/>
+          </a:stretch>
+        </p:blipFill>
+        <p:spPr>
+          <a:xfrm>
+            <a:off x="220845" y="2433918"/>
+            <a:ext cx="5875155" cy="1990164"/>
+          </a:xfrm>
+          <a:prstGeom prst="rect">
+            <a:avLst/>
+          </a:prstGeom>
+        </p:spPr>
+      </p:pic>
+      <p:pic>
+        <p:nvPicPr>
+          <p:cNvPr id="12" name="Espace réservé du contenu 11">
+            <a:extLst>
+              <a:ext uri="{FF2B5EF4-FFF2-40B4-BE49-F238E27FC236}">
+                <a16:creationId xmlns:a16="http://schemas.microsoft.com/office/drawing/2014/main" id="{19BD5C87-8D4E-7BCF-E53D-6C43FD6E2C74}"/>
+              </a:ext>
+            </a:extLst>
+          </p:cNvPr>
+          <p:cNvPicPr>
+            <a:picLocks noGrp="1" noChangeAspect="1"/>
+          </p:cNvPicPr>
+          <p:nvPr>
+            <p:ph sz="half" idx="2"/>
+          </p:nvPr>
+        </p:nvPicPr>
+        <p:blipFill>
+          <a:blip r:embed="rId3"/>
+          <a:stretch>
+            <a:fillRect/>
+          </a:stretch>
+        </p:blipFill>
+        <p:spPr>
+          <a:xfrm>
+            <a:off x="6552256" y="2227263"/>
+            <a:ext cx="4694537" cy="3633787"/>
+          </a:xfrm>
+          <a:prstGeom prst="rect">
+            <a:avLst/>
+          </a:prstGeom>
+        </p:spPr>
+      </p:pic>
+      <p:sp>
+        <p:nvSpPr>
+          <p:cNvPr id="5" name="Espace réservé du numéro de diapositive 4">
+            <a:extLst>
+              <a:ext uri="{FF2B5EF4-FFF2-40B4-BE49-F238E27FC236}">
+                <a16:creationId xmlns:a16="http://schemas.microsoft.com/office/drawing/2014/main" id="{06867705-D6A5-82F5-2262-AE51F148EC1F}"/>
+              </a:ext>
+            </a:extLst>
+          </p:cNvPr>
+          <p:cNvSpPr>
+            <a:spLocks noGrp="1"/>
+          </p:cNvSpPr>
+          <p:nvPr>
+            <p:ph type="sldNum" sz="quarter" idx="12"/>
+          </p:nvPr>
+        </p:nvSpPr>
+        <p:spPr/>
+        <p:txBody>
+          <a:bodyPr/>
+          <a:lstStyle/>
+          <a:p>
+            <a:fld id="{682819AE-B619-487D-9152-CB0FE4E70819}" type="slidenum">
+              <a:rPr lang="fr-FR" smtClean="0"/>
+              <a:t>12</a:t>
+            </a:fld>
+            <a:endParaRPr lang="fr-FR"/>
+          </a:p>
+        </p:txBody>
+      </p:sp>
+      <p:sp>
+        <p:nvSpPr>
+          <p:cNvPr id="4" name="ZoneTexte 3">
+            <a:extLst>
+              <a:ext uri="{FF2B5EF4-FFF2-40B4-BE49-F238E27FC236}">
+                <a16:creationId xmlns:a16="http://schemas.microsoft.com/office/drawing/2014/main" id="{CBCF3252-A11C-7E66-046D-07B0E95671E9}"/>
+              </a:ext>
+            </a:extLst>
+          </p:cNvPr>
+          <p:cNvSpPr txBox="1"/>
+          <p:nvPr/>
+        </p:nvSpPr>
+        <p:spPr>
+          <a:xfrm>
+            <a:off x="-1" y="6488668"/>
+            <a:ext cx="12192000" cy="338554"/>
+          </a:xfrm>
+          <a:prstGeom prst="rect">
+            <a:avLst/>
+          </a:prstGeom>
+          <a:noFill/>
+        </p:spPr>
+        <p:txBody>
+          <a:bodyPr wrap="square" rtlCol="0">
+            <a:spAutoFit/>
+          </a:bodyPr>
+          <a:lstStyle/>
+          <a:p>
+            <a:pPr algn="ctr"/>
+            <a:r>
+              <a:rPr lang="fr-FR" sz="1600" dirty="0">
+                <a:solidFill>
+                  <a:schemeClr val="bg1">
+                    <a:lumMod val="85000"/>
+                  </a:schemeClr>
+                </a:solidFill>
+              </a:rPr>
+              <a:t>Introduction</a:t>
+            </a:r>
+            <a:r>
+              <a:rPr lang="fr-FR" sz="1600" dirty="0"/>
+              <a:t> </a:t>
+            </a:r>
+            <a:r>
+              <a:rPr lang="fr-FR" sz="1600" dirty="0">
+                <a:solidFill>
+                  <a:schemeClr val="bg1">
+                    <a:lumMod val="85000"/>
+                  </a:schemeClr>
+                </a:solidFill>
+                <a:sym typeface="Wingdings" panose="05000000000000000000" pitchFamily="2" charset="2"/>
+              </a:rPr>
+              <a:t> Description  </a:t>
+            </a:r>
+            <a:r>
+              <a:rPr lang="fr-FR" sz="1600" dirty="0">
+                <a:solidFill>
+                  <a:schemeClr val="bg1">
+                    <a:lumMod val="85000"/>
+                  </a:schemeClr>
+                </a:solidFill>
+              </a:rPr>
+              <a:t>Analyses </a:t>
+            </a:r>
+            <a:r>
+              <a:rPr lang="fr-FR" sz="1600" dirty="0">
+                <a:solidFill>
+                  <a:schemeClr val="bg1">
+                    <a:lumMod val="85000"/>
+                  </a:schemeClr>
+                </a:solidFill>
+                <a:sym typeface="Wingdings" panose="05000000000000000000" pitchFamily="2" charset="2"/>
+              </a:rPr>
+              <a:t> </a:t>
+            </a:r>
+            <a:r>
+              <a:rPr lang="fr-FR" sz="1600" dirty="0" err="1">
+                <a:solidFill>
+                  <a:schemeClr val="bg1">
+                    <a:lumMod val="85000"/>
+                  </a:schemeClr>
+                </a:solidFill>
+                <a:sym typeface="Wingdings" panose="05000000000000000000" pitchFamily="2" charset="2"/>
+              </a:rPr>
+              <a:t>Feature</a:t>
+            </a:r>
+            <a:r>
+              <a:rPr lang="fr-FR" sz="1600" dirty="0">
+                <a:solidFill>
+                  <a:schemeClr val="bg1">
+                    <a:lumMod val="85000"/>
+                  </a:schemeClr>
+                </a:solidFill>
+                <a:sym typeface="Wingdings" panose="05000000000000000000" pitchFamily="2" charset="2"/>
+              </a:rPr>
+              <a:t> engineering  Modélisation </a:t>
+            </a:r>
+            <a:r>
+              <a:rPr lang="fr-FR" sz="1600" dirty="0" err="1">
+                <a:sym typeface="Wingdings" panose="05000000000000000000" pitchFamily="2" charset="2"/>
+              </a:rPr>
+              <a:t>Feature</a:t>
+            </a:r>
+            <a:r>
+              <a:rPr lang="fr-FR" sz="1600" dirty="0">
+                <a:sym typeface="Wingdings" panose="05000000000000000000" pitchFamily="2" charset="2"/>
+              </a:rPr>
+              <a:t> importance</a:t>
+            </a:r>
+            <a:r>
+              <a:rPr lang="fr-FR" sz="1600" dirty="0">
+                <a:solidFill>
+                  <a:schemeClr val="bg1">
+                    <a:lumMod val="85000"/>
+                  </a:schemeClr>
+                </a:solidFill>
+                <a:sym typeface="Wingdings" panose="05000000000000000000" pitchFamily="2" charset="2"/>
+              </a:rPr>
+              <a:t>  Déploiement  Suivi  Exemple</a:t>
+            </a:r>
+            <a:endParaRPr lang="fr-FR" sz="1600" dirty="0">
+              <a:solidFill>
+                <a:schemeClr val="bg1">
+                  <a:lumMod val="85000"/>
+                </a:schemeClr>
+              </a:solidFill>
+            </a:endParaRPr>
+          </a:p>
+        </p:txBody>
+      </p:sp>
+      <p:sp>
+        <p:nvSpPr>
+          <p:cNvPr id="13" name="ZoneTexte 12">
+            <a:extLst>
+              <a:ext uri="{FF2B5EF4-FFF2-40B4-BE49-F238E27FC236}">
+                <a16:creationId xmlns:a16="http://schemas.microsoft.com/office/drawing/2014/main" id="{BECC8320-12B2-D73B-649E-C91D44936AB0}"/>
+              </a:ext>
+            </a:extLst>
+          </p:cNvPr>
+          <p:cNvSpPr txBox="1"/>
+          <p:nvPr/>
+        </p:nvSpPr>
+        <p:spPr>
+          <a:xfrm>
+            <a:off x="1191362" y="4610189"/>
+            <a:ext cx="5360894" cy="646331"/>
+          </a:xfrm>
+          <a:prstGeom prst="rect">
+            <a:avLst/>
+          </a:prstGeom>
+          <a:noFill/>
+        </p:spPr>
+        <p:txBody>
+          <a:bodyPr wrap="square" rtlCol="0">
+            <a:spAutoFit/>
+          </a:bodyPr>
+          <a:lstStyle/>
+          <a:p>
+            <a:r>
+              <a:rPr lang="fr-FR" dirty="0"/>
+              <a:t>Suppression des </a:t>
+            </a:r>
+            <a:r>
+              <a:rPr lang="fr-FR" dirty="0" err="1"/>
+              <a:t>features</a:t>
+            </a:r>
+            <a:r>
+              <a:rPr lang="fr-FR" dirty="0"/>
+              <a:t> « inutiles » du modèle : pas d’amélioration.</a:t>
+            </a:r>
+          </a:p>
+        </p:txBody>
+      </p:sp>
+    </p:spTree>
+    <p:extLst>
+      <p:ext uri="{BB962C8B-B14F-4D97-AF65-F5344CB8AC3E}">
+        <p14:creationId xmlns:p14="http://schemas.microsoft.com/office/powerpoint/2010/main" val="3915399519"/>
+      </p:ext>
+    </p:extLst>
+  </p:cSld>
+  <p:clrMapOvr>
+    <a:masterClrMapping/>
+  </p:clrMapOvr>
+</p:sld>
+</file>
+
+<file path=ppt/slides/slide13.xml><?xml version="1.0" encoding="utf-8"?>
+<p:sld xmlns:a="http://schemas.openxmlformats.org/drawingml/2006/main" xmlns:r="http://schemas.openxmlformats.org/officeDocument/2006/relationships" xmlns:p="http://schemas.openxmlformats.org/presentationml/2006/main">
+  <p:cSld>
+    <p:spTree>
+      <p:nvGrpSpPr>
+        <p:cNvPr id="1" name="">
+          <a:extLst>
+            <a:ext uri="{FF2B5EF4-FFF2-40B4-BE49-F238E27FC236}">
+              <a16:creationId xmlns:a16="http://schemas.microsoft.com/office/drawing/2014/main" id="{58AC2236-009C-2C01-5FCB-5470CC455A41}"/>
+            </a:ext>
+          </a:extLst>
+        </p:cNvPr>
+        <p:cNvGrpSpPr/>
+        <p:nvPr/>
+      </p:nvGrpSpPr>
+      <p:grpSpPr>
+        <a:xfrm>
+          <a:off x="0" y="0"/>
+          <a:ext cx="0" cy="0"/>
+          <a:chOff x="0" y="0"/>
+          <a:chExt cx="0" cy="0"/>
+        </a:xfrm>
+      </p:grpSpPr>
+      <p:sp>
+        <p:nvSpPr>
+          <p:cNvPr id="2" name="Titre 1">
+            <a:extLst>
+              <a:ext uri="{FF2B5EF4-FFF2-40B4-BE49-F238E27FC236}">
+                <a16:creationId xmlns:a16="http://schemas.microsoft.com/office/drawing/2014/main" id="{2999EE60-5C22-F50B-DDBF-3FA9E9A9E85D}"/>
+              </a:ext>
+            </a:extLst>
+          </p:cNvPr>
+          <p:cNvSpPr>
+            <a:spLocks noGrp="1"/>
+          </p:cNvSpPr>
+          <p:nvPr>
+            <p:ph type="title"/>
+          </p:nvPr>
+        </p:nvSpPr>
+        <p:spPr/>
+        <p:txBody>
+          <a:bodyPr/>
+          <a:lstStyle/>
+          <a:p>
+            <a:r>
+              <a:rPr lang="fr-FR" dirty="0" err="1"/>
+              <a:t>Feature</a:t>
+            </a:r>
+            <a:r>
+              <a:rPr lang="fr-FR" dirty="0"/>
+              <a:t> importance globale et seuil de décision</a:t>
+            </a:r>
+          </a:p>
+        </p:txBody>
+      </p:sp>
+      <p:sp>
+        <p:nvSpPr>
+          <p:cNvPr id="5" name="Espace réservé du numéro de diapositive 4">
+            <a:extLst>
+              <a:ext uri="{FF2B5EF4-FFF2-40B4-BE49-F238E27FC236}">
+                <a16:creationId xmlns:a16="http://schemas.microsoft.com/office/drawing/2014/main" id="{AC69265A-81A0-BB3A-668A-1B53797D8F5E}"/>
+              </a:ext>
+            </a:extLst>
+          </p:cNvPr>
+          <p:cNvSpPr>
+            <a:spLocks noGrp="1"/>
+          </p:cNvSpPr>
+          <p:nvPr>
+            <p:ph type="sldNum" sz="quarter" idx="12"/>
+          </p:nvPr>
+        </p:nvSpPr>
+        <p:spPr/>
+        <p:txBody>
+          <a:bodyPr/>
+          <a:lstStyle/>
+          <a:p>
+            <a:fld id="{682819AE-B619-487D-9152-CB0FE4E70819}" type="slidenum">
+              <a:rPr lang="fr-FR" smtClean="0"/>
+              <a:t>13</a:t>
+            </a:fld>
+            <a:endParaRPr lang="fr-FR"/>
+          </a:p>
+        </p:txBody>
+      </p:sp>
+      <p:sp>
+        <p:nvSpPr>
+          <p:cNvPr id="4" name="ZoneTexte 3">
+            <a:extLst>
+              <a:ext uri="{FF2B5EF4-FFF2-40B4-BE49-F238E27FC236}">
+                <a16:creationId xmlns:a16="http://schemas.microsoft.com/office/drawing/2014/main" id="{D2845186-14D0-0A8F-CF63-02173A55D96A}"/>
+              </a:ext>
+            </a:extLst>
+          </p:cNvPr>
+          <p:cNvSpPr txBox="1"/>
+          <p:nvPr/>
+        </p:nvSpPr>
+        <p:spPr>
+          <a:xfrm>
+            <a:off x="-1" y="6488668"/>
+            <a:ext cx="12192000" cy="338554"/>
+          </a:xfrm>
+          <a:prstGeom prst="rect">
+            <a:avLst/>
+          </a:prstGeom>
+          <a:noFill/>
+        </p:spPr>
+        <p:txBody>
+          <a:bodyPr wrap="square" rtlCol="0">
+            <a:spAutoFit/>
+          </a:bodyPr>
+          <a:lstStyle/>
+          <a:p>
+            <a:pPr algn="ctr"/>
+            <a:r>
+              <a:rPr lang="fr-FR" sz="1600" dirty="0">
+                <a:solidFill>
+                  <a:schemeClr val="bg1">
+                    <a:lumMod val="85000"/>
+                  </a:schemeClr>
+                </a:solidFill>
+              </a:rPr>
+              <a:t>Introduction</a:t>
+            </a:r>
+            <a:r>
+              <a:rPr lang="fr-FR" sz="1600" dirty="0"/>
+              <a:t> </a:t>
+            </a:r>
+            <a:r>
+              <a:rPr lang="fr-FR" sz="1600" dirty="0">
+                <a:solidFill>
+                  <a:schemeClr val="bg1">
+                    <a:lumMod val="85000"/>
+                  </a:schemeClr>
+                </a:solidFill>
+                <a:sym typeface="Wingdings" panose="05000000000000000000" pitchFamily="2" charset="2"/>
+              </a:rPr>
+              <a:t> Description  </a:t>
+            </a:r>
+            <a:r>
+              <a:rPr lang="fr-FR" sz="1600" dirty="0">
+                <a:solidFill>
+                  <a:schemeClr val="bg1">
+                    <a:lumMod val="85000"/>
+                  </a:schemeClr>
+                </a:solidFill>
+              </a:rPr>
+              <a:t>Analyses </a:t>
+            </a:r>
+            <a:r>
+              <a:rPr lang="fr-FR" sz="1600" dirty="0">
+                <a:solidFill>
+                  <a:schemeClr val="bg1">
+                    <a:lumMod val="85000"/>
+                  </a:schemeClr>
+                </a:solidFill>
+                <a:sym typeface="Wingdings" panose="05000000000000000000" pitchFamily="2" charset="2"/>
+              </a:rPr>
+              <a:t> </a:t>
+            </a:r>
+            <a:r>
+              <a:rPr lang="fr-FR" sz="1600" dirty="0" err="1">
+                <a:solidFill>
+                  <a:schemeClr val="bg1">
+                    <a:lumMod val="85000"/>
+                  </a:schemeClr>
+                </a:solidFill>
+                <a:sym typeface="Wingdings" panose="05000000000000000000" pitchFamily="2" charset="2"/>
+              </a:rPr>
+              <a:t>Feature</a:t>
+            </a:r>
+            <a:r>
+              <a:rPr lang="fr-FR" sz="1600" dirty="0">
+                <a:solidFill>
+                  <a:schemeClr val="bg1">
+                    <a:lumMod val="85000"/>
+                  </a:schemeClr>
+                </a:solidFill>
+                <a:sym typeface="Wingdings" panose="05000000000000000000" pitchFamily="2" charset="2"/>
+              </a:rPr>
+              <a:t> engineering  Modélisation </a:t>
+            </a:r>
+            <a:r>
+              <a:rPr lang="fr-FR" sz="1600" dirty="0" err="1">
+                <a:sym typeface="Wingdings" panose="05000000000000000000" pitchFamily="2" charset="2"/>
+              </a:rPr>
+              <a:t>Feature</a:t>
+            </a:r>
+            <a:r>
+              <a:rPr lang="fr-FR" sz="1600" dirty="0">
+                <a:sym typeface="Wingdings" panose="05000000000000000000" pitchFamily="2" charset="2"/>
+              </a:rPr>
+              <a:t> importance</a:t>
+            </a:r>
+            <a:r>
+              <a:rPr lang="fr-FR" sz="1600" dirty="0">
+                <a:solidFill>
+                  <a:schemeClr val="bg1">
+                    <a:lumMod val="85000"/>
+                  </a:schemeClr>
+                </a:solidFill>
+                <a:sym typeface="Wingdings" panose="05000000000000000000" pitchFamily="2" charset="2"/>
+              </a:rPr>
+              <a:t>  Déploiement  Suivi  Exemple</a:t>
+            </a:r>
+            <a:endParaRPr lang="fr-FR" sz="1600" dirty="0">
+              <a:solidFill>
+                <a:schemeClr val="bg1">
+                  <a:lumMod val="85000"/>
+                </a:schemeClr>
+              </a:solidFill>
+            </a:endParaRPr>
+          </a:p>
+        </p:txBody>
+      </p:sp>
+      <p:sp>
+        <p:nvSpPr>
+          <p:cNvPr id="6" name="Espace réservé du contenu 5">
+            <a:extLst>
+              <a:ext uri="{FF2B5EF4-FFF2-40B4-BE49-F238E27FC236}">
+                <a16:creationId xmlns:a16="http://schemas.microsoft.com/office/drawing/2014/main" id="{D04554E2-D347-0CE3-1768-982AA18417AA}"/>
+              </a:ext>
+            </a:extLst>
+          </p:cNvPr>
+          <p:cNvSpPr>
+            <a:spLocks noGrp="1"/>
+          </p:cNvSpPr>
+          <p:nvPr>
+            <p:ph sz="half" idx="1"/>
+          </p:nvPr>
+        </p:nvSpPr>
+        <p:spPr>
+          <a:xfrm>
+            <a:off x="581193" y="2228003"/>
+            <a:ext cx="5422390" cy="1474421"/>
+          </a:xfrm>
+        </p:spPr>
+        <p:txBody>
+          <a:bodyPr/>
+          <a:lstStyle/>
+          <a:p>
+            <a:r>
+              <a:rPr lang="fr-FR" dirty="0"/>
+              <a:t>Classement des modèles par rapport au seuil de décision : sélection finale du modèle</a:t>
+            </a:r>
+          </a:p>
+          <a:p>
+            <a:endParaRPr lang="fr-FR" dirty="0"/>
+          </a:p>
+        </p:txBody>
+      </p:sp>
+      <p:pic>
+        <p:nvPicPr>
+          <p:cNvPr id="11" name="Espace réservé du contenu 10" descr="Une image contenant capture d’écran, ligne, diagramme, Tracé&#10;&#10;Le contenu généré par l’IA peut être incorrect.">
+            <a:extLst>
+              <a:ext uri="{FF2B5EF4-FFF2-40B4-BE49-F238E27FC236}">
+                <a16:creationId xmlns:a16="http://schemas.microsoft.com/office/drawing/2014/main" id="{AFA661A0-5491-8EDD-4946-7DC4F4F6834E}"/>
+              </a:ext>
+            </a:extLst>
+          </p:cNvPr>
+          <p:cNvPicPr>
+            <a:picLocks noGrp="1" noChangeAspect="1"/>
+          </p:cNvPicPr>
+          <p:nvPr>
+            <p:ph sz="half" idx="2"/>
+          </p:nvPr>
+        </p:nvPicPr>
+        <p:blipFill>
+          <a:blip r:embed="rId2"/>
+          <a:stretch>
+            <a:fillRect/>
+          </a:stretch>
+        </p:blipFill>
+        <p:spPr>
+          <a:xfrm>
+            <a:off x="6188075" y="2707450"/>
+            <a:ext cx="5422900" cy="2673413"/>
+          </a:xfrm>
+          <a:prstGeom prst="rect">
+            <a:avLst/>
+          </a:prstGeom>
+        </p:spPr>
+      </p:pic>
+      <p:pic>
+        <p:nvPicPr>
+          <p:cNvPr id="15" name="Image 14" descr="Une image contenant texte, capture d’écran, Police, nombre&#10;&#10;Le contenu généré par l’IA peut être incorrect.">
+            <a:extLst>
+              <a:ext uri="{FF2B5EF4-FFF2-40B4-BE49-F238E27FC236}">
+                <a16:creationId xmlns:a16="http://schemas.microsoft.com/office/drawing/2014/main" id="{E199EB50-2F65-8726-B274-0573B5666592}"/>
+              </a:ext>
+            </a:extLst>
+          </p:cNvPr>
+          <p:cNvPicPr>
+            <a:picLocks noChangeAspect="1"/>
+          </p:cNvPicPr>
+          <p:nvPr/>
+        </p:nvPicPr>
+        <p:blipFill>
+          <a:blip r:embed="rId3"/>
+          <a:stretch>
+            <a:fillRect/>
+          </a:stretch>
+        </p:blipFill>
+        <p:spPr>
+          <a:xfrm>
+            <a:off x="2535045" y="3222812"/>
+            <a:ext cx="1514686" cy="2905530"/>
+          </a:xfrm>
+          <a:prstGeom prst="rect">
+            <a:avLst/>
+          </a:prstGeom>
+        </p:spPr>
+      </p:pic>
+    </p:spTree>
+    <p:extLst>
+      <p:ext uri="{BB962C8B-B14F-4D97-AF65-F5344CB8AC3E}">
+        <p14:creationId xmlns:p14="http://schemas.microsoft.com/office/powerpoint/2010/main" val="1841069629"/>
+      </p:ext>
+    </p:extLst>
+  </p:cSld>
+  <p:clrMapOvr>
+    <a:masterClrMapping/>
+  </p:clrMapOvr>
+</p:sld>
+</file>
+
+<file path=ppt/slides/slide14.xml><?xml version="1.0" encoding="utf-8"?>
+<p:sld xmlns:a="http://schemas.openxmlformats.org/drawingml/2006/main" xmlns:r="http://schemas.openxmlformats.org/officeDocument/2006/relationships" xmlns:p="http://schemas.openxmlformats.org/presentationml/2006/main">
+  <p:cSld>
+    <p:spTree>
+      <p:nvGrpSpPr>
+        <p:cNvPr id="1" name="">
+          <a:extLst>
+            <a:ext uri="{FF2B5EF4-FFF2-40B4-BE49-F238E27FC236}">
+              <a16:creationId xmlns:a16="http://schemas.microsoft.com/office/drawing/2014/main" id="{91BAD236-CA2A-2CF1-F916-703E08DC9BC7}"/>
+            </a:ext>
+          </a:extLst>
+        </p:cNvPr>
+        <p:cNvGrpSpPr/>
+        <p:nvPr/>
+      </p:nvGrpSpPr>
+      <p:grpSpPr>
+        <a:xfrm>
+          <a:off x="0" y="0"/>
+          <a:ext cx="0" cy="0"/>
+          <a:chOff x="0" y="0"/>
+          <a:chExt cx="0" cy="0"/>
+        </a:xfrm>
+      </p:grpSpPr>
+      <p:sp>
+        <p:nvSpPr>
+          <p:cNvPr id="2" name="Titre 1">
+            <a:extLst>
+              <a:ext uri="{FF2B5EF4-FFF2-40B4-BE49-F238E27FC236}">
+                <a16:creationId xmlns:a16="http://schemas.microsoft.com/office/drawing/2014/main" id="{EAAA3A75-8D0E-397B-CFFF-10CA689EF39D}"/>
+              </a:ext>
+            </a:extLst>
+          </p:cNvPr>
+          <p:cNvSpPr>
+            <a:spLocks noGrp="1"/>
+          </p:cNvSpPr>
+          <p:nvPr>
+            <p:ph type="title"/>
+          </p:nvPr>
+        </p:nvSpPr>
+        <p:spPr/>
+        <p:txBody>
+          <a:bodyPr/>
+          <a:lstStyle/>
+          <a:p>
+            <a:r>
+              <a:rPr lang="fr-FR" dirty="0" err="1"/>
+              <a:t>Feature</a:t>
+            </a:r>
+            <a:r>
+              <a:rPr lang="fr-FR" dirty="0"/>
+              <a:t> importance LOCALE : 2 exemples</a:t>
+            </a:r>
+          </a:p>
+        </p:txBody>
+      </p:sp>
+      <p:sp>
+        <p:nvSpPr>
+          <p:cNvPr id="5" name="Espace réservé du numéro de diapositive 4">
+            <a:extLst>
+              <a:ext uri="{FF2B5EF4-FFF2-40B4-BE49-F238E27FC236}">
+                <a16:creationId xmlns:a16="http://schemas.microsoft.com/office/drawing/2014/main" id="{D16CC6DD-59A5-B9FD-984C-887541E1CDC9}"/>
+              </a:ext>
+            </a:extLst>
+          </p:cNvPr>
+          <p:cNvSpPr>
+            <a:spLocks noGrp="1"/>
+          </p:cNvSpPr>
+          <p:nvPr>
+            <p:ph type="sldNum" sz="quarter" idx="12"/>
+          </p:nvPr>
+        </p:nvSpPr>
+        <p:spPr/>
+        <p:txBody>
+          <a:bodyPr/>
+          <a:lstStyle/>
+          <a:p>
+            <a:fld id="{682819AE-B619-487D-9152-CB0FE4E70819}" type="slidenum">
+              <a:rPr lang="fr-FR" smtClean="0"/>
+              <a:t>14</a:t>
+            </a:fld>
+            <a:endParaRPr lang="fr-FR"/>
+          </a:p>
+        </p:txBody>
+      </p:sp>
+      <p:sp>
+        <p:nvSpPr>
+          <p:cNvPr id="4" name="ZoneTexte 3">
+            <a:extLst>
+              <a:ext uri="{FF2B5EF4-FFF2-40B4-BE49-F238E27FC236}">
+                <a16:creationId xmlns:a16="http://schemas.microsoft.com/office/drawing/2014/main" id="{FA3ABEB8-24B0-FFAC-9024-A9BEE82247D7}"/>
+              </a:ext>
+            </a:extLst>
+          </p:cNvPr>
+          <p:cNvSpPr txBox="1"/>
+          <p:nvPr/>
+        </p:nvSpPr>
+        <p:spPr>
+          <a:xfrm>
+            <a:off x="-1" y="6488668"/>
+            <a:ext cx="12192000" cy="338554"/>
+          </a:xfrm>
+          <a:prstGeom prst="rect">
+            <a:avLst/>
+          </a:prstGeom>
+          <a:noFill/>
+        </p:spPr>
+        <p:txBody>
+          <a:bodyPr wrap="square" rtlCol="0">
+            <a:spAutoFit/>
+          </a:bodyPr>
+          <a:lstStyle/>
+          <a:p>
+            <a:pPr algn="ctr"/>
+            <a:r>
+              <a:rPr lang="fr-FR" sz="1600" dirty="0">
+                <a:solidFill>
+                  <a:schemeClr val="bg1">
+                    <a:lumMod val="85000"/>
+                  </a:schemeClr>
+                </a:solidFill>
+              </a:rPr>
+              <a:t>Introduction</a:t>
+            </a:r>
+            <a:r>
+              <a:rPr lang="fr-FR" sz="1600" dirty="0"/>
+              <a:t> </a:t>
+            </a:r>
+            <a:r>
+              <a:rPr lang="fr-FR" sz="1600" dirty="0">
+                <a:solidFill>
+                  <a:schemeClr val="bg1">
+                    <a:lumMod val="85000"/>
+                  </a:schemeClr>
+                </a:solidFill>
+                <a:sym typeface="Wingdings" panose="05000000000000000000" pitchFamily="2" charset="2"/>
+              </a:rPr>
+              <a:t> Description  </a:t>
+            </a:r>
+            <a:r>
+              <a:rPr lang="fr-FR" sz="1600" dirty="0">
+                <a:solidFill>
+                  <a:schemeClr val="bg1">
+                    <a:lumMod val="85000"/>
+                  </a:schemeClr>
+                </a:solidFill>
+              </a:rPr>
+              <a:t>Analyses </a:t>
+            </a:r>
+            <a:r>
+              <a:rPr lang="fr-FR" sz="1600" dirty="0">
+                <a:solidFill>
+                  <a:schemeClr val="bg1">
+                    <a:lumMod val="85000"/>
+                  </a:schemeClr>
+                </a:solidFill>
+                <a:sym typeface="Wingdings" panose="05000000000000000000" pitchFamily="2" charset="2"/>
+              </a:rPr>
+              <a:t> </a:t>
+            </a:r>
+            <a:r>
+              <a:rPr lang="fr-FR" sz="1600" dirty="0" err="1">
+                <a:solidFill>
+                  <a:schemeClr val="bg1">
+                    <a:lumMod val="85000"/>
+                  </a:schemeClr>
+                </a:solidFill>
+                <a:sym typeface="Wingdings" panose="05000000000000000000" pitchFamily="2" charset="2"/>
+              </a:rPr>
+              <a:t>Feature</a:t>
+            </a:r>
+            <a:r>
+              <a:rPr lang="fr-FR" sz="1600" dirty="0">
+                <a:solidFill>
+                  <a:schemeClr val="bg1">
+                    <a:lumMod val="85000"/>
+                  </a:schemeClr>
+                </a:solidFill>
+                <a:sym typeface="Wingdings" panose="05000000000000000000" pitchFamily="2" charset="2"/>
+              </a:rPr>
+              <a:t> engineering  Modélisation </a:t>
+            </a:r>
+            <a:r>
+              <a:rPr lang="fr-FR" sz="1600" dirty="0" err="1">
+                <a:sym typeface="Wingdings" panose="05000000000000000000" pitchFamily="2" charset="2"/>
+              </a:rPr>
+              <a:t>Feature</a:t>
+            </a:r>
+            <a:r>
+              <a:rPr lang="fr-FR" sz="1600" dirty="0">
+                <a:sym typeface="Wingdings" panose="05000000000000000000" pitchFamily="2" charset="2"/>
+              </a:rPr>
+              <a:t> importance</a:t>
+            </a:r>
+            <a:r>
+              <a:rPr lang="fr-FR" sz="1600" dirty="0">
+                <a:solidFill>
+                  <a:schemeClr val="bg1">
+                    <a:lumMod val="85000"/>
+                  </a:schemeClr>
+                </a:solidFill>
+                <a:sym typeface="Wingdings" panose="05000000000000000000" pitchFamily="2" charset="2"/>
+              </a:rPr>
+              <a:t>  Déploiement  Suivi  Exemple</a:t>
+            </a:r>
+            <a:endParaRPr lang="fr-FR" sz="1600" dirty="0">
+              <a:solidFill>
+                <a:schemeClr val="bg1">
+                  <a:lumMod val="85000"/>
+                </a:schemeClr>
+              </a:solidFill>
+            </a:endParaRPr>
+          </a:p>
+        </p:txBody>
+      </p:sp>
+      <p:pic>
+        <p:nvPicPr>
+          <p:cNvPr id="11" name="Espace réservé du contenu 10" descr="Une image contenant texte, capture d’écran, Police, nombre&#10;&#10;Le contenu généré par l’IA peut être incorrect.">
+            <a:extLst>
+              <a:ext uri="{FF2B5EF4-FFF2-40B4-BE49-F238E27FC236}">
+                <a16:creationId xmlns:a16="http://schemas.microsoft.com/office/drawing/2014/main" id="{38C4A873-E85D-FB24-AEAB-AD908E6FDF59}"/>
+              </a:ext>
+            </a:extLst>
+          </p:cNvPr>
+          <p:cNvPicPr>
+            <a:picLocks noGrp="1" noChangeAspect="1"/>
+          </p:cNvPicPr>
+          <p:nvPr>
+            <p:ph sz="half" idx="1"/>
+          </p:nvPr>
+        </p:nvPicPr>
+        <p:blipFill>
+          <a:blip r:embed="rId2"/>
+          <a:stretch>
+            <a:fillRect/>
+          </a:stretch>
+        </p:blipFill>
+        <p:spPr>
+          <a:xfrm>
+            <a:off x="581025" y="2692742"/>
+            <a:ext cx="5422900" cy="2702828"/>
+          </a:xfrm>
+          <a:prstGeom prst="rect">
+            <a:avLst/>
+          </a:prstGeom>
+        </p:spPr>
+      </p:pic>
+      <p:pic>
+        <p:nvPicPr>
+          <p:cNvPr id="15" name="Espace réservé du contenu 14" descr="Une image contenant texte, Police, nombre, capture d’écran&#10;&#10;Le contenu généré par l’IA peut être incorrect.">
+            <a:extLst>
+              <a:ext uri="{FF2B5EF4-FFF2-40B4-BE49-F238E27FC236}">
+                <a16:creationId xmlns:a16="http://schemas.microsoft.com/office/drawing/2014/main" id="{8A73D401-659C-DF8D-2555-7AF5E7BEF5DB}"/>
+              </a:ext>
+            </a:extLst>
+          </p:cNvPr>
+          <p:cNvPicPr>
+            <a:picLocks noGrp="1" noChangeAspect="1"/>
+          </p:cNvPicPr>
+          <p:nvPr>
+            <p:ph sz="half" idx="2"/>
+          </p:nvPr>
+        </p:nvPicPr>
+        <p:blipFill>
+          <a:blip r:embed="rId3"/>
+          <a:stretch>
+            <a:fillRect/>
+          </a:stretch>
+        </p:blipFill>
+        <p:spPr>
+          <a:xfrm>
+            <a:off x="6188074" y="2811088"/>
+            <a:ext cx="5905106" cy="2424300"/>
+          </a:xfrm>
+          <a:prstGeom prst="rect">
+            <a:avLst/>
+          </a:prstGeom>
+        </p:spPr>
+      </p:pic>
+    </p:spTree>
+    <p:extLst>
+      <p:ext uri="{BB962C8B-B14F-4D97-AF65-F5344CB8AC3E}">
+        <p14:creationId xmlns:p14="http://schemas.microsoft.com/office/powerpoint/2010/main" val="1629864980"/>
+      </p:ext>
+    </p:extLst>
+  </p:cSld>
+  <p:clrMapOvr>
+    <a:masterClrMapping/>
+  </p:clrMapOvr>
+</p:sld>
+</file>
+
+<file path=ppt/slides/slide15.xml><?xml version="1.0" encoding="utf-8"?>
+<p:sld xmlns:a="http://schemas.openxmlformats.org/drawingml/2006/main" xmlns:r="http://schemas.openxmlformats.org/officeDocument/2006/relationships" xmlns:p="http://schemas.openxmlformats.org/presentationml/2006/main">
+  <p:cSld>
+    <p:spTree>
+      <p:nvGrpSpPr>
+        <p:cNvPr id="1" name="">
+          <a:extLst>
+            <a:ext uri="{FF2B5EF4-FFF2-40B4-BE49-F238E27FC236}">
+              <a16:creationId xmlns:a16="http://schemas.microsoft.com/office/drawing/2014/main" id="{50365F29-01CA-D06F-E417-8AE44BCACC8A}"/>
+            </a:ext>
+          </a:extLst>
+        </p:cNvPr>
+        <p:cNvGrpSpPr/>
+        <p:nvPr/>
+      </p:nvGrpSpPr>
+      <p:grpSpPr>
+        <a:xfrm>
+          <a:off x="0" y="0"/>
+          <a:ext cx="0" cy="0"/>
+          <a:chOff x="0" y="0"/>
+          <a:chExt cx="0" cy="0"/>
+        </a:xfrm>
+      </p:grpSpPr>
+      <p:sp>
+        <p:nvSpPr>
+          <p:cNvPr id="2" name="Titre 1">
+            <a:extLst>
+              <a:ext uri="{FF2B5EF4-FFF2-40B4-BE49-F238E27FC236}">
+                <a16:creationId xmlns:a16="http://schemas.microsoft.com/office/drawing/2014/main" id="{11A1B8F4-7242-A281-6431-FEBEF62AD3C1}"/>
+              </a:ext>
+            </a:extLst>
+          </p:cNvPr>
+          <p:cNvSpPr>
+            <a:spLocks noGrp="1"/>
+          </p:cNvSpPr>
+          <p:nvPr>
+            <p:ph type="title"/>
+          </p:nvPr>
+        </p:nvSpPr>
+        <p:spPr/>
+        <p:txBody>
+          <a:bodyPr/>
+          <a:lstStyle/>
+          <a:p>
+            <a:r>
+              <a:rPr lang="fr-FR" dirty="0"/>
+              <a:t>Déploiement :  gestion du projet avec </a:t>
+            </a:r>
+            <a:r>
+              <a:rPr lang="fr-FR" dirty="0" err="1"/>
+              <a:t>github</a:t>
+            </a:r>
+            <a:endParaRPr lang="fr-FR" dirty="0"/>
+          </a:p>
+        </p:txBody>
+      </p:sp>
+      <p:pic>
+        <p:nvPicPr>
+          <p:cNvPr id="23" name="Espace réservé du contenu 22" descr="Une image contenant texte, capture d’écran, logiciel&#10;&#10;Le contenu généré par l’IA peut être incorrect.">
+            <a:extLst>
+              <a:ext uri="{FF2B5EF4-FFF2-40B4-BE49-F238E27FC236}">
+                <a16:creationId xmlns:a16="http://schemas.microsoft.com/office/drawing/2014/main" id="{9666D7B2-AE82-2FDD-361F-BCE1E79C78B7}"/>
+              </a:ext>
+            </a:extLst>
+          </p:cNvPr>
+          <p:cNvPicPr>
+            <a:picLocks noGrp="1" noChangeAspect="1"/>
+          </p:cNvPicPr>
+          <p:nvPr>
+            <p:ph sz="half" idx="1"/>
+          </p:nvPr>
+        </p:nvPicPr>
+        <p:blipFill>
+          <a:blip r:embed="rId2"/>
+          <a:stretch>
+            <a:fillRect/>
+          </a:stretch>
+        </p:blipFill>
+        <p:spPr>
+          <a:xfrm>
+            <a:off x="1369132" y="2227263"/>
+            <a:ext cx="3846685" cy="3633787"/>
+          </a:xfrm>
+          <a:prstGeom prst="rect">
+            <a:avLst/>
+          </a:prstGeom>
+        </p:spPr>
+      </p:pic>
+      <p:pic>
+        <p:nvPicPr>
+          <p:cNvPr id="28" name="Espace réservé du contenu 27" descr="Une image contenant texte, capture d’écran, logiciel&#10;&#10;Le contenu généré par l’IA peut être incorrect.">
+            <a:extLst>
+              <a:ext uri="{FF2B5EF4-FFF2-40B4-BE49-F238E27FC236}">
+                <a16:creationId xmlns:a16="http://schemas.microsoft.com/office/drawing/2014/main" id="{309E4F38-8C53-AA48-A59C-A60DEFE5B9D6}"/>
+              </a:ext>
+            </a:extLst>
+          </p:cNvPr>
+          <p:cNvPicPr>
+            <a:picLocks noGrp="1" noChangeAspect="1"/>
+          </p:cNvPicPr>
+          <p:nvPr>
+            <p:ph sz="half" idx="2"/>
+          </p:nvPr>
+        </p:nvPicPr>
+        <p:blipFill>
+          <a:blip r:embed="rId3"/>
+          <a:stretch>
+            <a:fillRect/>
+          </a:stretch>
+        </p:blipFill>
+        <p:spPr>
+          <a:xfrm>
+            <a:off x="6282829" y="2227263"/>
+            <a:ext cx="5233392" cy="3633787"/>
+          </a:xfrm>
+          <a:prstGeom prst="rect">
+            <a:avLst/>
+          </a:prstGeom>
+        </p:spPr>
+      </p:pic>
+      <p:sp>
+        <p:nvSpPr>
+          <p:cNvPr id="5" name="Espace réservé du numéro de diapositive 4">
+            <a:extLst>
+              <a:ext uri="{FF2B5EF4-FFF2-40B4-BE49-F238E27FC236}">
+                <a16:creationId xmlns:a16="http://schemas.microsoft.com/office/drawing/2014/main" id="{C50C39AB-574E-F3CA-EDEB-A406827FF6E7}"/>
+              </a:ext>
+            </a:extLst>
+          </p:cNvPr>
+          <p:cNvSpPr>
+            <a:spLocks noGrp="1"/>
+          </p:cNvSpPr>
+          <p:nvPr>
+            <p:ph type="sldNum" sz="quarter" idx="12"/>
+          </p:nvPr>
+        </p:nvSpPr>
+        <p:spPr/>
+        <p:txBody>
+          <a:bodyPr/>
+          <a:lstStyle/>
+          <a:p>
+            <a:fld id="{682819AE-B619-487D-9152-CB0FE4E70819}" type="slidenum">
+              <a:rPr lang="fr-FR" smtClean="0"/>
+              <a:t>15</a:t>
+            </a:fld>
+            <a:endParaRPr lang="fr-FR"/>
+          </a:p>
+        </p:txBody>
+      </p:sp>
+      <p:sp>
+        <p:nvSpPr>
+          <p:cNvPr id="4" name="ZoneTexte 3">
+            <a:extLst>
+              <a:ext uri="{FF2B5EF4-FFF2-40B4-BE49-F238E27FC236}">
+                <a16:creationId xmlns:a16="http://schemas.microsoft.com/office/drawing/2014/main" id="{A189A0A6-0BF1-B626-B71C-9319B8BBBBDF}"/>
+              </a:ext>
+            </a:extLst>
+          </p:cNvPr>
+          <p:cNvSpPr txBox="1"/>
+          <p:nvPr/>
+        </p:nvSpPr>
+        <p:spPr>
+          <a:xfrm>
+            <a:off x="-1" y="6488668"/>
+            <a:ext cx="12192000" cy="338554"/>
+          </a:xfrm>
+          <a:prstGeom prst="rect">
+            <a:avLst/>
+          </a:prstGeom>
+          <a:noFill/>
+        </p:spPr>
+        <p:txBody>
+          <a:bodyPr wrap="square" rtlCol="0">
+            <a:spAutoFit/>
+          </a:bodyPr>
+          <a:lstStyle/>
+          <a:p>
+            <a:pPr algn="ctr"/>
+            <a:r>
+              <a:rPr lang="fr-FR" sz="1600" dirty="0">
+                <a:solidFill>
+                  <a:schemeClr val="bg1">
+                    <a:lumMod val="85000"/>
+                  </a:schemeClr>
+                </a:solidFill>
+              </a:rPr>
+              <a:t>Introduction</a:t>
+            </a:r>
+            <a:r>
+              <a:rPr lang="fr-FR" sz="1600" dirty="0"/>
+              <a:t> </a:t>
+            </a:r>
+            <a:r>
+              <a:rPr lang="fr-FR" sz="1600" dirty="0">
+                <a:solidFill>
+                  <a:schemeClr val="bg1">
+                    <a:lumMod val="85000"/>
+                  </a:schemeClr>
+                </a:solidFill>
+                <a:sym typeface="Wingdings" panose="05000000000000000000" pitchFamily="2" charset="2"/>
+              </a:rPr>
+              <a:t> Description  </a:t>
+            </a:r>
+            <a:r>
+              <a:rPr lang="fr-FR" sz="1600" dirty="0">
+                <a:solidFill>
+                  <a:schemeClr val="bg1">
+                    <a:lumMod val="85000"/>
+                  </a:schemeClr>
+                </a:solidFill>
+              </a:rPr>
+              <a:t>Analyses </a:t>
+            </a:r>
+            <a:r>
+              <a:rPr lang="fr-FR" sz="1600" dirty="0">
+                <a:solidFill>
+                  <a:schemeClr val="bg1">
+                    <a:lumMod val="85000"/>
+                  </a:schemeClr>
+                </a:solidFill>
+                <a:sym typeface="Wingdings" panose="05000000000000000000" pitchFamily="2" charset="2"/>
+              </a:rPr>
+              <a:t> </a:t>
+            </a:r>
+            <a:r>
+              <a:rPr lang="fr-FR" sz="1600" dirty="0" err="1">
+                <a:solidFill>
+                  <a:schemeClr val="bg1">
+                    <a:lumMod val="85000"/>
+                  </a:schemeClr>
+                </a:solidFill>
+                <a:sym typeface="Wingdings" panose="05000000000000000000" pitchFamily="2" charset="2"/>
+              </a:rPr>
+              <a:t>Feature</a:t>
+            </a:r>
+            <a:r>
+              <a:rPr lang="fr-FR" sz="1600" dirty="0">
+                <a:solidFill>
+                  <a:schemeClr val="bg1">
+                    <a:lumMod val="85000"/>
+                  </a:schemeClr>
+                </a:solidFill>
+                <a:sym typeface="Wingdings" panose="05000000000000000000" pitchFamily="2" charset="2"/>
+              </a:rPr>
+              <a:t> engineering  Modélisation </a:t>
+            </a:r>
+            <a:r>
+              <a:rPr lang="fr-FR" sz="1600" dirty="0" err="1">
+                <a:solidFill>
+                  <a:schemeClr val="bg1">
+                    <a:lumMod val="85000"/>
+                  </a:schemeClr>
+                </a:solidFill>
+                <a:sym typeface="Wingdings" panose="05000000000000000000" pitchFamily="2" charset="2"/>
+              </a:rPr>
+              <a:t>Feature</a:t>
+            </a:r>
+            <a:r>
+              <a:rPr lang="fr-FR" sz="1600" dirty="0">
+                <a:solidFill>
+                  <a:schemeClr val="bg1">
+                    <a:lumMod val="85000"/>
+                  </a:schemeClr>
+                </a:solidFill>
+                <a:sym typeface="Wingdings" panose="05000000000000000000" pitchFamily="2" charset="2"/>
+              </a:rPr>
+              <a:t> importance  </a:t>
+            </a:r>
+            <a:r>
+              <a:rPr lang="fr-FR" sz="1600" dirty="0">
+                <a:sym typeface="Wingdings" panose="05000000000000000000" pitchFamily="2" charset="2"/>
+              </a:rPr>
+              <a:t>Déploiement</a:t>
+            </a:r>
+            <a:r>
+              <a:rPr lang="fr-FR" sz="1600" dirty="0">
+                <a:solidFill>
+                  <a:schemeClr val="bg1">
+                    <a:lumMod val="85000"/>
+                  </a:schemeClr>
+                </a:solidFill>
+                <a:sym typeface="Wingdings" panose="05000000000000000000" pitchFamily="2" charset="2"/>
+              </a:rPr>
+              <a:t>  Suivi  Exemple</a:t>
+            </a:r>
+            <a:endParaRPr lang="fr-FR" sz="1600" dirty="0">
+              <a:solidFill>
+                <a:schemeClr val="bg1">
+                  <a:lumMod val="85000"/>
+                </a:schemeClr>
+              </a:solidFill>
+            </a:endParaRPr>
+          </a:p>
+        </p:txBody>
+      </p:sp>
+    </p:spTree>
+    <p:extLst>
+      <p:ext uri="{BB962C8B-B14F-4D97-AF65-F5344CB8AC3E}">
+        <p14:creationId xmlns:p14="http://schemas.microsoft.com/office/powerpoint/2010/main" val="412437908"/>
+      </p:ext>
+    </p:extLst>
+  </p:cSld>
+  <p:clrMapOvr>
+    <a:masterClrMapping/>
+  </p:clrMapOvr>
+</p:sld>
+</file>
+
+<file path=ppt/slides/slide16.xml><?xml version="1.0" encoding="utf-8"?>
+<p:sld xmlns:a="http://schemas.openxmlformats.org/drawingml/2006/main" xmlns:r="http://schemas.openxmlformats.org/officeDocument/2006/relationships" xmlns:p="http://schemas.openxmlformats.org/presentationml/2006/main">
+  <p:cSld>
+    <p:spTree>
+      <p:nvGrpSpPr>
+        <p:cNvPr id="1" name="">
+          <a:extLst>
+            <a:ext uri="{FF2B5EF4-FFF2-40B4-BE49-F238E27FC236}">
+              <a16:creationId xmlns:a16="http://schemas.microsoft.com/office/drawing/2014/main" id="{F6B2D199-30D5-CF39-D420-D3FFAF21CEEF}"/>
+            </a:ext>
+          </a:extLst>
+        </p:cNvPr>
+        <p:cNvGrpSpPr/>
+        <p:nvPr/>
+      </p:nvGrpSpPr>
+      <p:grpSpPr>
+        <a:xfrm>
+          <a:off x="0" y="0"/>
+          <a:ext cx="0" cy="0"/>
+          <a:chOff x="0" y="0"/>
+          <a:chExt cx="0" cy="0"/>
+        </a:xfrm>
+      </p:grpSpPr>
+      <p:sp>
+        <p:nvSpPr>
+          <p:cNvPr id="2" name="Titre 1">
+            <a:extLst>
+              <a:ext uri="{FF2B5EF4-FFF2-40B4-BE49-F238E27FC236}">
+                <a16:creationId xmlns:a16="http://schemas.microsoft.com/office/drawing/2014/main" id="{075E2ED3-268E-A67B-84B5-D43B59BDC531}"/>
+              </a:ext>
+            </a:extLst>
+          </p:cNvPr>
+          <p:cNvSpPr>
+            <a:spLocks noGrp="1"/>
+          </p:cNvSpPr>
+          <p:nvPr>
+            <p:ph type="title"/>
+          </p:nvPr>
+        </p:nvSpPr>
+        <p:spPr/>
+        <p:txBody>
+          <a:bodyPr/>
+          <a:lstStyle/>
+          <a:p>
+            <a:r>
+              <a:rPr lang="fr-FR" dirty="0"/>
+              <a:t>Déploiement :  utilisation de </a:t>
+            </a:r>
+            <a:r>
+              <a:rPr lang="fr-FR" dirty="0" err="1"/>
+              <a:t>render</a:t>
+            </a:r>
+            <a:endParaRPr lang="fr-FR" dirty="0"/>
+          </a:p>
+        </p:txBody>
+      </p:sp>
+      <p:sp>
+        <p:nvSpPr>
+          <p:cNvPr id="5" name="Espace réservé du numéro de diapositive 4">
+            <a:extLst>
+              <a:ext uri="{FF2B5EF4-FFF2-40B4-BE49-F238E27FC236}">
+                <a16:creationId xmlns:a16="http://schemas.microsoft.com/office/drawing/2014/main" id="{52BD1904-6BB7-93C1-CB4D-E03A225179CD}"/>
+              </a:ext>
+            </a:extLst>
+          </p:cNvPr>
+          <p:cNvSpPr>
+            <a:spLocks noGrp="1"/>
+          </p:cNvSpPr>
+          <p:nvPr>
+            <p:ph type="sldNum" sz="quarter" idx="12"/>
+          </p:nvPr>
+        </p:nvSpPr>
+        <p:spPr/>
+        <p:txBody>
+          <a:bodyPr/>
+          <a:lstStyle/>
+          <a:p>
+            <a:fld id="{682819AE-B619-487D-9152-CB0FE4E70819}" type="slidenum">
+              <a:rPr lang="fr-FR" smtClean="0"/>
+              <a:t>16</a:t>
+            </a:fld>
+            <a:endParaRPr lang="fr-FR"/>
+          </a:p>
+        </p:txBody>
+      </p:sp>
+      <p:sp>
+        <p:nvSpPr>
+          <p:cNvPr id="4" name="ZoneTexte 3">
+            <a:extLst>
+              <a:ext uri="{FF2B5EF4-FFF2-40B4-BE49-F238E27FC236}">
+                <a16:creationId xmlns:a16="http://schemas.microsoft.com/office/drawing/2014/main" id="{36654E12-7A10-4D59-F24C-E6038C636168}"/>
+              </a:ext>
+            </a:extLst>
+          </p:cNvPr>
+          <p:cNvSpPr txBox="1"/>
+          <p:nvPr/>
+        </p:nvSpPr>
+        <p:spPr>
+          <a:xfrm>
+            <a:off x="-1" y="6488668"/>
+            <a:ext cx="12192000" cy="338554"/>
+          </a:xfrm>
+          <a:prstGeom prst="rect">
+            <a:avLst/>
+          </a:prstGeom>
+          <a:noFill/>
+        </p:spPr>
+        <p:txBody>
+          <a:bodyPr wrap="square" rtlCol="0">
+            <a:spAutoFit/>
+          </a:bodyPr>
+          <a:lstStyle/>
+          <a:p>
+            <a:pPr algn="ctr"/>
+            <a:r>
+              <a:rPr lang="fr-FR" sz="1600" dirty="0">
+                <a:solidFill>
+                  <a:schemeClr val="bg1">
+                    <a:lumMod val="85000"/>
+                  </a:schemeClr>
+                </a:solidFill>
+              </a:rPr>
+              <a:t>Introduction</a:t>
+            </a:r>
+            <a:r>
+              <a:rPr lang="fr-FR" sz="1600" dirty="0"/>
+              <a:t> </a:t>
+            </a:r>
+            <a:r>
+              <a:rPr lang="fr-FR" sz="1600" dirty="0">
+                <a:solidFill>
+                  <a:schemeClr val="bg1">
+                    <a:lumMod val="85000"/>
+                  </a:schemeClr>
+                </a:solidFill>
+                <a:sym typeface="Wingdings" panose="05000000000000000000" pitchFamily="2" charset="2"/>
+              </a:rPr>
+              <a:t> Description  </a:t>
+            </a:r>
+            <a:r>
+              <a:rPr lang="fr-FR" sz="1600" dirty="0">
+                <a:solidFill>
+                  <a:schemeClr val="bg1">
+                    <a:lumMod val="85000"/>
+                  </a:schemeClr>
+                </a:solidFill>
+              </a:rPr>
+              <a:t>Analyses </a:t>
+            </a:r>
+            <a:r>
+              <a:rPr lang="fr-FR" sz="1600" dirty="0">
+                <a:solidFill>
+                  <a:schemeClr val="bg1">
+                    <a:lumMod val="85000"/>
+                  </a:schemeClr>
+                </a:solidFill>
+                <a:sym typeface="Wingdings" panose="05000000000000000000" pitchFamily="2" charset="2"/>
+              </a:rPr>
+              <a:t> </a:t>
+            </a:r>
+            <a:r>
+              <a:rPr lang="fr-FR" sz="1600" dirty="0" err="1">
+                <a:solidFill>
+                  <a:schemeClr val="bg1">
+                    <a:lumMod val="85000"/>
+                  </a:schemeClr>
+                </a:solidFill>
+                <a:sym typeface="Wingdings" panose="05000000000000000000" pitchFamily="2" charset="2"/>
+              </a:rPr>
+              <a:t>Feature</a:t>
+            </a:r>
+            <a:r>
+              <a:rPr lang="fr-FR" sz="1600" dirty="0">
+                <a:solidFill>
+                  <a:schemeClr val="bg1">
+                    <a:lumMod val="85000"/>
+                  </a:schemeClr>
+                </a:solidFill>
+                <a:sym typeface="Wingdings" panose="05000000000000000000" pitchFamily="2" charset="2"/>
+              </a:rPr>
+              <a:t> engineering  Modélisation </a:t>
+            </a:r>
+            <a:r>
+              <a:rPr lang="fr-FR" sz="1600" dirty="0" err="1">
+                <a:solidFill>
+                  <a:schemeClr val="bg1">
+                    <a:lumMod val="85000"/>
+                  </a:schemeClr>
+                </a:solidFill>
+                <a:sym typeface="Wingdings" panose="05000000000000000000" pitchFamily="2" charset="2"/>
+              </a:rPr>
+              <a:t>Feature</a:t>
+            </a:r>
+            <a:r>
+              <a:rPr lang="fr-FR" sz="1600" dirty="0">
+                <a:solidFill>
+                  <a:schemeClr val="bg1">
+                    <a:lumMod val="85000"/>
+                  </a:schemeClr>
+                </a:solidFill>
+                <a:sym typeface="Wingdings" panose="05000000000000000000" pitchFamily="2" charset="2"/>
+              </a:rPr>
+              <a:t> importance  </a:t>
+            </a:r>
+            <a:r>
+              <a:rPr lang="fr-FR" sz="1600" dirty="0">
+                <a:sym typeface="Wingdings" panose="05000000000000000000" pitchFamily="2" charset="2"/>
+              </a:rPr>
+              <a:t>Déploiement</a:t>
+            </a:r>
+            <a:r>
+              <a:rPr lang="fr-FR" sz="1600" dirty="0">
+                <a:solidFill>
+                  <a:schemeClr val="bg1">
+                    <a:lumMod val="85000"/>
+                  </a:schemeClr>
+                </a:solidFill>
+                <a:sym typeface="Wingdings" panose="05000000000000000000" pitchFamily="2" charset="2"/>
+              </a:rPr>
+              <a:t>  Suivi  Exemple</a:t>
+            </a:r>
+            <a:endParaRPr lang="fr-FR" sz="1600" dirty="0">
+              <a:solidFill>
+                <a:schemeClr val="bg1">
+                  <a:lumMod val="85000"/>
+                </a:schemeClr>
+              </a:solidFill>
+            </a:endParaRPr>
+          </a:p>
+        </p:txBody>
+      </p:sp>
+      <p:pic>
+        <p:nvPicPr>
+          <p:cNvPr id="12" name="Espace réservé du contenu 11" descr="Une image contenant texte, capture d’écran, Police&#10;&#10;Le contenu généré par l’IA peut être incorrect.">
+            <a:extLst>
+              <a:ext uri="{FF2B5EF4-FFF2-40B4-BE49-F238E27FC236}">
+                <a16:creationId xmlns:a16="http://schemas.microsoft.com/office/drawing/2014/main" id="{AE6C4AB1-4702-5C28-12F6-BF97E225277E}"/>
+              </a:ext>
+            </a:extLst>
+          </p:cNvPr>
+          <p:cNvPicPr>
+            <a:picLocks noGrp="1" noChangeAspect="1"/>
+          </p:cNvPicPr>
+          <p:nvPr>
+            <p:ph sz="half" idx="1"/>
+          </p:nvPr>
+        </p:nvPicPr>
+        <p:blipFill>
+          <a:blip r:embed="rId2"/>
+          <a:stretch>
+            <a:fillRect/>
+          </a:stretch>
+        </p:blipFill>
+        <p:spPr>
+          <a:xfrm>
+            <a:off x="581025" y="2751808"/>
+            <a:ext cx="5422900" cy="1204133"/>
+          </a:xfrm>
+          <a:prstGeom prst="rect">
+            <a:avLst/>
+          </a:prstGeom>
+        </p:spPr>
+      </p:pic>
+      <p:pic>
+        <p:nvPicPr>
+          <p:cNvPr id="10" name="Espace réservé du contenu 9" descr="Une image contenant texte, capture d’écran, logiciel&#10;&#10;Le contenu généré par l’IA peut être incorrect.">
+            <a:extLst>
+              <a:ext uri="{FF2B5EF4-FFF2-40B4-BE49-F238E27FC236}">
+                <a16:creationId xmlns:a16="http://schemas.microsoft.com/office/drawing/2014/main" id="{CB6011F3-9DA9-CF30-8AFC-69AA9D8908EE}"/>
+              </a:ext>
+            </a:extLst>
+          </p:cNvPr>
+          <p:cNvPicPr>
+            <a:picLocks noGrp="1" noChangeAspect="1"/>
+          </p:cNvPicPr>
+          <p:nvPr>
+            <p:ph sz="half" idx="2"/>
+          </p:nvPr>
+        </p:nvPicPr>
+        <p:blipFill>
+          <a:blip r:embed="rId3"/>
+          <a:stretch>
+            <a:fillRect/>
+          </a:stretch>
+        </p:blipFill>
+        <p:spPr>
+          <a:xfrm>
+            <a:off x="6188075" y="3022039"/>
+            <a:ext cx="5422900" cy="2044234"/>
+          </a:xfrm>
+          <a:prstGeom prst="rect">
+            <a:avLst/>
+          </a:prstGeom>
+        </p:spPr>
+      </p:pic>
+      <p:pic>
+        <p:nvPicPr>
+          <p:cNvPr id="14" name="Image 13" descr="Une image contenant texte, capture d’écran, Police&#10;&#10;Le contenu généré par l’IA peut être incorrect.">
+            <a:extLst>
+              <a:ext uri="{FF2B5EF4-FFF2-40B4-BE49-F238E27FC236}">
+                <a16:creationId xmlns:a16="http://schemas.microsoft.com/office/drawing/2014/main" id="{229879B0-38B8-3083-A768-C3C0ED1BB286}"/>
+              </a:ext>
+            </a:extLst>
+          </p:cNvPr>
+          <p:cNvPicPr>
+            <a:picLocks noChangeAspect="1"/>
+          </p:cNvPicPr>
+          <p:nvPr/>
+        </p:nvPicPr>
+        <p:blipFill>
+          <a:blip r:embed="rId4"/>
+          <a:stretch>
+            <a:fillRect/>
+          </a:stretch>
+        </p:blipFill>
+        <p:spPr>
+          <a:xfrm>
+            <a:off x="581025" y="3955941"/>
+            <a:ext cx="5422900" cy="1489146"/>
+          </a:xfrm>
+          <a:prstGeom prst="rect">
+            <a:avLst/>
+          </a:prstGeom>
+        </p:spPr>
+      </p:pic>
+    </p:spTree>
+    <p:extLst>
+      <p:ext uri="{BB962C8B-B14F-4D97-AF65-F5344CB8AC3E}">
+        <p14:creationId xmlns:p14="http://schemas.microsoft.com/office/powerpoint/2010/main" val="4026865405"/>
+      </p:ext>
+    </p:extLst>
+  </p:cSld>
+  <p:clrMapOvr>
+    <a:masterClrMapping/>
+  </p:clrMapOvr>
+</p:sld>
+</file>
+
+<file path=ppt/slides/slide17.xml><?xml version="1.0" encoding="utf-8"?>
+<p:sld xmlns:a="http://schemas.openxmlformats.org/drawingml/2006/main" xmlns:r="http://schemas.openxmlformats.org/officeDocument/2006/relationships" xmlns:p="http://schemas.openxmlformats.org/presentationml/2006/main">
+  <p:cSld>
+    <p:spTree>
+      <p:nvGrpSpPr>
+        <p:cNvPr id="1" name="">
+          <a:extLst>
+            <a:ext uri="{FF2B5EF4-FFF2-40B4-BE49-F238E27FC236}">
+              <a16:creationId xmlns:a16="http://schemas.microsoft.com/office/drawing/2014/main" id="{361981A1-FB26-A045-3541-CCA44EA46F38}"/>
+            </a:ext>
+          </a:extLst>
+        </p:cNvPr>
+        <p:cNvGrpSpPr/>
+        <p:nvPr/>
+      </p:nvGrpSpPr>
+      <p:grpSpPr>
+        <a:xfrm>
+          <a:off x="0" y="0"/>
+          <a:ext cx="0" cy="0"/>
+          <a:chOff x="0" y="0"/>
+          <a:chExt cx="0" cy="0"/>
+        </a:xfrm>
+      </p:grpSpPr>
+      <p:sp>
+        <p:nvSpPr>
+          <p:cNvPr id="2" name="Titre 1">
+            <a:extLst>
+              <a:ext uri="{FF2B5EF4-FFF2-40B4-BE49-F238E27FC236}">
+                <a16:creationId xmlns:a16="http://schemas.microsoft.com/office/drawing/2014/main" id="{49608B09-8D65-8A02-FF2A-090DB1AD3174}"/>
+              </a:ext>
+            </a:extLst>
+          </p:cNvPr>
+          <p:cNvSpPr>
+            <a:spLocks noGrp="1"/>
+          </p:cNvSpPr>
+          <p:nvPr>
+            <p:ph type="title"/>
+          </p:nvPr>
+        </p:nvSpPr>
+        <p:spPr/>
+        <p:txBody>
+          <a:bodyPr/>
+          <a:lstStyle/>
+          <a:p>
+            <a:r>
+              <a:rPr lang="fr-FR" dirty="0"/>
+              <a:t>Déploiement : schéma explicatif</a:t>
+            </a:r>
+          </a:p>
+        </p:txBody>
+      </p:sp>
+      <p:sp>
+        <p:nvSpPr>
+          <p:cNvPr id="5" name="Espace réservé du numéro de diapositive 4">
+            <a:extLst>
+              <a:ext uri="{FF2B5EF4-FFF2-40B4-BE49-F238E27FC236}">
+                <a16:creationId xmlns:a16="http://schemas.microsoft.com/office/drawing/2014/main" id="{967B2AF0-F616-82DC-5A03-3A7164B54F84}"/>
+              </a:ext>
+            </a:extLst>
+          </p:cNvPr>
+          <p:cNvSpPr>
+            <a:spLocks noGrp="1"/>
+          </p:cNvSpPr>
+          <p:nvPr>
+            <p:ph type="sldNum" sz="quarter" idx="12"/>
+          </p:nvPr>
+        </p:nvSpPr>
+        <p:spPr/>
+        <p:txBody>
+          <a:bodyPr/>
+          <a:lstStyle/>
+          <a:p>
+            <a:fld id="{682819AE-B619-487D-9152-CB0FE4E70819}" type="slidenum">
+              <a:rPr lang="fr-FR" smtClean="0"/>
+              <a:t>17</a:t>
+            </a:fld>
+            <a:endParaRPr lang="fr-FR"/>
+          </a:p>
+        </p:txBody>
+      </p:sp>
+      <p:sp>
+        <p:nvSpPr>
+          <p:cNvPr id="4" name="ZoneTexte 3">
+            <a:extLst>
+              <a:ext uri="{FF2B5EF4-FFF2-40B4-BE49-F238E27FC236}">
+                <a16:creationId xmlns:a16="http://schemas.microsoft.com/office/drawing/2014/main" id="{93F76CA2-D239-5527-6351-05D0CFE5CB00}"/>
+              </a:ext>
+            </a:extLst>
+          </p:cNvPr>
+          <p:cNvSpPr txBox="1"/>
+          <p:nvPr/>
+        </p:nvSpPr>
+        <p:spPr>
+          <a:xfrm>
+            <a:off x="-1" y="6488668"/>
+            <a:ext cx="12192000" cy="338554"/>
+          </a:xfrm>
+          <a:prstGeom prst="rect">
+            <a:avLst/>
+          </a:prstGeom>
+          <a:noFill/>
+        </p:spPr>
+        <p:txBody>
+          <a:bodyPr wrap="square" rtlCol="0">
+            <a:spAutoFit/>
+          </a:bodyPr>
+          <a:lstStyle/>
+          <a:p>
+            <a:pPr algn="ctr"/>
+            <a:r>
+              <a:rPr lang="fr-FR" sz="1600" dirty="0">
+                <a:solidFill>
+                  <a:schemeClr val="bg1">
+                    <a:lumMod val="85000"/>
+                  </a:schemeClr>
+                </a:solidFill>
+              </a:rPr>
+              <a:t>Introduction</a:t>
+            </a:r>
+            <a:r>
+              <a:rPr lang="fr-FR" sz="1600" dirty="0"/>
+              <a:t> </a:t>
+            </a:r>
+            <a:r>
+              <a:rPr lang="fr-FR" sz="1600" dirty="0">
+                <a:solidFill>
+                  <a:schemeClr val="bg1">
+                    <a:lumMod val="85000"/>
+                  </a:schemeClr>
+                </a:solidFill>
+                <a:sym typeface="Wingdings" panose="05000000000000000000" pitchFamily="2" charset="2"/>
+              </a:rPr>
+              <a:t> Description  </a:t>
+            </a:r>
+            <a:r>
+              <a:rPr lang="fr-FR" sz="1600" dirty="0">
+                <a:solidFill>
+                  <a:schemeClr val="bg1">
+                    <a:lumMod val="85000"/>
+                  </a:schemeClr>
+                </a:solidFill>
+              </a:rPr>
+              <a:t>Analyses </a:t>
+            </a:r>
+            <a:r>
+              <a:rPr lang="fr-FR" sz="1600" dirty="0">
+                <a:solidFill>
+                  <a:schemeClr val="bg1">
+                    <a:lumMod val="85000"/>
+                  </a:schemeClr>
+                </a:solidFill>
+                <a:sym typeface="Wingdings" panose="05000000000000000000" pitchFamily="2" charset="2"/>
+              </a:rPr>
+              <a:t> </a:t>
+            </a:r>
+            <a:r>
+              <a:rPr lang="fr-FR" sz="1600" dirty="0" err="1">
+                <a:solidFill>
+                  <a:schemeClr val="bg1">
+                    <a:lumMod val="85000"/>
+                  </a:schemeClr>
+                </a:solidFill>
+                <a:sym typeface="Wingdings" panose="05000000000000000000" pitchFamily="2" charset="2"/>
+              </a:rPr>
+              <a:t>Feature</a:t>
+            </a:r>
+            <a:r>
+              <a:rPr lang="fr-FR" sz="1600" dirty="0">
+                <a:solidFill>
+                  <a:schemeClr val="bg1">
+                    <a:lumMod val="85000"/>
+                  </a:schemeClr>
+                </a:solidFill>
+                <a:sym typeface="Wingdings" panose="05000000000000000000" pitchFamily="2" charset="2"/>
+              </a:rPr>
+              <a:t> engineering  Modélisation </a:t>
+            </a:r>
+            <a:r>
+              <a:rPr lang="fr-FR" sz="1600" dirty="0" err="1">
+                <a:solidFill>
+                  <a:schemeClr val="bg1">
+                    <a:lumMod val="85000"/>
+                  </a:schemeClr>
+                </a:solidFill>
+                <a:sym typeface="Wingdings" panose="05000000000000000000" pitchFamily="2" charset="2"/>
+              </a:rPr>
+              <a:t>Feature</a:t>
+            </a:r>
+            <a:r>
+              <a:rPr lang="fr-FR" sz="1600" dirty="0">
+                <a:solidFill>
+                  <a:schemeClr val="bg1">
+                    <a:lumMod val="85000"/>
+                  </a:schemeClr>
+                </a:solidFill>
+                <a:sym typeface="Wingdings" panose="05000000000000000000" pitchFamily="2" charset="2"/>
+              </a:rPr>
+              <a:t> importance  </a:t>
+            </a:r>
+            <a:r>
+              <a:rPr lang="fr-FR" sz="1600" dirty="0">
+                <a:sym typeface="Wingdings" panose="05000000000000000000" pitchFamily="2" charset="2"/>
+              </a:rPr>
+              <a:t>Déploiement</a:t>
+            </a:r>
+            <a:r>
+              <a:rPr lang="fr-FR" sz="1600" dirty="0">
+                <a:solidFill>
+                  <a:schemeClr val="bg1">
+                    <a:lumMod val="85000"/>
+                  </a:schemeClr>
+                </a:solidFill>
+                <a:sym typeface="Wingdings" panose="05000000000000000000" pitchFamily="2" charset="2"/>
+              </a:rPr>
+              <a:t>  Suivi  Exemple</a:t>
+            </a:r>
+            <a:endParaRPr lang="fr-FR" sz="1600" dirty="0">
+              <a:solidFill>
+                <a:schemeClr val="bg1">
+                  <a:lumMod val="85000"/>
+                </a:schemeClr>
+              </a:solidFill>
+            </a:endParaRPr>
+          </a:p>
+        </p:txBody>
+      </p:sp>
+      <p:sp>
+        <p:nvSpPr>
+          <p:cNvPr id="3" name="ZoneTexte 2">
+            <a:extLst>
+              <a:ext uri="{FF2B5EF4-FFF2-40B4-BE49-F238E27FC236}">
+                <a16:creationId xmlns:a16="http://schemas.microsoft.com/office/drawing/2014/main" id="{5FEDC1EF-738F-E90C-B007-5F289D4255C7}"/>
+              </a:ext>
+            </a:extLst>
+          </p:cNvPr>
+          <p:cNvSpPr txBox="1"/>
+          <p:nvPr/>
+        </p:nvSpPr>
+        <p:spPr>
+          <a:xfrm>
+            <a:off x="581192" y="3779146"/>
+            <a:ext cx="1274708" cy="646331"/>
+          </a:xfrm>
+          <a:prstGeom prst="rect">
+            <a:avLst/>
+          </a:prstGeom>
+          <a:solidFill>
+            <a:srgbClr val="FFC000"/>
+          </a:solidFill>
+          <a:ln w="38100">
+            <a:solidFill>
+              <a:schemeClr val="tx1"/>
+            </a:solidFill>
+          </a:ln>
+        </p:spPr>
+        <p:txBody>
+          <a:bodyPr wrap="none" rtlCol="0">
+            <a:spAutoFit/>
+          </a:bodyPr>
+          <a:lstStyle/>
+          <a:p>
+            <a:r>
+              <a:rPr lang="fr-FR" dirty="0"/>
+              <a:t>Notebook</a:t>
+            </a:r>
+          </a:p>
+          <a:p>
+            <a:r>
+              <a:rPr lang="fr-FR" dirty="0"/>
+              <a:t>préparation</a:t>
+            </a:r>
+          </a:p>
+        </p:txBody>
+      </p:sp>
+      <p:sp>
+        <p:nvSpPr>
+          <p:cNvPr id="6" name="ZoneTexte 5">
+            <a:extLst>
+              <a:ext uri="{FF2B5EF4-FFF2-40B4-BE49-F238E27FC236}">
+                <a16:creationId xmlns:a16="http://schemas.microsoft.com/office/drawing/2014/main" id="{5B8CD57E-B982-8F7F-269F-A16396759DE2}"/>
+              </a:ext>
+            </a:extLst>
+          </p:cNvPr>
+          <p:cNvSpPr txBox="1"/>
+          <p:nvPr/>
+        </p:nvSpPr>
+        <p:spPr>
+          <a:xfrm>
+            <a:off x="2788024" y="3779146"/>
+            <a:ext cx="1375698" cy="646331"/>
+          </a:xfrm>
+          <a:prstGeom prst="rect">
+            <a:avLst/>
+          </a:prstGeom>
+          <a:solidFill>
+            <a:srgbClr val="FFC000"/>
+          </a:solidFill>
+          <a:ln w="38100">
+            <a:solidFill>
+              <a:schemeClr val="tx1"/>
+            </a:solidFill>
+          </a:ln>
+        </p:spPr>
+        <p:txBody>
+          <a:bodyPr wrap="none" rtlCol="0">
+            <a:spAutoFit/>
+          </a:bodyPr>
+          <a:lstStyle/>
+          <a:p>
+            <a:r>
+              <a:rPr lang="fr-FR" dirty="0"/>
+              <a:t>Notebook</a:t>
+            </a:r>
+          </a:p>
+          <a:p>
+            <a:r>
+              <a:rPr lang="fr-FR" dirty="0"/>
+              <a:t>modélisation</a:t>
+            </a:r>
+          </a:p>
+        </p:txBody>
+      </p:sp>
+      <p:sp>
+        <p:nvSpPr>
+          <p:cNvPr id="7" name="ZoneTexte 6">
+            <a:extLst>
+              <a:ext uri="{FF2B5EF4-FFF2-40B4-BE49-F238E27FC236}">
+                <a16:creationId xmlns:a16="http://schemas.microsoft.com/office/drawing/2014/main" id="{B7F0906A-1A32-706F-8BB2-0215ACF1E9DA}"/>
+              </a:ext>
+            </a:extLst>
+          </p:cNvPr>
+          <p:cNvSpPr txBox="1"/>
+          <p:nvPr/>
+        </p:nvSpPr>
+        <p:spPr>
+          <a:xfrm>
+            <a:off x="2808445" y="2193553"/>
+            <a:ext cx="1334853" cy="369332"/>
+          </a:xfrm>
+          <a:prstGeom prst="rect">
+            <a:avLst/>
+          </a:prstGeom>
+          <a:solidFill>
+            <a:srgbClr val="92D050"/>
+          </a:solidFill>
+          <a:ln w="38100">
+            <a:solidFill>
+              <a:schemeClr val="tx1"/>
+            </a:solidFill>
+          </a:ln>
+        </p:spPr>
+        <p:txBody>
+          <a:bodyPr wrap="none" rtlCol="0">
+            <a:spAutoFit/>
+          </a:bodyPr>
+          <a:lstStyle/>
+          <a:p>
+            <a:r>
+              <a:rPr lang="fr-FR" dirty="0"/>
+              <a:t>Test unitaire</a:t>
+            </a:r>
+          </a:p>
+        </p:txBody>
+      </p:sp>
+      <p:sp>
+        <p:nvSpPr>
+          <p:cNvPr id="8" name="ZoneTexte 7">
+            <a:extLst>
+              <a:ext uri="{FF2B5EF4-FFF2-40B4-BE49-F238E27FC236}">
+                <a16:creationId xmlns:a16="http://schemas.microsoft.com/office/drawing/2014/main" id="{16EA6A80-99FF-5B77-A66A-125C5E114544}"/>
+              </a:ext>
+            </a:extLst>
+          </p:cNvPr>
+          <p:cNvSpPr txBox="1"/>
+          <p:nvPr/>
+        </p:nvSpPr>
+        <p:spPr>
+          <a:xfrm>
+            <a:off x="2711079" y="5641738"/>
+            <a:ext cx="1529586" cy="369332"/>
+          </a:xfrm>
+          <a:prstGeom prst="rect">
+            <a:avLst/>
+          </a:prstGeom>
+          <a:solidFill>
+            <a:srgbClr val="92D050"/>
+          </a:solidFill>
+          <a:ln w="38100">
+            <a:solidFill>
+              <a:schemeClr val="tx1"/>
+            </a:solidFill>
+          </a:ln>
+        </p:spPr>
+        <p:txBody>
+          <a:bodyPr wrap="none" rtlCol="0">
+            <a:spAutoFit/>
+          </a:bodyPr>
+          <a:lstStyle/>
+          <a:p>
+            <a:r>
+              <a:rPr lang="fr-FR" dirty="0"/>
+              <a:t>Données tests</a:t>
+            </a:r>
+          </a:p>
+        </p:txBody>
+      </p:sp>
+      <p:sp>
+        <p:nvSpPr>
+          <p:cNvPr id="10" name="ZoneTexte 9">
+            <a:extLst>
+              <a:ext uri="{FF2B5EF4-FFF2-40B4-BE49-F238E27FC236}">
+                <a16:creationId xmlns:a16="http://schemas.microsoft.com/office/drawing/2014/main" id="{6DCD479E-B206-CF53-F344-CD5F0AF090CF}"/>
+              </a:ext>
+            </a:extLst>
+          </p:cNvPr>
+          <p:cNvSpPr txBox="1"/>
+          <p:nvPr/>
+        </p:nvSpPr>
+        <p:spPr>
+          <a:xfrm>
+            <a:off x="5372678" y="2896392"/>
+            <a:ext cx="880369" cy="369332"/>
+          </a:xfrm>
+          <a:prstGeom prst="rect">
+            <a:avLst/>
+          </a:prstGeom>
+          <a:solidFill>
+            <a:srgbClr val="FFFF00"/>
+          </a:solidFill>
+          <a:ln w="38100">
+            <a:solidFill>
+              <a:schemeClr val="tx1"/>
+            </a:solidFill>
+          </a:ln>
+        </p:spPr>
+        <p:txBody>
+          <a:bodyPr wrap="none" rtlCol="0">
+            <a:spAutoFit/>
+          </a:bodyPr>
+          <a:lstStyle/>
+          <a:p>
+            <a:r>
+              <a:rPr lang="fr-FR" dirty="0"/>
+              <a:t>Modèle</a:t>
+            </a:r>
+          </a:p>
+        </p:txBody>
+      </p:sp>
+      <p:sp>
+        <p:nvSpPr>
+          <p:cNvPr id="11" name="ZoneTexte 10">
+            <a:extLst>
+              <a:ext uri="{FF2B5EF4-FFF2-40B4-BE49-F238E27FC236}">
+                <a16:creationId xmlns:a16="http://schemas.microsoft.com/office/drawing/2014/main" id="{28DEC784-B34B-7B18-2949-0C2931D9ADCD}"/>
+              </a:ext>
+            </a:extLst>
+          </p:cNvPr>
+          <p:cNvSpPr txBox="1"/>
+          <p:nvPr/>
+        </p:nvSpPr>
+        <p:spPr>
+          <a:xfrm>
+            <a:off x="5324620" y="3571016"/>
+            <a:ext cx="976486" cy="369332"/>
+          </a:xfrm>
+          <a:prstGeom prst="rect">
+            <a:avLst/>
+          </a:prstGeom>
+          <a:solidFill>
+            <a:srgbClr val="FFFF00"/>
+          </a:solidFill>
+          <a:ln w="38100">
+            <a:solidFill>
+              <a:schemeClr val="tx1"/>
+            </a:solidFill>
+          </a:ln>
+        </p:spPr>
+        <p:txBody>
+          <a:bodyPr wrap="none" rtlCol="0">
+            <a:spAutoFit/>
+          </a:bodyPr>
+          <a:lstStyle/>
+          <a:p>
+            <a:r>
+              <a:rPr lang="fr-FR" dirty="0" err="1"/>
+              <a:t>Features</a:t>
+            </a:r>
+            <a:endParaRPr lang="fr-FR" dirty="0"/>
+          </a:p>
+        </p:txBody>
+      </p:sp>
+      <p:sp>
+        <p:nvSpPr>
+          <p:cNvPr id="12" name="ZoneTexte 11">
+            <a:extLst>
+              <a:ext uri="{FF2B5EF4-FFF2-40B4-BE49-F238E27FC236}">
+                <a16:creationId xmlns:a16="http://schemas.microsoft.com/office/drawing/2014/main" id="{AB7777F3-DC98-A594-569A-E62E2DF34BE9}"/>
+              </a:ext>
+            </a:extLst>
+          </p:cNvPr>
+          <p:cNvSpPr txBox="1"/>
+          <p:nvPr/>
+        </p:nvSpPr>
+        <p:spPr>
+          <a:xfrm>
+            <a:off x="5244438" y="4249712"/>
+            <a:ext cx="1136850" cy="369332"/>
+          </a:xfrm>
+          <a:prstGeom prst="rect">
+            <a:avLst/>
+          </a:prstGeom>
+          <a:solidFill>
+            <a:srgbClr val="FFFF00"/>
+          </a:solidFill>
+          <a:ln w="38100">
+            <a:solidFill>
+              <a:schemeClr val="tx1"/>
+            </a:solidFill>
+          </a:ln>
+        </p:spPr>
+        <p:txBody>
+          <a:bodyPr wrap="none" rtlCol="0">
+            <a:spAutoFit/>
+          </a:bodyPr>
+          <a:lstStyle/>
+          <a:p>
+            <a:r>
+              <a:rPr lang="fr-FR" dirty="0" err="1"/>
+              <a:t>Explainers</a:t>
+            </a:r>
+            <a:endParaRPr lang="fr-FR" dirty="0"/>
+          </a:p>
+        </p:txBody>
+      </p:sp>
+      <p:sp>
+        <p:nvSpPr>
+          <p:cNvPr id="13" name="ZoneTexte 12">
+            <a:extLst>
+              <a:ext uri="{FF2B5EF4-FFF2-40B4-BE49-F238E27FC236}">
+                <a16:creationId xmlns:a16="http://schemas.microsoft.com/office/drawing/2014/main" id="{CE16D11C-3CBC-A236-38A7-8CA69B7A5ED6}"/>
+              </a:ext>
+            </a:extLst>
+          </p:cNvPr>
+          <p:cNvSpPr txBox="1"/>
+          <p:nvPr/>
+        </p:nvSpPr>
+        <p:spPr>
+          <a:xfrm>
+            <a:off x="5503323" y="4927515"/>
+            <a:ext cx="619080" cy="369332"/>
+          </a:xfrm>
+          <a:prstGeom prst="rect">
+            <a:avLst/>
+          </a:prstGeom>
+          <a:solidFill>
+            <a:srgbClr val="FFFF00"/>
+          </a:solidFill>
+          <a:ln w="38100">
+            <a:solidFill>
+              <a:schemeClr val="tx1"/>
+            </a:solidFill>
+          </a:ln>
+        </p:spPr>
+        <p:txBody>
+          <a:bodyPr wrap="none" rtlCol="0">
+            <a:spAutoFit/>
+          </a:bodyPr>
+          <a:lstStyle/>
+          <a:p>
+            <a:r>
+              <a:rPr lang="fr-FR" dirty="0"/>
+              <a:t>Seuil</a:t>
+            </a:r>
+          </a:p>
+        </p:txBody>
+      </p:sp>
+      <p:sp>
+        <p:nvSpPr>
+          <p:cNvPr id="14" name="ZoneTexte 13">
+            <a:extLst>
+              <a:ext uri="{FF2B5EF4-FFF2-40B4-BE49-F238E27FC236}">
+                <a16:creationId xmlns:a16="http://schemas.microsoft.com/office/drawing/2014/main" id="{844F9671-D0EC-9352-8043-5739AA2E2EF7}"/>
+              </a:ext>
+            </a:extLst>
+          </p:cNvPr>
+          <p:cNvSpPr txBox="1"/>
+          <p:nvPr/>
+        </p:nvSpPr>
+        <p:spPr>
+          <a:xfrm>
+            <a:off x="7381603" y="3928946"/>
+            <a:ext cx="513282" cy="369332"/>
+          </a:xfrm>
+          <a:prstGeom prst="rect">
+            <a:avLst/>
+          </a:prstGeom>
+          <a:solidFill>
+            <a:srgbClr val="00B0F0"/>
+          </a:solidFill>
+          <a:ln w="38100">
+            <a:solidFill>
+              <a:schemeClr val="tx1"/>
+            </a:solidFill>
+          </a:ln>
+        </p:spPr>
+        <p:txBody>
+          <a:bodyPr wrap="none" rtlCol="0">
+            <a:spAutoFit/>
+          </a:bodyPr>
+          <a:lstStyle/>
+          <a:p>
+            <a:r>
+              <a:rPr lang="fr-FR" dirty="0"/>
+              <a:t>API</a:t>
+            </a:r>
+          </a:p>
+        </p:txBody>
+      </p:sp>
+      <p:sp>
+        <p:nvSpPr>
+          <p:cNvPr id="15" name="ZoneTexte 14">
+            <a:extLst>
+              <a:ext uri="{FF2B5EF4-FFF2-40B4-BE49-F238E27FC236}">
+                <a16:creationId xmlns:a16="http://schemas.microsoft.com/office/drawing/2014/main" id="{3F3D953D-8801-2A9D-FDEF-1E405F6CB22B}"/>
+              </a:ext>
+            </a:extLst>
+          </p:cNvPr>
+          <p:cNvSpPr txBox="1"/>
+          <p:nvPr/>
+        </p:nvSpPr>
+        <p:spPr>
+          <a:xfrm>
+            <a:off x="8898464" y="3786434"/>
+            <a:ext cx="1241045" cy="646331"/>
+          </a:xfrm>
+          <a:prstGeom prst="rect">
+            <a:avLst/>
+          </a:prstGeom>
+          <a:solidFill>
+            <a:srgbClr val="00B0F0"/>
+          </a:solidFill>
+          <a:ln w="38100">
+            <a:solidFill>
+              <a:schemeClr val="tx1"/>
+            </a:solidFill>
+          </a:ln>
+        </p:spPr>
+        <p:txBody>
+          <a:bodyPr wrap="none" rtlCol="0">
+            <a:spAutoFit/>
+          </a:bodyPr>
+          <a:lstStyle/>
+          <a:p>
+            <a:r>
+              <a:rPr lang="fr-FR" dirty="0"/>
+              <a:t>Application</a:t>
+            </a:r>
+          </a:p>
+          <a:p>
+            <a:r>
+              <a:rPr lang="fr-FR" dirty="0"/>
+              <a:t>finale</a:t>
+            </a:r>
+          </a:p>
+        </p:txBody>
+      </p:sp>
+      <p:sp>
+        <p:nvSpPr>
+          <p:cNvPr id="16" name="ZoneTexte 15">
+            <a:extLst>
+              <a:ext uri="{FF2B5EF4-FFF2-40B4-BE49-F238E27FC236}">
+                <a16:creationId xmlns:a16="http://schemas.microsoft.com/office/drawing/2014/main" id="{26C97CBE-BDE4-2FED-00C8-65244CCE93A4}"/>
+              </a:ext>
+            </a:extLst>
+          </p:cNvPr>
+          <p:cNvSpPr txBox="1"/>
+          <p:nvPr/>
+        </p:nvSpPr>
+        <p:spPr>
+          <a:xfrm>
+            <a:off x="9768191" y="4675443"/>
+            <a:ext cx="1638975" cy="646331"/>
+          </a:xfrm>
+          <a:prstGeom prst="rect">
+            <a:avLst/>
+          </a:prstGeom>
+          <a:solidFill>
+            <a:schemeClr val="bg1">
+              <a:lumMod val="85000"/>
+            </a:schemeClr>
+          </a:solidFill>
+          <a:ln w="38100">
+            <a:solidFill>
+              <a:schemeClr val="tx1"/>
+            </a:solidFill>
+          </a:ln>
+        </p:spPr>
+        <p:txBody>
+          <a:bodyPr wrap="none" rtlCol="0">
+            <a:spAutoFit/>
+          </a:bodyPr>
+          <a:lstStyle/>
+          <a:p>
+            <a:r>
+              <a:rPr lang="fr-FR" dirty="0" err="1"/>
+              <a:t>Dependencies</a:t>
+            </a:r>
+            <a:endParaRPr lang="fr-FR" dirty="0"/>
+          </a:p>
+          <a:p>
+            <a:r>
+              <a:rPr lang="fr-FR" dirty="0"/>
+              <a:t>&amp; </a:t>
+            </a:r>
+            <a:r>
+              <a:rPr lang="fr-FR" dirty="0" err="1"/>
+              <a:t>requirements</a:t>
+            </a:r>
+            <a:endParaRPr lang="fr-FR" dirty="0"/>
+          </a:p>
+        </p:txBody>
+      </p:sp>
+      <p:sp>
+        <p:nvSpPr>
+          <p:cNvPr id="17" name="ZoneTexte 16">
+            <a:extLst>
+              <a:ext uri="{FF2B5EF4-FFF2-40B4-BE49-F238E27FC236}">
+                <a16:creationId xmlns:a16="http://schemas.microsoft.com/office/drawing/2014/main" id="{7D45222A-32BF-AEEF-693E-DE16A7DD1993}"/>
+              </a:ext>
+            </a:extLst>
+          </p:cNvPr>
+          <p:cNvSpPr txBox="1"/>
+          <p:nvPr/>
+        </p:nvSpPr>
+        <p:spPr>
+          <a:xfrm>
+            <a:off x="7170808" y="2193553"/>
+            <a:ext cx="934871" cy="369332"/>
+          </a:xfrm>
+          <a:prstGeom prst="rect">
+            <a:avLst/>
+          </a:prstGeom>
+          <a:solidFill>
+            <a:srgbClr val="00B0F0"/>
+          </a:solidFill>
+          <a:ln w="38100">
+            <a:solidFill>
+              <a:schemeClr val="tx1"/>
+            </a:solidFill>
+          </a:ln>
+        </p:spPr>
+        <p:txBody>
+          <a:bodyPr wrap="none" rtlCol="0">
+            <a:spAutoFit/>
+          </a:bodyPr>
+          <a:lstStyle/>
+          <a:p>
+            <a:r>
+              <a:rPr lang="fr-FR" dirty="0"/>
+              <a:t>Test API</a:t>
+            </a:r>
+          </a:p>
+        </p:txBody>
+      </p:sp>
+      <p:cxnSp>
+        <p:nvCxnSpPr>
+          <p:cNvPr id="19" name="Connecteur : en angle 18">
+            <a:extLst>
+              <a:ext uri="{FF2B5EF4-FFF2-40B4-BE49-F238E27FC236}">
+                <a16:creationId xmlns:a16="http://schemas.microsoft.com/office/drawing/2014/main" id="{0E0B9426-BA93-CE38-9676-DEB959DF50ED}"/>
+              </a:ext>
+            </a:extLst>
+          </p:cNvPr>
+          <p:cNvCxnSpPr>
+            <a:stCxn id="3" idx="3"/>
+            <a:endCxn id="7" idx="1"/>
+          </p:cNvCxnSpPr>
+          <p:nvPr/>
+        </p:nvCxnSpPr>
+        <p:spPr>
+          <a:xfrm flipV="1">
+            <a:off x="1855900" y="2378219"/>
+            <a:ext cx="952545" cy="1724093"/>
+          </a:xfrm>
+          <a:prstGeom prst="bentConnector3">
+            <a:avLst/>
+          </a:prstGeom>
+          <a:ln w="28575">
+            <a:solidFill>
+              <a:schemeClr val="tx1"/>
+            </a:solidFill>
+            <a:tailEnd type="triangle"/>
+          </a:ln>
+        </p:spPr>
+        <p:style>
+          <a:lnRef idx="1">
+            <a:schemeClr val="accent1"/>
+          </a:lnRef>
+          <a:fillRef idx="0">
+            <a:schemeClr val="accent1"/>
+          </a:fillRef>
+          <a:effectRef idx="0">
+            <a:schemeClr val="accent1"/>
+          </a:effectRef>
+          <a:fontRef idx="minor">
+            <a:schemeClr val="tx1"/>
+          </a:fontRef>
+        </p:style>
+      </p:cxnSp>
+      <p:cxnSp>
+        <p:nvCxnSpPr>
+          <p:cNvPr id="21" name="Connecteur : en angle 20">
+            <a:extLst>
+              <a:ext uri="{FF2B5EF4-FFF2-40B4-BE49-F238E27FC236}">
+                <a16:creationId xmlns:a16="http://schemas.microsoft.com/office/drawing/2014/main" id="{302FCACF-C1BC-1C09-106B-4CE5984CEE60}"/>
+              </a:ext>
+            </a:extLst>
+          </p:cNvPr>
+          <p:cNvCxnSpPr>
+            <a:stCxn id="3" idx="3"/>
+            <a:endCxn id="8" idx="1"/>
+          </p:cNvCxnSpPr>
+          <p:nvPr/>
+        </p:nvCxnSpPr>
+        <p:spPr>
+          <a:xfrm>
+            <a:off x="1855900" y="4102312"/>
+            <a:ext cx="855179" cy="1724092"/>
+          </a:xfrm>
+          <a:prstGeom prst="bentConnector3">
+            <a:avLst>
+              <a:gd name="adj1" fmla="val 55242"/>
+            </a:avLst>
+          </a:prstGeom>
+          <a:ln w="28575">
+            <a:solidFill>
+              <a:schemeClr val="tx1"/>
+            </a:solidFill>
+            <a:tailEnd type="triangle"/>
+          </a:ln>
+        </p:spPr>
+        <p:style>
+          <a:lnRef idx="1">
+            <a:schemeClr val="accent1"/>
+          </a:lnRef>
+          <a:fillRef idx="0">
+            <a:schemeClr val="accent1"/>
+          </a:fillRef>
+          <a:effectRef idx="0">
+            <a:schemeClr val="accent1"/>
+          </a:effectRef>
+          <a:fontRef idx="minor">
+            <a:schemeClr val="tx1"/>
+          </a:fontRef>
+        </p:style>
+      </p:cxnSp>
+      <p:cxnSp>
+        <p:nvCxnSpPr>
+          <p:cNvPr id="24" name="Connecteur droit avec flèche 23">
+            <a:extLst>
+              <a:ext uri="{FF2B5EF4-FFF2-40B4-BE49-F238E27FC236}">
+                <a16:creationId xmlns:a16="http://schemas.microsoft.com/office/drawing/2014/main" id="{08BF0053-6E2A-0BEA-40BB-9558A2E0E46B}"/>
+              </a:ext>
+            </a:extLst>
+          </p:cNvPr>
+          <p:cNvCxnSpPr>
+            <a:stCxn id="3" idx="3"/>
+            <a:endCxn id="6" idx="1"/>
+          </p:cNvCxnSpPr>
+          <p:nvPr/>
+        </p:nvCxnSpPr>
+        <p:spPr>
+          <a:xfrm>
+            <a:off x="1855900" y="4102312"/>
+            <a:ext cx="932124" cy="0"/>
+          </a:xfrm>
+          <a:prstGeom prst="straightConnector1">
+            <a:avLst/>
+          </a:prstGeom>
+          <a:ln w="28575">
+            <a:solidFill>
+              <a:schemeClr val="tx1"/>
+            </a:solidFill>
+            <a:tailEnd type="triangle"/>
+          </a:ln>
+        </p:spPr>
+        <p:style>
+          <a:lnRef idx="1">
+            <a:schemeClr val="accent1"/>
+          </a:lnRef>
+          <a:fillRef idx="0">
+            <a:schemeClr val="accent1"/>
+          </a:fillRef>
+          <a:effectRef idx="0">
+            <a:schemeClr val="accent1"/>
+          </a:effectRef>
+          <a:fontRef idx="minor">
+            <a:schemeClr val="tx1"/>
+          </a:fontRef>
+        </p:style>
+      </p:cxnSp>
+      <p:cxnSp>
+        <p:nvCxnSpPr>
+          <p:cNvPr id="25" name="Connecteur droit avec flèche 24">
+            <a:extLst>
+              <a:ext uri="{FF2B5EF4-FFF2-40B4-BE49-F238E27FC236}">
+                <a16:creationId xmlns:a16="http://schemas.microsoft.com/office/drawing/2014/main" id="{3AF34F9E-B18D-8D08-8A16-80A53B45699D}"/>
+              </a:ext>
+            </a:extLst>
+          </p:cNvPr>
+          <p:cNvCxnSpPr>
+            <a:cxnSpLocks/>
+            <a:endCxn id="17" idx="1"/>
+          </p:cNvCxnSpPr>
+          <p:nvPr/>
+        </p:nvCxnSpPr>
+        <p:spPr>
+          <a:xfrm>
+            <a:off x="4163722" y="2378219"/>
+            <a:ext cx="3007086" cy="0"/>
+          </a:xfrm>
+          <a:prstGeom prst="straightConnector1">
+            <a:avLst/>
+          </a:prstGeom>
+          <a:ln w="28575">
+            <a:solidFill>
+              <a:schemeClr val="tx1"/>
+            </a:solidFill>
+            <a:tailEnd type="triangle"/>
+          </a:ln>
+        </p:spPr>
+        <p:style>
+          <a:lnRef idx="1">
+            <a:schemeClr val="accent1"/>
+          </a:lnRef>
+          <a:fillRef idx="0">
+            <a:schemeClr val="accent1"/>
+          </a:fillRef>
+          <a:effectRef idx="0">
+            <a:schemeClr val="accent1"/>
+          </a:effectRef>
+          <a:fontRef idx="minor">
+            <a:schemeClr val="tx1"/>
+          </a:fontRef>
+        </p:style>
+      </p:cxnSp>
+      <p:cxnSp>
+        <p:nvCxnSpPr>
+          <p:cNvPr id="27" name="Connecteur : en angle 26">
+            <a:extLst>
+              <a:ext uri="{FF2B5EF4-FFF2-40B4-BE49-F238E27FC236}">
+                <a16:creationId xmlns:a16="http://schemas.microsoft.com/office/drawing/2014/main" id="{1342B5F4-1195-E8EA-5D44-24CC1066C966}"/>
+              </a:ext>
+            </a:extLst>
+          </p:cNvPr>
+          <p:cNvCxnSpPr>
+            <a:cxnSpLocks/>
+            <a:endCxn id="10" idx="1"/>
+          </p:cNvCxnSpPr>
+          <p:nvPr/>
+        </p:nvCxnSpPr>
+        <p:spPr>
+          <a:xfrm flipV="1">
+            <a:off x="4150958" y="3081058"/>
+            <a:ext cx="1221720" cy="1028542"/>
+          </a:xfrm>
+          <a:prstGeom prst="bentConnector3">
+            <a:avLst/>
+          </a:prstGeom>
+          <a:ln w="28575">
+            <a:solidFill>
+              <a:schemeClr val="tx1"/>
+            </a:solidFill>
+            <a:tailEnd type="triangle"/>
+          </a:ln>
+        </p:spPr>
+        <p:style>
+          <a:lnRef idx="1">
+            <a:schemeClr val="accent1"/>
+          </a:lnRef>
+          <a:fillRef idx="0">
+            <a:schemeClr val="accent1"/>
+          </a:fillRef>
+          <a:effectRef idx="0">
+            <a:schemeClr val="accent1"/>
+          </a:effectRef>
+          <a:fontRef idx="minor">
+            <a:schemeClr val="tx1"/>
+          </a:fontRef>
+        </p:style>
+      </p:cxnSp>
+      <p:cxnSp>
+        <p:nvCxnSpPr>
+          <p:cNvPr id="29" name="Connecteur : en angle 28">
+            <a:extLst>
+              <a:ext uri="{FF2B5EF4-FFF2-40B4-BE49-F238E27FC236}">
+                <a16:creationId xmlns:a16="http://schemas.microsoft.com/office/drawing/2014/main" id="{1CE5D8B3-9EA8-C8F6-4592-228178598F58}"/>
+              </a:ext>
+            </a:extLst>
+          </p:cNvPr>
+          <p:cNvCxnSpPr>
+            <a:cxnSpLocks/>
+            <a:endCxn id="13" idx="1"/>
+          </p:cNvCxnSpPr>
+          <p:nvPr/>
+        </p:nvCxnSpPr>
+        <p:spPr>
+          <a:xfrm>
+            <a:off x="4161780" y="4109601"/>
+            <a:ext cx="1341543" cy="1002580"/>
+          </a:xfrm>
+          <a:prstGeom prst="bentConnector3">
+            <a:avLst>
+              <a:gd name="adj1" fmla="val 44654"/>
+            </a:avLst>
+          </a:prstGeom>
+          <a:ln w="28575">
+            <a:solidFill>
+              <a:schemeClr val="tx1"/>
+            </a:solidFill>
+            <a:tailEnd type="triangle"/>
+          </a:ln>
+        </p:spPr>
+        <p:style>
+          <a:lnRef idx="1">
+            <a:schemeClr val="accent1"/>
+          </a:lnRef>
+          <a:fillRef idx="0">
+            <a:schemeClr val="accent1"/>
+          </a:fillRef>
+          <a:effectRef idx="0">
+            <a:schemeClr val="accent1"/>
+          </a:effectRef>
+          <a:fontRef idx="minor">
+            <a:schemeClr val="tx1"/>
+          </a:fontRef>
+        </p:style>
+      </p:cxnSp>
+      <p:cxnSp>
+        <p:nvCxnSpPr>
+          <p:cNvPr id="34" name="Connecteur : en angle 33">
+            <a:extLst>
+              <a:ext uri="{FF2B5EF4-FFF2-40B4-BE49-F238E27FC236}">
+                <a16:creationId xmlns:a16="http://schemas.microsoft.com/office/drawing/2014/main" id="{CE98325A-101D-9E53-7EF1-4831289CB3E6}"/>
+              </a:ext>
+            </a:extLst>
+          </p:cNvPr>
+          <p:cNvCxnSpPr>
+            <a:cxnSpLocks/>
+            <a:endCxn id="12" idx="1"/>
+          </p:cNvCxnSpPr>
+          <p:nvPr/>
+        </p:nvCxnSpPr>
+        <p:spPr>
+          <a:xfrm>
+            <a:off x="4161780" y="4118896"/>
+            <a:ext cx="1082658" cy="315482"/>
+          </a:xfrm>
+          <a:prstGeom prst="bentConnector3">
+            <a:avLst>
+              <a:gd name="adj1" fmla="val 55796"/>
+            </a:avLst>
+          </a:prstGeom>
+          <a:ln w="28575">
+            <a:solidFill>
+              <a:schemeClr val="tx1"/>
+            </a:solidFill>
+            <a:tailEnd type="triangle"/>
+          </a:ln>
+        </p:spPr>
+        <p:style>
+          <a:lnRef idx="1">
+            <a:schemeClr val="accent1"/>
+          </a:lnRef>
+          <a:fillRef idx="0">
+            <a:schemeClr val="accent1"/>
+          </a:fillRef>
+          <a:effectRef idx="0">
+            <a:schemeClr val="accent1"/>
+          </a:effectRef>
+          <a:fontRef idx="minor">
+            <a:schemeClr val="tx1"/>
+          </a:fontRef>
+        </p:style>
+      </p:cxnSp>
+      <p:cxnSp>
+        <p:nvCxnSpPr>
+          <p:cNvPr id="37" name="Connecteur : en angle 36">
+            <a:extLst>
+              <a:ext uri="{FF2B5EF4-FFF2-40B4-BE49-F238E27FC236}">
+                <a16:creationId xmlns:a16="http://schemas.microsoft.com/office/drawing/2014/main" id="{17150A55-129D-240F-F1CE-C7419B3C6F19}"/>
+              </a:ext>
+            </a:extLst>
+          </p:cNvPr>
+          <p:cNvCxnSpPr>
+            <a:cxnSpLocks/>
+            <a:endCxn id="11" idx="1"/>
+          </p:cNvCxnSpPr>
+          <p:nvPr/>
+        </p:nvCxnSpPr>
+        <p:spPr>
+          <a:xfrm flipV="1">
+            <a:off x="4161780" y="3755682"/>
+            <a:ext cx="1162840" cy="363213"/>
+          </a:xfrm>
+          <a:prstGeom prst="bentConnector3">
+            <a:avLst>
+              <a:gd name="adj1" fmla="val 52313"/>
+            </a:avLst>
+          </a:prstGeom>
+          <a:ln w="28575">
+            <a:solidFill>
+              <a:schemeClr val="tx1"/>
+            </a:solidFill>
+            <a:tailEnd type="triangle"/>
+          </a:ln>
+        </p:spPr>
+        <p:style>
+          <a:lnRef idx="1">
+            <a:schemeClr val="accent1"/>
+          </a:lnRef>
+          <a:fillRef idx="0">
+            <a:schemeClr val="accent1"/>
+          </a:fillRef>
+          <a:effectRef idx="0">
+            <a:schemeClr val="accent1"/>
+          </a:effectRef>
+          <a:fontRef idx="minor">
+            <a:schemeClr val="tx1"/>
+          </a:fontRef>
+        </p:style>
+      </p:cxnSp>
+      <p:cxnSp>
+        <p:nvCxnSpPr>
+          <p:cNvPr id="40" name="Connecteur : en angle 39">
+            <a:extLst>
+              <a:ext uri="{FF2B5EF4-FFF2-40B4-BE49-F238E27FC236}">
+                <a16:creationId xmlns:a16="http://schemas.microsoft.com/office/drawing/2014/main" id="{FC06C825-BBC5-B8C1-B2AE-60764C9FBB79}"/>
+              </a:ext>
+            </a:extLst>
+          </p:cNvPr>
+          <p:cNvCxnSpPr>
+            <a:cxnSpLocks/>
+            <a:endCxn id="14" idx="1"/>
+          </p:cNvCxnSpPr>
+          <p:nvPr/>
+        </p:nvCxnSpPr>
+        <p:spPr>
+          <a:xfrm flipV="1">
+            <a:off x="6135574" y="4113612"/>
+            <a:ext cx="1246029" cy="998569"/>
+          </a:xfrm>
+          <a:prstGeom prst="bentConnector3">
+            <a:avLst>
+              <a:gd name="adj1" fmla="val 55756"/>
+            </a:avLst>
+          </a:prstGeom>
+          <a:ln w="28575">
+            <a:solidFill>
+              <a:schemeClr val="tx1"/>
+            </a:solidFill>
+            <a:tailEnd type="triangle"/>
+          </a:ln>
+        </p:spPr>
+        <p:style>
+          <a:lnRef idx="1">
+            <a:schemeClr val="accent1"/>
+          </a:lnRef>
+          <a:fillRef idx="0">
+            <a:schemeClr val="accent1"/>
+          </a:fillRef>
+          <a:effectRef idx="0">
+            <a:schemeClr val="accent1"/>
+          </a:effectRef>
+          <a:fontRef idx="minor">
+            <a:schemeClr val="tx1"/>
+          </a:fontRef>
+        </p:style>
+      </p:cxnSp>
+      <p:cxnSp>
+        <p:nvCxnSpPr>
+          <p:cNvPr id="41" name="Connecteur : en angle 40">
+            <a:extLst>
+              <a:ext uri="{FF2B5EF4-FFF2-40B4-BE49-F238E27FC236}">
+                <a16:creationId xmlns:a16="http://schemas.microsoft.com/office/drawing/2014/main" id="{F1FDF602-9788-E16B-BE64-42BC53C6CD3B}"/>
+              </a:ext>
+            </a:extLst>
+          </p:cNvPr>
+          <p:cNvCxnSpPr>
+            <a:cxnSpLocks/>
+            <a:endCxn id="14" idx="1"/>
+          </p:cNvCxnSpPr>
+          <p:nvPr/>
+        </p:nvCxnSpPr>
+        <p:spPr>
+          <a:xfrm>
+            <a:off x="6277356" y="3068751"/>
+            <a:ext cx="1104247" cy="1044861"/>
+          </a:xfrm>
+          <a:prstGeom prst="bentConnector3">
+            <a:avLst>
+              <a:gd name="adj1" fmla="val 50000"/>
+            </a:avLst>
+          </a:prstGeom>
+          <a:ln w="28575">
+            <a:solidFill>
+              <a:schemeClr val="tx1"/>
+            </a:solidFill>
+            <a:tailEnd type="triangle"/>
+          </a:ln>
+        </p:spPr>
+        <p:style>
+          <a:lnRef idx="1">
+            <a:schemeClr val="accent1"/>
+          </a:lnRef>
+          <a:fillRef idx="0">
+            <a:schemeClr val="accent1"/>
+          </a:fillRef>
+          <a:effectRef idx="0">
+            <a:schemeClr val="accent1"/>
+          </a:effectRef>
+          <a:fontRef idx="minor">
+            <a:schemeClr val="tx1"/>
+          </a:fontRef>
+        </p:style>
+      </p:cxnSp>
+      <p:cxnSp>
+        <p:nvCxnSpPr>
+          <p:cNvPr id="45" name="Connecteur : en angle 44">
+            <a:extLst>
+              <a:ext uri="{FF2B5EF4-FFF2-40B4-BE49-F238E27FC236}">
+                <a16:creationId xmlns:a16="http://schemas.microsoft.com/office/drawing/2014/main" id="{9C0DBB07-073E-9DF7-9561-95372CB4573A}"/>
+              </a:ext>
+            </a:extLst>
+          </p:cNvPr>
+          <p:cNvCxnSpPr>
+            <a:cxnSpLocks/>
+            <a:endCxn id="14" idx="1"/>
+          </p:cNvCxnSpPr>
+          <p:nvPr/>
+        </p:nvCxnSpPr>
+        <p:spPr>
+          <a:xfrm>
+            <a:off x="6324935" y="3750695"/>
+            <a:ext cx="1056668" cy="362917"/>
+          </a:xfrm>
+          <a:prstGeom prst="bentConnector3">
+            <a:avLst>
+              <a:gd name="adj1" fmla="val 46607"/>
+            </a:avLst>
+          </a:prstGeom>
+          <a:ln w="28575">
+            <a:solidFill>
+              <a:schemeClr val="tx1"/>
+            </a:solidFill>
+            <a:tailEnd type="triangle"/>
+          </a:ln>
+        </p:spPr>
+        <p:style>
+          <a:lnRef idx="1">
+            <a:schemeClr val="accent1"/>
+          </a:lnRef>
+          <a:fillRef idx="0">
+            <a:schemeClr val="accent1"/>
+          </a:fillRef>
+          <a:effectRef idx="0">
+            <a:schemeClr val="accent1"/>
+          </a:effectRef>
+          <a:fontRef idx="minor">
+            <a:schemeClr val="tx1"/>
+          </a:fontRef>
+        </p:style>
+      </p:cxnSp>
+      <p:cxnSp>
+        <p:nvCxnSpPr>
+          <p:cNvPr id="48" name="Connecteur : en angle 47">
+            <a:extLst>
+              <a:ext uri="{FF2B5EF4-FFF2-40B4-BE49-F238E27FC236}">
+                <a16:creationId xmlns:a16="http://schemas.microsoft.com/office/drawing/2014/main" id="{B7C3EDED-3F85-13B6-8EEB-41E1331D7B63}"/>
+              </a:ext>
+            </a:extLst>
+          </p:cNvPr>
+          <p:cNvCxnSpPr>
+            <a:cxnSpLocks/>
+            <a:endCxn id="14" idx="1"/>
+          </p:cNvCxnSpPr>
+          <p:nvPr/>
+        </p:nvCxnSpPr>
+        <p:spPr>
+          <a:xfrm flipV="1">
+            <a:off x="6394459" y="4113612"/>
+            <a:ext cx="987144" cy="318904"/>
+          </a:xfrm>
+          <a:prstGeom prst="bentConnector3">
+            <a:avLst>
+              <a:gd name="adj1" fmla="val 43643"/>
+            </a:avLst>
+          </a:prstGeom>
+          <a:ln w="28575">
+            <a:solidFill>
+              <a:schemeClr val="tx1"/>
+            </a:solidFill>
+            <a:tailEnd type="triangle"/>
+          </a:ln>
+        </p:spPr>
+        <p:style>
+          <a:lnRef idx="1">
+            <a:schemeClr val="accent1"/>
+          </a:lnRef>
+          <a:fillRef idx="0">
+            <a:schemeClr val="accent1"/>
+          </a:fillRef>
+          <a:effectRef idx="0">
+            <a:schemeClr val="accent1"/>
+          </a:effectRef>
+          <a:fontRef idx="minor">
+            <a:schemeClr val="tx1"/>
+          </a:fontRef>
+        </p:style>
+      </p:cxnSp>
+      <p:cxnSp>
+        <p:nvCxnSpPr>
+          <p:cNvPr id="51" name="Connecteur droit avec flèche 50">
+            <a:extLst>
+              <a:ext uri="{FF2B5EF4-FFF2-40B4-BE49-F238E27FC236}">
+                <a16:creationId xmlns:a16="http://schemas.microsoft.com/office/drawing/2014/main" id="{DAB220F3-1FC5-7917-D438-81A06AABB34E}"/>
+              </a:ext>
+            </a:extLst>
+          </p:cNvPr>
+          <p:cNvCxnSpPr>
+            <a:cxnSpLocks/>
+          </p:cNvCxnSpPr>
+          <p:nvPr/>
+        </p:nvCxnSpPr>
+        <p:spPr>
+          <a:xfrm>
+            <a:off x="7894885" y="4122239"/>
+            <a:ext cx="1003579" cy="11301"/>
+          </a:xfrm>
+          <a:prstGeom prst="straightConnector1">
+            <a:avLst/>
+          </a:prstGeom>
+          <a:ln w="28575">
+            <a:solidFill>
+              <a:schemeClr val="tx1"/>
+            </a:solidFill>
+            <a:tailEnd type="triangle"/>
+          </a:ln>
+        </p:spPr>
+        <p:style>
+          <a:lnRef idx="1">
+            <a:schemeClr val="accent1"/>
+          </a:lnRef>
+          <a:fillRef idx="0">
+            <a:schemeClr val="accent1"/>
+          </a:fillRef>
+          <a:effectRef idx="0">
+            <a:schemeClr val="accent1"/>
+          </a:effectRef>
+          <a:fontRef idx="minor">
+            <a:schemeClr val="tx1"/>
+          </a:fontRef>
+        </p:style>
+      </p:cxnSp>
+      <p:cxnSp>
+        <p:nvCxnSpPr>
+          <p:cNvPr id="53" name="Connecteur droit avec flèche 52">
+            <a:extLst>
+              <a:ext uri="{FF2B5EF4-FFF2-40B4-BE49-F238E27FC236}">
+                <a16:creationId xmlns:a16="http://schemas.microsoft.com/office/drawing/2014/main" id="{3AEBDA2D-1E7B-0B36-2F72-9EF0CBE5EEE6}"/>
+              </a:ext>
+            </a:extLst>
+          </p:cNvPr>
+          <p:cNvCxnSpPr>
+            <a:cxnSpLocks/>
+            <a:stCxn id="17" idx="2"/>
+            <a:endCxn id="14" idx="0"/>
+          </p:cNvCxnSpPr>
+          <p:nvPr/>
+        </p:nvCxnSpPr>
+        <p:spPr>
+          <a:xfrm>
+            <a:off x="7638244" y="2562885"/>
+            <a:ext cx="0" cy="1366061"/>
+          </a:xfrm>
+          <a:prstGeom prst="straightConnector1">
+            <a:avLst/>
+          </a:prstGeom>
+          <a:ln w="28575">
+            <a:solidFill>
+              <a:schemeClr val="tx1"/>
+            </a:solidFill>
+            <a:tailEnd type="triangle"/>
+          </a:ln>
+        </p:spPr>
+        <p:style>
+          <a:lnRef idx="1">
+            <a:schemeClr val="accent1"/>
+          </a:lnRef>
+          <a:fillRef idx="0">
+            <a:schemeClr val="accent1"/>
+          </a:fillRef>
+          <a:effectRef idx="0">
+            <a:schemeClr val="accent1"/>
+          </a:effectRef>
+          <a:fontRef idx="minor">
+            <a:schemeClr val="tx1"/>
+          </a:fontRef>
+        </p:style>
+      </p:cxnSp>
+      <p:pic>
+        <p:nvPicPr>
+          <p:cNvPr id="57" name="Image 56">
+            <a:extLst>
+              <a:ext uri="{FF2B5EF4-FFF2-40B4-BE49-F238E27FC236}">
+                <a16:creationId xmlns:a16="http://schemas.microsoft.com/office/drawing/2014/main" id="{09C7435C-87C6-D6C7-815B-3AB7CF02F520}"/>
+              </a:ext>
+            </a:extLst>
+          </p:cNvPr>
+          <p:cNvPicPr>
+            <a:picLocks noChangeAspect="1"/>
+          </p:cNvPicPr>
+          <p:nvPr/>
+        </p:nvPicPr>
+        <p:blipFill>
+          <a:blip r:embed="rId2"/>
+          <a:stretch>
+            <a:fillRect/>
+          </a:stretch>
+        </p:blipFill>
+        <p:spPr>
+          <a:xfrm>
+            <a:off x="7644094" y="4675443"/>
+            <a:ext cx="1505160" cy="400106"/>
+          </a:xfrm>
+          <a:prstGeom prst="rect">
+            <a:avLst/>
+          </a:prstGeom>
+        </p:spPr>
+      </p:pic>
+      <p:pic>
+        <p:nvPicPr>
+          <p:cNvPr id="59" name="Image 58" descr="Une image contenant Police, Graphique, logo, cercle&#10;&#10;Le contenu généré par l’IA peut être incorrect.">
+            <a:extLst>
+              <a:ext uri="{FF2B5EF4-FFF2-40B4-BE49-F238E27FC236}">
+                <a16:creationId xmlns:a16="http://schemas.microsoft.com/office/drawing/2014/main" id="{3B8B7220-7AAB-B70D-DDC5-65A3E1402227}"/>
+              </a:ext>
+            </a:extLst>
+          </p:cNvPr>
+          <p:cNvPicPr>
+            <a:picLocks noChangeAspect="1"/>
+          </p:cNvPicPr>
+          <p:nvPr/>
+        </p:nvPicPr>
+        <p:blipFill>
+          <a:blip r:embed="rId3"/>
+          <a:stretch>
+            <a:fillRect/>
+          </a:stretch>
+        </p:blipFill>
+        <p:spPr>
+          <a:xfrm>
+            <a:off x="627944" y="2431764"/>
+            <a:ext cx="1181204" cy="1197496"/>
+          </a:xfrm>
+          <a:prstGeom prst="rect">
+            <a:avLst/>
+          </a:prstGeom>
+        </p:spPr>
+      </p:pic>
+      <p:pic>
+        <p:nvPicPr>
+          <p:cNvPr id="61" name="Image 60" descr="Une image contenant Police, Graphique, capture d’écran, logo&#10;&#10;Le contenu généré par l’IA peut être incorrect.">
+            <a:extLst>
+              <a:ext uri="{FF2B5EF4-FFF2-40B4-BE49-F238E27FC236}">
+                <a16:creationId xmlns:a16="http://schemas.microsoft.com/office/drawing/2014/main" id="{2F66F5CF-2CEC-857C-0FA4-506907B2F02D}"/>
+              </a:ext>
+            </a:extLst>
+          </p:cNvPr>
+          <p:cNvPicPr>
+            <a:picLocks noChangeAspect="1"/>
+          </p:cNvPicPr>
+          <p:nvPr/>
+        </p:nvPicPr>
+        <p:blipFill>
+          <a:blip r:embed="rId4"/>
+          <a:stretch>
+            <a:fillRect/>
+          </a:stretch>
+        </p:blipFill>
+        <p:spPr>
+          <a:xfrm>
+            <a:off x="8898464" y="2193553"/>
+            <a:ext cx="1953370" cy="1251772"/>
+          </a:xfrm>
+          <a:prstGeom prst="rect">
+            <a:avLst/>
+          </a:prstGeom>
+        </p:spPr>
+      </p:pic>
+      <p:cxnSp>
+        <p:nvCxnSpPr>
+          <p:cNvPr id="62" name="Connecteur : en angle 61">
+            <a:extLst>
+              <a:ext uri="{FF2B5EF4-FFF2-40B4-BE49-F238E27FC236}">
+                <a16:creationId xmlns:a16="http://schemas.microsoft.com/office/drawing/2014/main" id="{A379D42A-7EA7-9605-E007-0EEAE72D765F}"/>
+              </a:ext>
+            </a:extLst>
+          </p:cNvPr>
+          <p:cNvCxnSpPr>
+            <a:cxnSpLocks/>
+            <a:endCxn id="15" idx="2"/>
+          </p:cNvCxnSpPr>
+          <p:nvPr/>
+        </p:nvCxnSpPr>
+        <p:spPr>
+          <a:xfrm flipV="1">
+            <a:off x="4258179" y="4432765"/>
+            <a:ext cx="5260808" cy="1399998"/>
+          </a:xfrm>
+          <a:prstGeom prst="bentConnector2">
+            <a:avLst/>
+          </a:prstGeom>
+          <a:ln w="28575">
+            <a:solidFill>
+              <a:schemeClr val="tx1"/>
+            </a:solidFill>
+            <a:tailEnd type="triangle"/>
+          </a:ln>
+        </p:spPr>
+        <p:style>
+          <a:lnRef idx="1">
+            <a:schemeClr val="accent1"/>
+          </a:lnRef>
+          <a:fillRef idx="0">
+            <a:schemeClr val="accent1"/>
+          </a:fillRef>
+          <a:effectRef idx="0">
+            <a:schemeClr val="accent1"/>
+          </a:effectRef>
+          <a:fontRef idx="minor">
+            <a:schemeClr val="tx1"/>
+          </a:fontRef>
+        </p:style>
+      </p:cxnSp>
+      <p:pic>
+        <p:nvPicPr>
+          <p:cNvPr id="65" name="Image 64" descr="Une image contenant Police, logo, Graphique, texte&#10;&#10;Le contenu généré par l’IA peut être incorrect.">
+            <a:extLst>
+              <a:ext uri="{FF2B5EF4-FFF2-40B4-BE49-F238E27FC236}">
+                <a16:creationId xmlns:a16="http://schemas.microsoft.com/office/drawing/2014/main" id="{2593D3F3-BFEC-6E4F-DCC5-B2A329F0888C}"/>
+              </a:ext>
+            </a:extLst>
+          </p:cNvPr>
+          <p:cNvPicPr>
+            <a:picLocks noChangeAspect="1"/>
+          </p:cNvPicPr>
+          <p:nvPr/>
+        </p:nvPicPr>
+        <p:blipFill>
+          <a:blip r:embed="rId5"/>
+          <a:stretch>
+            <a:fillRect/>
+          </a:stretch>
+        </p:blipFill>
+        <p:spPr>
+          <a:xfrm>
+            <a:off x="2646274" y="2964642"/>
+            <a:ext cx="1646434" cy="750494"/>
+          </a:xfrm>
+          <a:prstGeom prst="rect">
+            <a:avLst/>
+          </a:prstGeom>
+        </p:spPr>
+      </p:pic>
+    </p:spTree>
+    <p:extLst>
+      <p:ext uri="{BB962C8B-B14F-4D97-AF65-F5344CB8AC3E}">
+        <p14:creationId xmlns:p14="http://schemas.microsoft.com/office/powerpoint/2010/main" val="3551627347"/>
+      </p:ext>
+    </p:extLst>
+  </p:cSld>
+  <p:clrMapOvr>
+    <a:masterClrMapping/>
+  </p:clrMapOvr>
+</p:sld>
+</file>
+
+<file path=ppt/slides/slide18.xml><?xml version="1.0" encoding="utf-8"?>
+<p:sld xmlns:a="http://schemas.openxmlformats.org/drawingml/2006/main" xmlns:r="http://schemas.openxmlformats.org/officeDocument/2006/relationships" xmlns:p="http://schemas.openxmlformats.org/presentationml/2006/main">
+  <p:cSld>
+    <p:spTree>
+      <p:nvGrpSpPr>
+        <p:cNvPr id="1" name="">
+          <a:extLst>
+            <a:ext uri="{FF2B5EF4-FFF2-40B4-BE49-F238E27FC236}">
+              <a16:creationId xmlns:a16="http://schemas.microsoft.com/office/drawing/2014/main" id="{459CC8B6-05A1-C7E3-BE62-08E81B0A98F2}"/>
+            </a:ext>
+          </a:extLst>
+        </p:cNvPr>
+        <p:cNvGrpSpPr/>
+        <p:nvPr/>
+      </p:nvGrpSpPr>
+      <p:grpSpPr>
+        <a:xfrm>
+          <a:off x="0" y="0"/>
+          <a:ext cx="0" cy="0"/>
+          <a:chOff x="0" y="0"/>
+          <a:chExt cx="0" cy="0"/>
+        </a:xfrm>
+      </p:grpSpPr>
+      <p:sp>
+        <p:nvSpPr>
+          <p:cNvPr id="2" name="Titre 1">
+            <a:extLst>
+              <a:ext uri="{FF2B5EF4-FFF2-40B4-BE49-F238E27FC236}">
+                <a16:creationId xmlns:a16="http://schemas.microsoft.com/office/drawing/2014/main" id="{850372EA-D1FE-8C8B-8956-434E54328146}"/>
+              </a:ext>
+            </a:extLst>
+          </p:cNvPr>
+          <p:cNvSpPr>
+            <a:spLocks noGrp="1"/>
+          </p:cNvSpPr>
+          <p:nvPr>
+            <p:ph type="title"/>
+          </p:nvPr>
+        </p:nvSpPr>
+        <p:spPr/>
+        <p:txBody>
+          <a:bodyPr/>
+          <a:lstStyle/>
+          <a:p>
+            <a:r>
+              <a:rPr lang="fr-FR" dirty="0"/>
+              <a:t>Suivi : étude du data drift</a:t>
+            </a:r>
+          </a:p>
+        </p:txBody>
+      </p:sp>
+      <p:pic>
+        <p:nvPicPr>
+          <p:cNvPr id="6" name="Espace réservé du contenu 5" descr="Une image contenant texte, capture d’écran, Police, nombre&#10;&#10;Le contenu généré par l’IA peut être incorrect.">
+            <a:extLst>
+              <a:ext uri="{FF2B5EF4-FFF2-40B4-BE49-F238E27FC236}">
+                <a16:creationId xmlns:a16="http://schemas.microsoft.com/office/drawing/2014/main" id="{EC80E31A-1318-66A7-0CB1-ECD0B8D6FB9E}"/>
+              </a:ext>
+            </a:extLst>
+          </p:cNvPr>
+          <p:cNvPicPr>
+            <a:picLocks noGrp="1" noChangeAspect="1"/>
+          </p:cNvPicPr>
+          <p:nvPr>
+            <p:ph idx="1"/>
+          </p:nvPr>
+        </p:nvPicPr>
+        <p:blipFill>
+          <a:blip r:embed="rId2"/>
+          <a:stretch>
+            <a:fillRect/>
+          </a:stretch>
+        </p:blipFill>
+        <p:spPr>
+          <a:xfrm>
+            <a:off x="2908630" y="2181225"/>
+            <a:ext cx="6374740" cy="3678238"/>
+          </a:xfrm>
+          <a:prstGeom prst="rect">
+            <a:avLst/>
+          </a:prstGeom>
+        </p:spPr>
+      </p:pic>
+      <p:sp>
+        <p:nvSpPr>
+          <p:cNvPr id="5" name="Espace réservé du numéro de diapositive 4">
+            <a:extLst>
+              <a:ext uri="{FF2B5EF4-FFF2-40B4-BE49-F238E27FC236}">
+                <a16:creationId xmlns:a16="http://schemas.microsoft.com/office/drawing/2014/main" id="{F899858C-0DD6-BD36-C293-AA592529933F}"/>
+              </a:ext>
+            </a:extLst>
+          </p:cNvPr>
+          <p:cNvSpPr>
+            <a:spLocks noGrp="1"/>
+          </p:cNvSpPr>
+          <p:nvPr>
+            <p:ph type="sldNum" sz="quarter" idx="12"/>
+          </p:nvPr>
+        </p:nvSpPr>
+        <p:spPr/>
+        <p:txBody>
+          <a:bodyPr/>
+          <a:lstStyle/>
+          <a:p>
+            <a:fld id="{682819AE-B619-487D-9152-CB0FE4E70819}" type="slidenum">
+              <a:rPr lang="fr-FR" smtClean="0"/>
+              <a:t>18</a:t>
+            </a:fld>
+            <a:endParaRPr lang="fr-FR"/>
+          </a:p>
+        </p:txBody>
+      </p:sp>
+      <p:sp>
+        <p:nvSpPr>
+          <p:cNvPr id="4" name="ZoneTexte 3">
+            <a:extLst>
+              <a:ext uri="{FF2B5EF4-FFF2-40B4-BE49-F238E27FC236}">
+                <a16:creationId xmlns:a16="http://schemas.microsoft.com/office/drawing/2014/main" id="{5FA13B1C-471E-EFCD-CB32-B24A3F59ADCF}"/>
+              </a:ext>
+            </a:extLst>
+          </p:cNvPr>
+          <p:cNvSpPr txBox="1"/>
+          <p:nvPr/>
+        </p:nvSpPr>
+        <p:spPr>
+          <a:xfrm>
+            <a:off x="-1" y="6488668"/>
+            <a:ext cx="12192000" cy="338554"/>
+          </a:xfrm>
+          <a:prstGeom prst="rect">
+            <a:avLst/>
+          </a:prstGeom>
+          <a:noFill/>
+        </p:spPr>
+        <p:txBody>
+          <a:bodyPr wrap="square" rtlCol="0">
+            <a:spAutoFit/>
+          </a:bodyPr>
+          <a:lstStyle/>
+          <a:p>
+            <a:pPr algn="ctr"/>
+            <a:r>
+              <a:rPr lang="fr-FR" sz="1600" dirty="0">
+                <a:solidFill>
+                  <a:schemeClr val="bg1">
+                    <a:lumMod val="85000"/>
+                  </a:schemeClr>
+                </a:solidFill>
+              </a:rPr>
+              <a:t>Introduction</a:t>
+            </a:r>
+            <a:r>
+              <a:rPr lang="fr-FR" sz="1600" dirty="0"/>
+              <a:t> </a:t>
+            </a:r>
+            <a:r>
+              <a:rPr lang="fr-FR" sz="1600" dirty="0">
+                <a:solidFill>
+                  <a:schemeClr val="bg1">
+                    <a:lumMod val="85000"/>
+                  </a:schemeClr>
+                </a:solidFill>
+                <a:sym typeface="Wingdings" panose="05000000000000000000" pitchFamily="2" charset="2"/>
+              </a:rPr>
+              <a:t> Description  </a:t>
+            </a:r>
+            <a:r>
+              <a:rPr lang="fr-FR" sz="1600" dirty="0">
+                <a:solidFill>
+                  <a:schemeClr val="bg1">
+                    <a:lumMod val="85000"/>
+                  </a:schemeClr>
+                </a:solidFill>
+              </a:rPr>
+              <a:t>Analyses </a:t>
+            </a:r>
+            <a:r>
+              <a:rPr lang="fr-FR" sz="1600" dirty="0">
+                <a:solidFill>
+                  <a:schemeClr val="bg1">
+                    <a:lumMod val="85000"/>
+                  </a:schemeClr>
+                </a:solidFill>
+                <a:sym typeface="Wingdings" panose="05000000000000000000" pitchFamily="2" charset="2"/>
+              </a:rPr>
+              <a:t> </a:t>
+            </a:r>
+            <a:r>
+              <a:rPr lang="fr-FR" sz="1600" dirty="0" err="1">
+                <a:solidFill>
+                  <a:schemeClr val="bg1">
+                    <a:lumMod val="85000"/>
+                  </a:schemeClr>
+                </a:solidFill>
+                <a:sym typeface="Wingdings" panose="05000000000000000000" pitchFamily="2" charset="2"/>
+              </a:rPr>
+              <a:t>Feature</a:t>
+            </a:r>
+            <a:r>
+              <a:rPr lang="fr-FR" sz="1600" dirty="0">
+                <a:solidFill>
+                  <a:schemeClr val="bg1">
+                    <a:lumMod val="85000"/>
+                  </a:schemeClr>
+                </a:solidFill>
+                <a:sym typeface="Wingdings" panose="05000000000000000000" pitchFamily="2" charset="2"/>
+              </a:rPr>
+              <a:t> engineering  Modélisation </a:t>
+            </a:r>
+            <a:r>
+              <a:rPr lang="fr-FR" sz="1600" dirty="0" err="1">
+                <a:solidFill>
+                  <a:schemeClr val="bg1">
+                    <a:lumMod val="85000"/>
+                  </a:schemeClr>
+                </a:solidFill>
+                <a:sym typeface="Wingdings" panose="05000000000000000000" pitchFamily="2" charset="2"/>
+              </a:rPr>
+              <a:t>Feature</a:t>
+            </a:r>
+            <a:r>
+              <a:rPr lang="fr-FR" sz="1600" dirty="0">
+                <a:solidFill>
+                  <a:schemeClr val="bg1">
+                    <a:lumMod val="85000"/>
+                  </a:schemeClr>
+                </a:solidFill>
+                <a:sym typeface="Wingdings" panose="05000000000000000000" pitchFamily="2" charset="2"/>
+              </a:rPr>
+              <a:t> importance  Déploiement  </a:t>
+            </a:r>
+            <a:r>
+              <a:rPr lang="fr-FR" sz="1600" dirty="0">
+                <a:sym typeface="Wingdings" panose="05000000000000000000" pitchFamily="2" charset="2"/>
+              </a:rPr>
+              <a:t>Suivi</a:t>
+            </a:r>
+            <a:r>
+              <a:rPr lang="fr-FR" sz="1600" dirty="0">
+                <a:solidFill>
+                  <a:schemeClr val="bg1">
+                    <a:lumMod val="85000"/>
+                  </a:schemeClr>
+                </a:solidFill>
+                <a:sym typeface="Wingdings" panose="05000000000000000000" pitchFamily="2" charset="2"/>
+              </a:rPr>
+              <a:t>  Exemple</a:t>
+            </a:r>
+            <a:endParaRPr lang="fr-FR" sz="1600" dirty="0">
+              <a:solidFill>
+                <a:schemeClr val="bg1">
+                  <a:lumMod val="85000"/>
+                </a:schemeClr>
+              </a:solidFill>
+            </a:endParaRPr>
+          </a:p>
+        </p:txBody>
+      </p:sp>
+      <p:sp>
+        <p:nvSpPr>
+          <p:cNvPr id="7" name="Rectangle 6">
+            <a:extLst>
+              <a:ext uri="{FF2B5EF4-FFF2-40B4-BE49-F238E27FC236}">
+                <a16:creationId xmlns:a16="http://schemas.microsoft.com/office/drawing/2014/main" id="{BC3CEFC7-4D00-280C-11F8-7618A9030885}"/>
+              </a:ext>
+            </a:extLst>
+          </p:cNvPr>
+          <p:cNvSpPr/>
+          <p:nvPr/>
+        </p:nvSpPr>
+        <p:spPr>
+          <a:xfrm>
+            <a:off x="3182471" y="2483224"/>
+            <a:ext cx="6100899" cy="412376"/>
+          </a:xfrm>
+          <a:prstGeom prst="rect">
+            <a:avLst/>
+          </a:prstGeom>
+          <a:noFill/>
+          <a:ln w="28575">
+            <a:solidFill>
+              <a:srgbClr val="FF0000"/>
+            </a:solidFill>
+          </a:ln>
+        </p:spPr>
+        <p:style>
+          <a:lnRef idx="2">
+            <a:schemeClr val="accent1">
+              <a:shade val="15000"/>
+            </a:schemeClr>
+          </a:lnRef>
+          <a:fillRef idx="1">
+            <a:schemeClr val="accent1"/>
+          </a:fillRef>
+          <a:effectRef idx="0">
+            <a:schemeClr val="accent1"/>
+          </a:effectRef>
+          <a:fontRef idx="minor">
+            <a:schemeClr val="lt1"/>
+          </a:fontRef>
+        </p:style>
+        <p:txBody>
+          <a:bodyPr rtlCol="0" anchor="ctr"/>
+          <a:lstStyle/>
+          <a:p>
+            <a:pPr algn="ctr"/>
+            <a:endParaRPr lang="fr-FR"/>
+          </a:p>
+        </p:txBody>
+      </p:sp>
+    </p:spTree>
+    <p:extLst>
+      <p:ext uri="{BB962C8B-B14F-4D97-AF65-F5344CB8AC3E}">
+        <p14:creationId xmlns:p14="http://schemas.microsoft.com/office/powerpoint/2010/main" val="2465748366"/>
+      </p:ext>
+    </p:extLst>
+  </p:cSld>
+  <p:clrMapOvr>
+    <a:masterClrMapping/>
+  </p:clrMapOvr>
+</p:sld>
+</file>
+
+<file path=ppt/slides/slide19.xml><?xml version="1.0" encoding="utf-8"?>
+<p:sld xmlns:a="http://schemas.openxmlformats.org/drawingml/2006/main" xmlns:r="http://schemas.openxmlformats.org/officeDocument/2006/relationships" xmlns:p="http://schemas.openxmlformats.org/presentationml/2006/main">
+  <p:cSld>
+    <p:spTree>
+      <p:nvGrpSpPr>
+        <p:cNvPr id="1" name="">
+          <a:extLst>
+            <a:ext uri="{FF2B5EF4-FFF2-40B4-BE49-F238E27FC236}">
+              <a16:creationId xmlns:a16="http://schemas.microsoft.com/office/drawing/2014/main" id="{DEF1ACCE-BD7C-18B2-CBBA-F802DEE140CA}"/>
+            </a:ext>
+          </a:extLst>
+        </p:cNvPr>
+        <p:cNvGrpSpPr/>
+        <p:nvPr/>
+      </p:nvGrpSpPr>
+      <p:grpSpPr>
+        <a:xfrm>
+          <a:off x="0" y="0"/>
+          <a:ext cx="0" cy="0"/>
+          <a:chOff x="0" y="0"/>
+          <a:chExt cx="0" cy="0"/>
+        </a:xfrm>
+      </p:grpSpPr>
+      <p:sp>
+        <p:nvSpPr>
+          <p:cNvPr id="2" name="Titre 1">
+            <a:extLst>
+              <a:ext uri="{FF2B5EF4-FFF2-40B4-BE49-F238E27FC236}">
+                <a16:creationId xmlns:a16="http://schemas.microsoft.com/office/drawing/2014/main" id="{48095928-C83D-C3E3-81D0-F5E3CB84AB89}"/>
+              </a:ext>
+            </a:extLst>
+          </p:cNvPr>
+          <p:cNvSpPr>
+            <a:spLocks noGrp="1"/>
+          </p:cNvSpPr>
+          <p:nvPr>
+            <p:ph type="title"/>
+          </p:nvPr>
+        </p:nvSpPr>
+        <p:spPr/>
+        <p:txBody>
+          <a:bodyPr/>
+          <a:lstStyle/>
+          <a:p>
+            <a:r>
+              <a:rPr lang="fr-FR" dirty="0"/>
+              <a:t>Conclusion : exemple avec un client !</a:t>
+            </a:r>
+          </a:p>
+        </p:txBody>
+      </p:sp>
+      <p:sp>
+        <p:nvSpPr>
+          <p:cNvPr id="9" name="Espace réservé du contenu 8">
+            <a:extLst>
+              <a:ext uri="{FF2B5EF4-FFF2-40B4-BE49-F238E27FC236}">
+                <a16:creationId xmlns:a16="http://schemas.microsoft.com/office/drawing/2014/main" id="{761B2BC9-C5A0-CE2D-B6D3-7373087A63C7}"/>
+              </a:ext>
+            </a:extLst>
+          </p:cNvPr>
+          <p:cNvSpPr>
+            <a:spLocks noGrp="1"/>
+          </p:cNvSpPr>
+          <p:nvPr>
+            <p:ph idx="1"/>
+          </p:nvPr>
+        </p:nvSpPr>
+        <p:spPr/>
+        <p:txBody>
+          <a:bodyPr>
+            <a:normAutofit/>
+          </a:bodyPr>
+          <a:lstStyle/>
+          <a:p>
+            <a:pPr algn="ctr"/>
+            <a:r>
+              <a:rPr lang="fr-FR" sz="2400" dirty="0">
+                <a:hlinkClick r:id="rId2"/>
+              </a:rPr>
+              <a:t>Cliquez ici !</a:t>
+            </a:r>
+            <a:endParaRPr lang="fr-FR" sz="2400" dirty="0"/>
+          </a:p>
+        </p:txBody>
+      </p:sp>
+      <p:sp>
+        <p:nvSpPr>
+          <p:cNvPr id="5" name="Espace réservé du numéro de diapositive 4">
+            <a:extLst>
+              <a:ext uri="{FF2B5EF4-FFF2-40B4-BE49-F238E27FC236}">
+                <a16:creationId xmlns:a16="http://schemas.microsoft.com/office/drawing/2014/main" id="{711145A2-2753-6E7B-DB1D-C55D5DC24901}"/>
+              </a:ext>
+            </a:extLst>
+          </p:cNvPr>
+          <p:cNvSpPr>
+            <a:spLocks noGrp="1"/>
+          </p:cNvSpPr>
+          <p:nvPr>
+            <p:ph type="sldNum" sz="quarter" idx="12"/>
+          </p:nvPr>
+        </p:nvSpPr>
+        <p:spPr/>
+        <p:txBody>
+          <a:bodyPr/>
+          <a:lstStyle/>
+          <a:p>
+            <a:fld id="{682819AE-B619-487D-9152-CB0FE4E70819}" type="slidenum">
+              <a:rPr lang="fr-FR" smtClean="0"/>
+              <a:t>19</a:t>
+            </a:fld>
+            <a:endParaRPr lang="fr-FR"/>
+          </a:p>
+        </p:txBody>
+      </p:sp>
+      <p:sp>
+        <p:nvSpPr>
+          <p:cNvPr id="4" name="ZoneTexte 3">
+            <a:extLst>
+              <a:ext uri="{FF2B5EF4-FFF2-40B4-BE49-F238E27FC236}">
+                <a16:creationId xmlns:a16="http://schemas.microsoft.com/office/drawing/2014/main" id="{7160C673-CDBD-821B-9EEE-5A8243374CF8}"/>
+              </a:ext>
+            </a:extLst>
+          </p:cNvPr>
+          <p:cNvSpPr txBox="1"/>
+          <p:nvPr/>
+        </p:nvSpPr>
+        <p:spPr>
+          <a:xfrm>
+            <a:off x="-1" y="6488668"/>
+            <a:ext cx="12192000" cy="338554"/>
+          </a:xfrm>
+          <a:prstGeom prst="rect">
+            <a:avLst/>
+          </a:prstGeom>
+          <a:noFill/>
+        </p:spPr>
+        <p:txBody>
+          <a:bodyPr wrap="square" rtlCol="0">
+            <a:spAutoFit/>
+          </a:bodyPr>
+          <a:lstStyle/>
+          <a:p>
+            <a:pPr algn="ctr"/>
+            <a:r>
+              <a:rPr lang="fr-FR" sz="1600" dirty="0">
+                <a:solidFill>
+                  <a:schemeClr val="bg1">
+                    <a:lumMod val="85000"/>
+                  </a:schemeClr>
+                </a:solidFill>
+              </a:rPr>
+              <a:t>Introduction</a:t>
+            </a:r>
+            <a:r>
+              <a:rPr lang="fr-FR" sz="1600" dirty="0"/>
+              <a:t> </a:t>
+            </a:r>
+            <a:r>
+              <a:rPr lang="fr-FR" sz="1600" dirty="0">
+                <a:solidFill>
+                  <a:schemeClr val="bg1">
+                    <a:lumMod val="85000"/>
+                  </a:schemeClr>
+                </a:solidFill>
+                <a:sym typeface="Wingdings" panose="05000000000000000000" pitchFamily="2" charset="2"/>
+              </a:rPr>
+              <a:t> Description  </a:t>
+            </a:r>
+            <a:r>
+              <a:rPr lang="fr-FR" sz="1600" dirty="0">
+                <a:solidFill>
+                  <a:schemeClr val="bg1">
+                    <a:lumMod val="85000"/>
+                  </a:schemeClr>
+                </a:solidFill>
+              </a:rPr>
+              <a:t>Analyses </a:t>
+            </a:r>
+            <a:r>
+              <a:rPr lang="fr-FR" sz="1600" dirty="0">
+                <a:solidFill>
+                  <a:schemeClr val="bg1">
+                    <a:lumMod val="85000"/>
+                  </a:schemeClr>
+                </a:solidFill>
+                <a:sym typeface="Wingdings" panose="05000000000000000000" pitchFamily="2" charset="2"/>
+              </a:rPr>
+              <a:t> </a:t>
+            </a:r>
+            <a:r>
+              <a:rPr lang="fr-FR" sz="1600" dirty="0" err="1">
+                <a:solidFill>
+                  <a:schemeClr val="bg1">
+                    <a:lumMod val="85000"/>
+                  </a:schemeClr>
+                </a:solidFill>
+                <a:sym typeface="Wingdings" panose="05000000000000000000" pitchFamily="2" charset="2"/>
+              </a:rPr>
+              <a:t>Feature</a:t>
+            </a:r>
+            <a:r>
+              <a:rPr lang="fr-FR" sz="1600" dirty="0">
+                <a:solidFill>
+                  <a:schemeClr val="bg1">
+                    <a:lumMod val="85000"/>
+                  </a:schemeClr>
+                </a:solidFill>
+                <a:sym typeface="Wingdings" panose="05000000000000000000" pitchFamily="2" charset="2"/>
+              </a:rPr>
+              <a:t> engineering  Modélisation </a:t>
+            </a:r>
+            <a:r>
+              <a:rPr lang="fr-FR" sz="1600" dirty="0" err="1">
+                <a:solidFill>
+                  <a:schemeClr val="bg1">
+                    <a:lumMod val="85000"/>
+                  </a:schemeClr>
+                </a:solidFill>
+                <a:sym typeface="Wingdings" panose="05000000000000000000" pitchFamily="2" charset="2"/>
+              </a:rPr>
+              <a:t>Feature</a:t>
+            </a:r>
+            <a:r>
+              <a:rPr lang="fr-FR" sz="1600" dirty="0">
+                <a:solidFill>
+                  <a:schemeClr val="bg1">
+                    <a:lumMod val="85000"/>
+                  </a:schemeClr>
+                </a:solidFill>
+                <a:sym typeface="Wingdings" panose="05000000000000000000" pitchFamily="2" charset="2"/>
+              </a:rPr>
+              <a:t> importance  Déploiement  Suivi  </a:t>
+            </a:r>
+            <a:r>
+              <a:rPr lang="fr-FR" sz="1600" dirty="0">
+                <a:sym typeface="Wingdings" panose="05000000000000000000" pitchFamily="2" charset="2"/>
+              </a:rPr>
+              <a:t>Exemple</a:t>
+            </a:r>
+            <a:endParaRPr lang="fr-FR" sz="1600" dirty="0"/>
+          </a:p>
+        </p:txBody>
+      </p:sp>
+    </p:spTree>
+    <p:extLst>
+      <p:ext uri="{BB962C8B-B14F-4D97-AF65-F5344CB8AC3E}">
+        <p14:creationId xmlns:p14="http://schemas.microsoft.com/office/powerpoint/2010/main" val="3924398268"/>
+      </p:ext>
+    </p:extLst>
+  </p:cSld>
+  <p:clrMapOvr>
+    <a:masterClrMapping/>
+  </p:clrMapOvr>
+</p:sld>
+</file>
+
 <file path=ppt/slides/slide2.xml><?xml version="1.0" encoding="utf-8"?>
 <p:sld xmlns:a="http://schemas.openxmlformats.org/drawingml/2006/main" xmlns:r="http://schemas.openxmlformats.org/officeDocument/2006/relationships" xmlns:p="http://schemas.openxmlformats.org/presentationml/2006/main">
   <p:cSld>
@@ -6123,6 +10573,12 @@
               <a:t>Sélection en fonction du taux de valeurs manquantes et de la corrélation avec d’autres variables.</a:t>
             </a:r>
           </a:p>
+          <a:p>
+            <a:r>
+              <a:rPr lang="fr-FR" dirty="0"/>
+              <a:t>Ajout d’autres variables : durée du crédit, ratio revenus/mensualités…</a:t>
+            </a:r>
+          </a:p>
         </p:txBody>
       </p:sp>
     </p:spTree>
@@ -6139,6 +10595,319 @@
 </file>
 
 <file path=ppt/slides/slide8.xml><?xml version="1.0" encoding="utf-8"?>
+<p:sld xmlns:a="http://schemas.openxmlformats.org/drawingml/2006/main" xmlns:r="http://schemas.openxmlformats.org/officeDocument/2006/relationships" xmlns:p="http://schemas.openxmlformats.org/presentationml/2006/main">
+  <p:cSld>
+    <p:spTree>
+      <p:nvGrpSpPr>
+        <p:cNvPr id="1" name="">
+          <a:extLst>
+            <a:ext uri="{FF2B5EF4-FFF2-40B4-BE49-F238E27FC236}">
+              <a16:creationId xmlns:a16="http://schemas.microsoft.com/office/drawing/2014/main" id="{11034605-F600-C011-1C60-D5E1B50DFEDF}"/>
+            </a:ext>
+          </a:extLst>
+        </p:cNvPr>
+        <p:cNvGrpSpPr/>
+        <p:nvPr/>
+      </p:nvGrpSpPr>
+      <p:grpSpPr>
+        <a:xfrm>
+          <a:off x="0" y="0"/>
+          <a:ext cx="0" cy="0"/>
+          <a:chOff x="0" y="0"/>
+          <a:chExt cx="0" cy="0"/>
+        </a:xfrm>
+      </p:grpSpPr>
+      <p:sp>
+        <p:nvSpPr>
+          <p:cNvPr id="2" name="Titre 1">
+            <a:extLst>
+              <a:ext uri="{FF2B5EF4-FFF2-40B4-BE49-F238E27FC236}">
+                <a16:creationId xmlns:a16="http://schemas.microsoft.com/office/drawing/2014/main" id="{9033DBFF-A141-D119-5F0A-A8C7530C2702}"/>
+              </a:ext>
+            </a:extLst>
+          </p:cNvPr>
+          <p:cNvSpPr>
+            <a:spLocks noGrp="1"/>
+          </p:cNvSpPr>
+          <p:nvPr>
+            <p:ph type="title"/>
+          </p:nvPr>
+        </p:nvSpPr>
+        <p:spPr/>
+        <p:txBody>
+          <a:bodyPr/>
+          <a:lstStyle/>
+          <a:p>
+            <a:r>
+              <a:rPr lang="fr-FR" dirty="0"/>
+              <a:t>Création du modèle : méthode</a:t>
+            </a:r>
+          </a:p>
+        </p:txBody>
+      </p:sp>
+      <p:sp>
+        <p:nvSpPr>
+          <p:cNvPr id="5" name="Espace réservé du numéro de diapositive 4">
+            <a:extLst>
+              <a:ext uri="{FF2B5EF4-FFF2-40B4-BE49-F238E27FC236}">
+                <a16:creationId xmlns:a16="http://schemas.microsoft.com/office/drawing/2014/main" id="{D7C29B6C-88AD-79EE-464B-42D04709E1CF}"/>
+              </a:ext>
+            </a:extLst>
+          </p:cNvPr>
+          <p:cNvSpPr>
+            <a:spLocks noGrp="1"/>
+          </p:cNvSpPr>
+          <p:nvPr>
+            <p:ph type="sldNum" sz="quarter" idx="12"/>
+          </p:nvPr>
+        </p:nvSpPr>
+        <p:spPr/>
+        <p:txBody>
+          <a:bodyPr/>
+          <a:lstStyle/>
+          <a:p>
+            <a:fld id="{682819AE-B619-487D-9152-CB0FE4E70819}" type="slidenum">
+              <a:rPr lang="fr-FR" smtClean="0"/>
+              <a:t>8</a:t>
+            </a:fld>
+            <a:endParaRPr lang="fr-FR"/>
+          </a:p>
+        </p:txBody>
+      </p:sp>
+      <p:sp>
+        <p:nvSpPr>
+          <p:cNvPr id="4" name="ZoneTexte 3">
+            <a:extLst>
+              <a:ext uri="{FF2B5EF4-FFF2-40B4-BE49-F238E27FC236}">
+                <a16:creationId xmlns:a16="http://schemas.microsoft.com/office/drawing/2014/main" id="{15C3D466-E985-2818-DB89-14EFA63EE22B}"/>
+              </a:ext>
+            </a:extLst>
+          </p:cNvPr>
+          <p:cNvSpPr txBox="1"/>
+          <p:nvPr/>
+        </p:nvSpPr>
+        <p:spPr>
+          <a:xfrm>
+            <a:off x="-1" y="6488668"/>
+            <a:ext cx="12192000" cy="338554"/>
+          </a:xfrm>
+          <a:prstGeom prst="rect">
+            <a:avLst/>
+          </a:prstGeom>
+          <a:noFill/>
+        </p:spPr>
+        <p:txBody>
+          <a:bodyPr wrap="square" rtlCol="0">
+            <a:spAutoFit/>
+          </a:bodyPr>
+          <a:lstStyle/>
+          <a:p>
+            <a:pPr algn="ctr"/>
+            <a:r>
+              <a:rPr lang="fr-FR" sz="1600" dirty="0">
+                <a:solidFill>
+                  <a:schemeClr val="bg1">
+                    <a:lumMod val="85000"/>
+                  </a:schemeClr>
+                </a:solidFill>
+              </a:rPr>
+              <a:t>Introduction</a:t>
+            </a:r>
+            <a:r>
+              <a:rPr lang="fr-FR" sz="1600" dirty="0"/>
+              <a:t> </a:t>
+            </a:r>
+            <a:r>
+              <a:rPr lang="fr-FR" sz="1600" dirty="0">
+                <a:solidFill>
+                  <a:schemeClr val="bg1">
+                    <a:lumMod val="85000"/>
+                  </a:schemeClr>
+                </a:solidFill>
+                <a:sym typeface="Wingdings" panose="05000000000000000000" pitchFamily="2" charset="2"/>
+              </a:rPr>
+              <a:t> Description  </a:t>
+            </a:r>
+            <a:r>
+              <a:rPr lang="fr-FR" sz="1600" dirty="0">
+                <a:solidFill>
+                  <a:schemeClr val="bg1">
+                    <a:lumMod val="85000"/>
+                  </a:schemeClr>
+                </a:solidFill>
+              </a:rPr>
+              <a:t>Analyses </a:t>
+            </a:r>
+            <a:r>
+              <a:rPr lang="fr-FR" sz="1600" dirty="0">
+                <a:solidFill>
+                  <a:schemeClr val="bg1">
+                    <a:lumMod val="85000"/>
+                  </a:schemeClr>
+                </a:solidFill>
+                <a:sym typeface="Wingdings" panose="05000000000000000000" pitchFamily="2" charset="2"/>
+              </a:rPr>
+              <a:t> </a:t>
+            </a:r>
+            <a:r>
+              <a:rPr lang="fr-FR" sz="1600" dirty="0" err="1">
+                <a:solidFill>
+                  <a:schemeClr val="bg1">
+                    <a:lumMod val="85000"/>
+                  </a:schemeClr>
+                </a:solidFill>
+                <a:sym typeface="Wingdings" panose="05000000000000000000" pitchFamily="2" charset="2"/>
+              </a:rPr>
+              <a:t>Feature</a:t>
+            </a:r>
+            <a:r>
+              <a:rPr lang="fr-FR" sz="1600" dirty="0">
+                <a:solidFill>
+                  <a:schemeClr val="bg1">
+                    <a:lumMod val="85000"/>
+                  </a:schemeClr>
+                </a:solidFill>
+                <a:sym typeface="Wingdings" panose="05000000000000000000" pitchFamily="2" charset="2"/>
+              </a:rPr>
+              <a:t> engineering  </a:t>
+            </a:r>
+            <a:r>
+              <a:rPr lang="fr-FR" sz="1600" dirty="0">
+                <a:sym typeface="Wingdings" panose="05000000000000000000" pitchFamily="2" charset="2"/>
+              </a:rPr>
+              <a:t>Modélisation</a:t>
+            </a:r>
+            <a:r>
+              <a:rPr lang="fr-FR" sz="1600" dirty="0">
+                <a:solidFill>
+                  <a:schemeClr val="bg1">
+                    <a:lumMod val="85000"/>
+                  </a:schemeClr>
+                </a:solidFill>
+                <a:sym typeface="Wingdings" panose="05000000000000000000" pitchFamily="2" charset="2"/>
+              </a:rPr>
+              <a:t> </a:t>
+            </a:r>
+            <a:r>
+              <a:rPr lang="fr-FR" sz="1600" dirty="0" err="1">
+                <a:solidFill>
+                  <a:schemeClr val="bg1">
+                    <a:lumMod val="85000"/>
+                  </a:schemeClr>
+                </a:solidFill>
+                <a:sym typeface="Wingdings" panose="05000000000000000000" pitchFamily="2" charset="2"/>
+              </a:rPr>
+              <a:t>Feature</a:t>
+            </a:r>
+            <a:r>
+              <a:rPr lang="fr-FR" sz="1600" dirty="0">
+                <a:solidFill>
+                  <a:schemeClr val="bg1">
+                    <a:lumMod val="85000"/>
+                  </a:schemeClr>
+                </a:solidFill>
+                <a:sym typeface="Wingdings" panose="05000000000000000000" pitchFamily="2" charset="2"/>
+              </a:rPr>
+              <a:t> importance  Déploiement  Suivi  Exemple</a:t>
+            </a:r>
+            <a:endParaRPr lang="fr-FR" sz="1600" dirty="0">
+              <a:solidFill>
+                <a:schemeClr val="bg1">
+                  <a:lumMod val="85000"/>
+                </a:schemeClr>
+              </a:solidFill>
+            </a:endParaRPr>
+          </a:p>
+        </p:txBody>
+      </p:sp>
+      <p:sp>
+        <p:nvSpPr>
+          <p:cNvPr id="6" name="Espace réservé du contenu 5">
+            <a:extLst>
+              <a:ext uri="{FF2B5EF4-FFF2-40B4-BE49-F238E27FC236}">
+                <a16:creationId xmlns:a16="http://schemas.microsoft.com/office/drawing/2014/main" id="{84EAAF4E-66A4-A5BE-6402-C68BE4EC5C72}"/>
+              </a:ext>
+            </a:extLst>
+          </p:cNvPr>
+          <p:cNvSpPr>
+            <a:spLocks noGrp="1"/>
+          </p:cNvSpPr>
+          <p:nvPr>
+            <p:ph idx="1"/>
+          </p:nvPr>
+        </p:nvSpPr>
+        <p:spPr/>
+        <p:txBody>
+          <a:bodyPr/>
+          <a:lstStyle/>
+          <a:p>
+            <a:r>
+              <a:rPr lang="fr-FR" dirty="0"/>
+              <a:t>Création d’une pipeline pour tester les modèles</a:t>
+            </a:r>
+          </a:p>
+          <a:p>
+            <a:r>
+              <a:rPr lang="fr-FR" dirty="0"/>
+              <a:t>Imputation par la médiane quand nécessaire, transformation avec </a:t>
+            </a:r>
+            <a:r>
+              <a:rPr lang="fr-FR" dirty="0" err="1"/>
+              <a:t>MinMaxScaler</a:t>
+            </a:r>
+            <a:endParaRPr lang="fr-FR" dirty="0"/>
+          </a:p>
+          <a:p>
+            <a:r>
+              <a:rPr lang="fr-FR" dirty="0"/>
+              <a:t>Création d’un score personnalisé (car FN = 10 * FP), suivi aussi de l’</a:t>
+            </a:r>
+            <a:r>
+              <a:rPr lang="fr-FR" dirty="0" err="1"/>
+              <a:t>accuracy</a:t>
+            </a:r>
+            <a:r>
+              <a:rPr lang="fr-FR" dirty="0"/>
+              <a:t> et du ROC AUC</a:t>
+            </a:r>
+          </a:p>
+          <a:p>
+            <a:r>
+              <a:rPr lang="fr-FR" dirty="0"/>
+              <a:t>Validation croisée et optimisation des hyperparamètres avec </a:t>
+            </a:r>
+            <a:r>
+              <a:rPr lang="fr-FR" dirty="0" err="1"/>
+              <a:t>GridSearchCV</a:t>
+            </a:r>
+            <a:endParaRPr lang="fr-FR" dirty="0"/>
+          </a:p>
+          <a:p>
+            <a:r>
+              <a:rPr lang="fr-FR" dirty="0" err="1"/>
+              <a:t>Tracking</a:t>
+            </a:r>
+            <a:r>
+              <a:rPr lang="fr-FR" dirty="0"/>
+              <a:t> avec MLFLOW</a:t>
+            </a:r>
+          </a:p>
+        </p:txBody>
+      </p:sp>
+    </p:spTree>
+    <p:extLst>
+      <p:ext uri="{BB962C8B-B14F-4D97-AF65-F5344CB8AC3E}">
+        <p14:creationId xmlns:p14="http://schemas.microsoft.com/office/powerpoint/2010/main" val="2906006063"/>
+      </p:ext>
+    </p:extLst>
+  </p:cSld>
+  <p:clrMapOvr>
+    <a:masterClrMapping/>
+  </p:clrMapOvr>
+</p:sld>
+</file>
+
+<file path=ppt/slides/slide9.xml><?xml version="1.0" encoding="utf-8"?>
 <p:sld xmlns:a="http://schemas.openxmlformats.org/drawingml/2006/main" xmlns:r="http://schemas.openxmlformats.org/officeDocument/2006/relationships" xmlns:p="http://schemas.openxmlformats.org/presentationml/2006/main">
   <p:cSld>
     <p:spTree>
@@ -6184,17 +10953,25 @@
           <a:p>
             <a:r>
               <a:rPr lang="fr-FR" dirty="0"/>
-              <a:t>Création du modèle</a:t>
-            </a:r>
-          </a:p>
-        </p:txBody>
-      </p:sp>
-      <p:sp>
-        <p:nvSpPr>
-          <p:cNvPr id="5" name="Espace réservé du numéro de diapositive 4">
-            <a:extLst>
-              <a:ext uri="{FF2B5EF4-FFF2-40B4-BE49-F238E27FC236}">
-                <a16:creationId xmlns:a16="http://schemas.microsoft.com/office/drawing/2014/main" id="{051B234B-E533-2CC1-BC5A-3ED586BFF665}"/>
+              <a:t>Création du modèle : </a:t>
+            </a:r>
+            <a:r>
+              <a:rPr lang="fr-FR" dirty="0" err="1"/>
+              <a:t>baseline</a:t>
+            </a:r>
+            <a:r>
+              <a:rPr lang="fr-FR" dirty="0"/>
+              <a:t> et 1ers tests</a:t>
+            </a:r>
+          </a:p>
+        </p:txBody>
+      </p:sp>
+      <p:sp>
+        <p:nvSpPr>
+          <p:cNvPr id="6" name="Espace réservé du contenu 5">
+            <a:extLst>
+              <a:ext uri="{FF2B5EF4-FFF2-40B4-BE49-F238E27FC236}">
+                <a16:creationId xmlns:a16="http://schemas.microsoft.com/office/drawing/2014/main" id="{E180FDD0-A3C6-4F3A-777D-5073C247E7E0}"/>
               </a:ext>
             </a:extLst>
           </p:cNvPr>
@@ -6202,7 +10979,7 @@
             <a:spLocks noGrp="1"/>
           </p:cNvSpPr>
           <p:nvPr>
-            <p:ph type="sldNum" sz="quarter" idx="12"/>
+            <p:ph sz="half" idx="1"/>
           </p:nvPr>
         </p:nvSpPr>
         <p:spPr/>
@@ -6210,9 +10987,139 @@
           <a:bodyPr/>
           <a:lstStyle/>
           <a:p>
+            <a:r>
+              <a:rPr lang="fr-FR" dirty="0"/>
+              <a:t>Baseline : prédit des 0 quoiqu’il arrive</a:t>
+            </a:r>
+          </a:p>
+          <a:p>
+            <a:r>
+              <a:rPr lang="fr-FR" dirty="0"/>
+              <a:t>Tests sans gestion du déséquilibre de la </a:t>
+            </a:r>
+            <a:r>
+              <a:rPr lang="fr-FR" dirty="0" err="1"/>
+              <a:t>target</a:t>
+            </a:r>
+            <a:r>
+              <a:rPr lang="fr-FR" dirty="0"/>
+              <a:t> :</a:t>
+            </a:r>
+          </a:p>
+          <a:p>
+            <a:pPr marL="0" indent="0">
+              <a:buNone/>
+            </a:pPr>
+            <a:r>
+              <a:rPr lang="fr-FR" dirty="0"/>
+              <a:t>	- Régression logistique</a:t>
+            </a:r>
+          </a:p>
+          <a:p>
+            <a:pPr marL="0" indent="0">
+              <a:buNone/>
+            </a:pPr>
+            <a:r>
+              <a:rPr lang="fr-FR" dirty="0"/>
+              <a:t>	- Forêt aléatoire</a:t>
+            </a:r>
+          </a:p>
+          <a:p>
+            <a:pPr marL="0" indent="0">
+              <a:buNone/>
+            </a:pPr>
+            <a:r>
+              <a:rPr lang="fr-FR" dirty="0"/>
+              <a:t>	- </a:t>
+            </a:r>
+            <a:r>
+              <a:rPr lang="fr-FR" dirty="0" err="1"/>
+              <a:t>XGBoost</a:t>
+            </a:r>
+            <a:endParaRPr lang="fr-FR" dirty="0"/>
+          </a:p>
+          <a:p>
+            <a:pPr marL="0" indent="0">
+              <a:buNone/>
+            </a:pPr>
+            <a:r>
+              <a:rPr lang="fr-FR" dirty="0">
+                <a:sym typeface="Wingdings" panose="05000000000000000000" pitchFamily="2" charset="2"/>
+              </a:rPr>
+              <a:t> Pas de bons résultats, mais </a:t>
+            </a:r>
+            <a:r>
+              <a:rPr lang="fr-FR" dirty="0" err="1">
+                <a:sym typeface="Wingdings" panose="05000000000000000000" pitchFamily="2" charset="2"/>
+              </a:rPr>
+              <a:t>XGBoost</a:t>
+            </a:r>
+            <a:r>
+              <a:rPr lang="fr-FR" dirty="0">
+                <a:sym typeface="Wingdings" panose="05000000000000000000" pitchFamily="2" charset="2"/>
+              </a:rPr>
+              <a:t> meilleur que les autres</a:t>
+            </a:r>
+            <a:endParaRPr lang="fr-FR" dirty="0"/>
+          </a:p>
+        </p:txBody>
+      </p:sp>
+      <p:pic>
+        <p:nvPicPr>
+          <p:cNvPr id="8" name="Espace réservé du contenu 7" descr="Une image contenant capture d’écran, ligne, Rectangle, diagramme&#10;&#10;Le contenu généré par l’IA peut être incorrect.">
+            <a:extLst>
+              <a:ext uri="{FF2B5EF4-FFF2-40B4-BE49-F238E27FC236}">
+                <a16:creationId xmlns:a16="http://schemas.microsoft.com/office/drawing/2014/main" id="{B0F6DB1B-7615-351F-67B0-9C26A1228208}"/>
+              </a:ext>
+            </a:extLst>
+          </p:cNvPr>
+          <p:cNvPicPr>
+            <a:picLocks noGrp="1" noChangeAspect="1"/>
+          </p:cNvPicPr>
+          <p:nvPr>
+            <p:ph sz="half" idx="2"/>
+          </p:nvPr>
+        </p:nvPicPr>
+        <p:blipFill>
+          <a:blip r:embed="rId2"/>
+          <a:stretch>
+            <a:fillRect/>
+          </a:stretch>
+        </p:blipFill>
+        <p:spPr>
+          <a:xfrm>
+            <a:off x="6188075" y="2693876"/>
+            <a:ext cx="5422900" cy="2700560"/>
+          </a:xfrm>
+          <a:prstGeom prst="rect">
+            <a:avLst/>
+          </a:prstGeom>
+        </p:spPr>
+      </p:pic>
+      <p:sp>
+        <p:nvSpPr>
+          <p:cNvPr id="5" name="Espace réservé du numéro de diapositive 4">
+            <a:extLst>
+              <a:ext uri="{FF2B5EF4-FFF2-40B4-BE49-F238E27FC236}">
+                <a16:creationId xmlns:a16="http://schemas.microsoft.com/office/drawing/2014/main" id="{051B234B-E533-2CC1-BC5A-3ED586BFF665}"/>
+              </a:ext>
+            </a:extLst>
+          </p:cNvPr>
+          <p:cNvSpPr>
+            <a:spLocks noGrp="1"/>
+          </p:cNvSpPr>
+          <p:nvPr>
+            <p:ph type="sldNum" sz="quarter" idx="12"/>
+          </p:nvPr>
+        </p:nvSpPr>
+        <p:spPr/>
+        <p:txBody>
+          <a:bodyPr/>
+          <a:lstStyle/>
+          <a:p>
             <a:fld id="{682819AE-B619-487D-9152-CB0FE4E70819}" type="slidenum">
               <a:rPr lang="fr-FR" smtClean="0"/>
-              <a:t>8</a:t>
+              <a:t>9</a:t>
             </a:fld>
             <a:endParaRPr lang="fr-FR"/>
           </a:p>
@@ -6361,31 +11268,6 @@
                 </a:schemeClr>
               </a:solidFill>
             </a:endParaRPr>
-          </a:p>
-        </p:txBody>
-      </p:sp>
-      <p:sp>
-        <p:nvSpPr>
-          <p:cNvPr id="6" name="Espace réservé du contenu 5">
-            <a:extLst>
-              <a:ext uri="{FF2B5EF4-FFF2-40B4-BE49-F238E27FC236}">
-                <a16:creationId xmlns:a16="http://schemas.microsoft.com/office/drawing/2014/main" id="{E180FDD0-A3C6-4F3A-777D-5073C247E7E0}"/>
-              </a:ext>
-            </a:extLst>
-          </p:cNvPr>
-          <p:cNvSpPr>
-            <a:spLocks noGrp="1"/>
-          </p:cNvSpPr>
-          <p:nvPr>
-            <p:ph idx="1"/>
-          </p:nvPr>
-        </p:nvSpPr>
-        <p:spPr/>
-        <p:txBody>
-          <a:bodyPr/>
-          <a:lstStyle/>
-          <a:p>
-            <a:endParaRPr lang="fr-FR" dirty="0"/>
           </a:p>
         </p:txBody>
       </p:sp>

--- a/Chaumaz_Ludovic_6_presentation_102025.pptx
+++ b/Chaumaz_Ludovic_6_presentation_102025.pptx
@@ -5,7 +5,7 @@
     <p:sldMasterId id="2147483672" r:id="rId1"/>
   </p:sldMasterIdLst>
   <p:notesMasterIdLst>
-    <p:notesMasterId r:id="rId21"/>
+    <p:notesMasterId r:id="rId22"/>
   </p:notesMasterIdLst>
   <p:sldIdLst>
     <p:sldId id="257" r:id="rId2"/>
@@ -27,6 +27,7 @@
     <p:sldId id="267" r:id="rId18"/>
     <p:sldId id="268" r:id="rId19"/>
     <p:sldId id="269" r:id="rId20"/>
+    <p:sldId id="276" r:id="rId21"/>
   </p:sldIdLst>
   <p:sldSz cx="12192000" cy="6858000"/>
   <p:notesSz cx="6858000" cy="9144000"/>
@@ -215,7 +216,7 @@
           <a:p>
             <a:fld id="{73FE8E35-F60A-4488-AAF8-000CBC3CB0C8}" type="datetimeFigureOut">
               <a:rPr lang="fr-FR" smtClean="0"/>
-              <a:t>12/12/2025</a:t>
+              <a:t>09/01/2026</a:t>
             </a:fld>
             <a:endParaRPr lang="fr-FR"/>
           </a:p>
@@ -727,7 +728,7 @@
           <a:p>
             <a:fld id="{85A8AEA9-4A83-4514-8314-CAAC6BB424E7}" type="datetime1">
               <a:rPr lang="fr-FR" smtClean="0"/>
-              <a:t>12/12/2025</a:t>
+              <a:t>09/01/2026</a:t>
             </a:fld>
             <a:endParaRPr lang="fr-FR"/>
           </a:p>
@@ -989,7 +990,7 @@
           <a:p>
             <a:fld id="{B098F633-EE6D-44A7-9E75-72C2FD5B7BAB}" type="datetime1">
               <a:rPr lang="fr-FR" smtClean="0"/>
-              <a:t>12/12/2025</a:t>
+              <a:t>09/01/2026</a:t>
             </a:fld>
             <a:endParaRPr lang="fr-FR"/>
           </a:p>
@@ -1224,7 +1225,7 @@
           <a:p>
             <a:fld id="{D1404B51-B437-4C22-9E27-0FFAA42698D9}" type="datetime1">
               <a:rPr lang="fr-FR" smtClean="0"/>
-              <a:t>12/12/2025</a:t>
+              <a:t>09/01/2026</a:t>
             </a:fld>
             <a:endParaRPr lang="fr-FR"/>
           </a:p>
@@ -1464,7 +1465,7 @@
           <a:p>
             <a:fld id="{65D6E619-AA96-4370-814B-B7263EDE5BEE}" type="datetime1">
               <a:rPr lang="fr-FR" smtClean="0"/>
-              <a:t>12/12/2025</a:t>
+              <a:t>09/01/2026</a:t>
             </a:fld>
             <a:endParaRPr lang="fr-FR"/>
           </a:p>
@@ -1771,7 +1772,7 @@
           <a:p>
             <a:fld id="{207AFFE8-C243-437F-ACCD-2DE4DA4F5631}" type="datetime1">
               <a:rPr lang="fr-FR" smtClean="0"/>
-              <a:t>12/12/2025</a:t>
+              <a:t>09/01/2026</a:t>
             </a:fld>
             <a:endParaRPr lang="fr-FR"/>
           </a:p>
@@ -2073,7 +2074,7 @@
           <a:p>
             <a:fld id="{09D56D03-5254-4E0A-91BD-3F14E781E4E2}" type="datetime1">
               <a:rPr lang="fr-FR" smtClean="0"/>
-              <a:t>12/12/2025</a:t>
+              <a:t>09/01/2026</a:t>
             </a:fld>
             <a:endParaRPr lang="fr-FR"/>
           </a:p>
@@ -2495,7 +2496,7 @@
           <a:p>
             <a:fld id="{0C393EB4-4823-4B53-B0B9-58F9E25A8EE9}" type="datetime1">
               <a:rPr lang="fr-FR" smtClean="0"/>
-              <a:t>12/12/2025</a:t>
+              <a:t>09/01/2026</a:t>
             </a:fld>
             <a:endParaRPr lang="fr-FR"/>
           </a:p>
@@ -2590,7 +2591,7 @@
           <a:p>
             <a:fld id="{E9058721-5E39-4BBC-9BF8-C6E60922CA88}" type="datetime1">
               <a:rPr lang="fr-FR" smtClean="0"/>
-              <a:t>12/12/2025</a:t>
+              <a:t>09/01/2026</a:t>
             </a:fld>
             <a:endParaRPr lang="fr-FR"/>
           </a:p>
@@ -2752,7 +2753,7 @@
           <a:p>
             <a:fld id="{745F4260-FCD6-49A1-B353-AD20383AEFA7}" type="datetime1">
               <a:rPr lang="fr-FR" smtClean="0"/>
-              <a:t>12/12/2025</a:t>
+              <a:t>09/01/2026</a:t>
             </a:fld>
             <a:endParaRPr lang="fr-FR"/>
           </a:p>
@@ -3130,7 +3131,7 @@
           <a:p>
             <a:fld id="{28C70CC8-C2E2-4F25-AD41-5746C43C3AF6}" type="datetime1">
               <a:rPr lang="fr-FR" smtClean="0"/>
-              <a:t>12/12/2025</a:t>
+              <a:t>09/01/2026</a:t>
             </a:fld>
             <a:endParaRPr lang="fr-FR"/>
           </a:p>
@@ -3419,7 +3420,7 @@
           <a:p>
             <a:fld id="{C61480EA-1F7B-4118-88E7-7DD22ACFAD7A}" type="datetime1">
               <a:rPr lang="fr-FR" smtClean="0"/>
-              <a:t>12/12/2025</a:t>
+              <a:t>09/01/2026</a:t>
             </a:fld>
             <a:endParaRPr lang="fr-FR"/>
           </a:p>
@@ -3630,7 +3631,7 @@
           <a:p>
             <a:fld id="{C366350D-C3F6-47FE-AE80-E681493CF550}" type="datetime1">
               <a:rPr lang="fr-FR" smtClean="0"/>
-              <a:t>12/12/2025</a:t>
+              <a:t>09/01/2026</a:t>
             </a:fld>
             <a:endParaRPr lang="fr-FR"/>
           </a:p>
@@ -4374,7 +4375,7 @@
                   <a:schemeClr val="bg1"/>
                 </a:solidFill>
               </a:rPr>
-              <a:t>05/12/25</a:t>
+              <a:t>16/01/26</a:t>
             </a:r>
           </a:p>
         </p:txBody>
@@ -7322,13 +7323,13 @@
         <p:spPr>
           <a:xfrm>
             <a:off x="8898464" y="3786434"/>
-            <a:ext cx="1241045" cy="646331"/>
+            <a:ext cx="1157689" cy="646331"/>
           </a:xfrm>
           <a:prstGeom prst="rect">
             <a:avLst/>
           </a:prstGeom>
           <a:solidFill>
-            <a:srgbClr val="00B0F0"/>
+            <a:srgbClr val="FFC000"/>
           </a:solidFill>
           <a:ln w="38100">
             <a:solidFill>
@@ -7344,13 +7345,13 @@
           <a:p>
             <a:r>
               <a:rPr lang="fr-FR" dirty="0"/>
-              <a:t>Application</a:t>
+              <a:t>Notebook</a:t>
             </a:r>
           </a:p>
           <a:p>
             <a:r>
               <a:rPr lang="fr-FR" dirty="0"/>
-              <a:t>finale</a:t>
+              <a:t>test</a:t>
             </a:r>
           </a:p>
         </p:txBody>
@@ -8207,7 +8208,7 @@
         <p:spPr>
           <a:xfrm flipV="1">
             <a:off x="4258179" y="4432765"/>
-            <a:ext cx="5260808" cy="1399998"/>
+            <a:ext cx="5219130" cy="1399998"/>
           </a:xfrm>
           <a:prstGeom prst="bentConnector2">
             <a:avLst/>
@@ -8651,40 +8652,70 @@
           </a:p>
         </p:txBody>
       </p:sp>
-      <p:sp>
-        <p:nvSpPr>
-          <p:cNvPr id="9" name="Espace réservé du contenu 8">
-            <a:extLst>
-              <a:ext uri="{FF2B5EF4-FFF2-40B4-BE49-F238E27FC236}">
-                <a16:creationId xmlns:a16="http://schemas.microsoft.com/office/drawing/2014/main" id="{761B2BC9-C5A0-CE2D-B6D3-7373087A63C7}"/>
-              </a:ext>
-            </a:extLst>
-          </p:cNvPr>
-          <p:cNvSpPr>
-            <a:spLocks noGrp="1"/>
-          </p:cNvSpPr>
-          <p:nvPr>
-            <p:ph idx="1"/>
-          </p:nvPr>
-        </p:nvSpPr>
-        <p:spPr/>
-        <p:txBody>
-          <a:bodyPr>
-            <a:normAutofit/>
-          </a:bodyPr>
-          <a:lstStyle/>
-          <a:p>
-            <a:pPr algn="ctr"/>
-            <a:r>
-              <a:rPr lang="fr-FR" sz="2400" dirty="0">
-                <a:hlinkClick r:id="rId2"/>
-              </a:rPr>
-              <a:t>Cliquez ici !</a:t>
-            </a:r>
-            <a:endParaRPr lang="fr-FR" sz="2400" dirty="0"/>
-          </a:p>
-        </p:txBody>
-      </p:sp>
+      <p:pic>
+        <p:nvPicPr>
+          <p:cNvPr id="8" name="Espace réservé du contenu 7" descr="Une image contenant texte, capture d’écran, Police, ligne&#10;&#10;Le contenu généré par l’IA peut être incorrect.">
+            <a:extLst>
+              <a:ext uri="{FF2B5EF4-FFF2-40B4-BE49-F238E27FC236}">
+                <a16:creationId xmlns:a16="http://schemas.microsoft.com/office/drawing/2014/main" id="{8DEB563F-22BA-F9E9-3E22-5ED9AF846D52}"/>
+              </a:ext>
+            </a:extLst>
+          </p:cNvPr>
+          <p:cNvPicPr>
+            <a:picLocks noGrp="1" noChangeAspect="1"/>
+          </p:cNvPicPr>
+          <p:nvPr>
+            <p:ph sz="half" idx="1"/>
+          </p:nvPr>
+        </p:nvPicPr>
+        <p:blipFill>
+          <a:blip r:embed="rId2"/>
+          <a:stretch>
+            <a:fillRect/>
+          </a:stretch>
+        </p:blipFill>
+        <p:spPr>
+          <a:xfrm>
+            <a:off x="1091893" y="3796472"/>
+            <a:ext cx="4401164" cy="495369"/>
+          </a:xfrm>
+          <a:prstGeom prst="rect">
+            <a:avLst/>
+          </a:prstGeom>
+        </p:spPr>
+      </p:pic>
+      <p:pic>
+        <p:nvPicPr>
+          <p:cNvPr id="11" name="Espace réservé du contenu 10">
+            <a:extLst>
+              <a:ext uri="{FF2B5EF4-FFF2-40B4-BE49-F238E27FC236}">
+                <a16:creationId xmlns:a16="http://schemas.microsoft.com/office/drawing/2014/main" id="{03C220AB-BA07-4D17-E7DF-B83709E0CBC1}"/>
+              </a:ext>
+            </a:extLst>
+          </p:cNvPr>
+          <p:cNvPicPr>
+            <a:picLocks noGrp="1" noChangeAspect="1"/>
+          </p:cNvPicPr>
+          <p:nvPr>
+            <p:ph sz="half" idx="2"/>
+          </p:nvPr>
+        </p:nvPicPr>
+        <p:blipFill>
+          <a:blip r:embed="rId3"/>
+          <a:stretch>
+            <a:fillRect/>
+          </a:stretch>
+        </p:blipFill>
+        <p:spPr>
+          <a:xfrm>
+            <a:off x="7303865" y="3815524"/>
+            <a:ext cx="3191320" cy="457264"/>
+          </a:xfrm>
+          <a:prstGeom prst="rect">
+            <a:avLst/>
+          </a:prstGeom>
+        </p:spPr>
+      </p:pic>
       <p:sp>
         <p:nvSpPr>
           <p:cNvPr id="5" name="Espace réservé du numéro de diapositive 4">
@@ -8843,6 +8874,51 @@
           </a:p>
         </p:txBody>
       </p:sp>
+      <p:cxnSp>
+        <p:nvCxnSpPr>
+          <p:cNvPr id="13" name="Connecteur droit avec flèche 12">
+            <a:extLst>
+              <a:ext uri="{FF2B5EF4-FFF2-40B4-BE49-F238E27FC236}">
+                <a16:creationId xmlns:a16="http://schemas.microsoft.com/office/drawing/2014/main" id="{2488C55B-E5A9-3028-BD72-82E4CBA1D291}"/>
+              </a:ext>
+            </a:extLst>
+          </p:cNvPr>
+          <p:cNvCxnSpPr>
+            <a:stCxn id="8" idx="3"/>
+            <a:endCxn id="11" idx="1"/>
+          </p:cNvCxnSpPr>
+          <p:nvPr/>
+        </p:nvCxnSpPr>
+        <p:spPr>
+          <a:xfrm flipV="1">
+            <a:off x="5493057" y="4044156"/>
+            <a:ext cx="1810808" cy="1"/>
+          </a:xfrm>
+          <a:prstGeom prst="straightConnector1">
+            <a:avLst/>
+          </a:prstGeom>
+          <a:ln w="28575">
+            <a:solidFill>
+              <a:schemeClr val="tx1"/>
+            </a:solidFill>
+            <a:tailEnd type="triangle"/>
+          </a:ln>
+        </p:spPr>
+        <p:style>
+          <a:lnRef idx="1">
+            <a:schemeClr val="accent1"/>
+          </a:lnRef>
+          <a:fillRef idx="0">
+            <a:schemeClr val="accent1"/>
+          </a:fillRef>
+          <a:effectRef idx="0">
+            <a:schemeClr val="accent1"/>
+          </a:effectRef>
+          <a:fontRef idx="minor">
+            <a:schemeClr val="tx1"/>
+          </a:fontRef>
+        </p:style>
+      </p:cxnSp>
     </p:spTree>
     <p:extLst>
       <p:ext uri="{BB962C8B-B14F-4D97-AF65-F5344CB8AC3E}">
@@ -9139,6 +9215,274 @@
     <p:extLst>
       <p:ext uri="{BB962C8B-B14F-4D97-AF65-F5344CB8AC3E}">
         <p14:creationId xmlns:p14="http://schemas.microsoft.com/office/powerpoint/2010/main" val="3466016859"/>
+      </p:ext>
+    </p:extLst>
+  </p:cSld>
+  <p:clrMapOvr>
+    <a:masterClrMapping/>
+  </p:clrMapOvr>
+</p:sld>
+</file>
+
+<file path=ppt/slides/slide20.xml><?xml version="1.0" encoding="utf-8"?>
+<p:sld xmlns:a="http://schemas.openxmlformats.org/drawingml/2006/main" xmlns:r="http://schemas.openxmlformats.org/officeDocument/2006/relationships" xmlns:p="http://schemas.openxmlformats.org/presentationml/2006/main">
+  <p:cSld>
+    <p:spTree>
+      <p:nvGrpSpPr>
+        <p:cNvPr id="1" name="">
+          <a:extLst>
+            <a:ext uri="{FF2B5EF4-FFF2-40B4-BE49-F238E27FC236}">
+              <a16:creationId xmlns:a16="http://schemas.microsoft.com/office/drawing/2014/main" id="{6909D75E-AFD8-A565-32EC-876B1CCFF1C4}"/>
+            </a:ext>
+          </a:extLst>
+        </p:cNvPr>
+        <p:cNvGrpSpPr/>
+        <p:nvPr/>
+      </p:nvGrpSpPr>
+      <p:grpSpPr>
+        <a:xfrm>
+          <a:off x="0" y="0"/>
+          <a:ext cx="0" cy="0"/>
+          <a:chOff x="0" y="0"/>
+          <a:chExt cx="0" cy="0"/>
+        </a:xfrm>
+      </p:grpSpPr>
+      <p:sp>
+        <p:nvSpPr>
+          <p:cNvPr id="2" name="Titre 1">
+            <a:extLst>
+              <a:ext uri="{FF2B5EF4-FFF2-40B4-BE49-F238E27FC236}">
+                <a16:creationId xmlns:a16="http://schemas.microsoft.com/office/drawing/2014/main" id="{4E7B8DAA-4C2E-2986-BADF-F25EB12EA47F}"/>
+              </a:ext>
+            </a:extLst>
+          </p:cNvPr>
+          <p:cNvSpPr>
+            <a:spLocks noGrp="1"/>
+          </p:cNvSpPr>
+          <p:nvPr>
+            <p:ph type="title"/>
+          </p:nvPr>
+        </p:nvSpPr>
+        <p:spPr/>
+        <p:txBody>
+          <a:bodyPr/>
+          <a:lstStyle/>
+          <a:p>
+            <a:r>
+              <a:rPr lang="fr-FR" dirty="0"/>
+              <a:t>Conclusion : Utilisation de l’API pour un </a:t>
+            </a:r>
+            <a:r>
+              <a:rPr lang="fr-FR" dirty="0" err="1"/>
+              <a:t>dashboard</a:t>
+            </a:r>
+            <a:br>
+              <a:rPr lang="fr-FR" dirty="0"/>
+            </a:br>
+            <a:r>
+              <a:rPr lang="fr-FR" dirty="0">
+                <a:sym typeface="Wingdings" panose="05000000000000000000" pitchFamily="2" charset="2"/>
+              </a:rPr>
+              <a:t> A suivre dans le projet 8 !</a:t>
+            </a:r>
+            <a:endParaRPr lang="fr-FR" dirty="0"/>
+          </a:p>
+        </p:txBody>
+      </p:sp>
+      <p:pic>
+        <p:nvPicPr>
+          <p:cNvPr id="8" name="Espace réservé du contenu 7">
+            <a:extLst>
+              <a:ext uri="{FF2B5EF4-FFF2-40B4-BE49-F238E27FC236}">
+                <a16:creationId xmlns:a16="http://schemas.microsoft.com/office/drawing/2014/main" id="{5CDD9754-494D-1B3A-0618-96827C18C6C7}"/>
+              </a:ext>
+            </a:extLst>
+          </p:cNvPr>
+          <p:cNvPicPr>
+            <a:picLocks noGrp="1" noChangeAspect="1"/>
+          </p:cNvPicPr>
+          <p:nvPr>
+            <p:ph idx="1"/>
+          </p:nvPr>
+        </p:nvPicPr>
+        <p:blipFill>
+          <a:blip r:embed="rId2"/>
+          <a:stretch>
+            <a:fillRect/>
+          </a:stretch>
+        </p:blipFill>
+        <p:spPr>
+          <a:xfrm>
+            <a:off x="1456956" y="2181225"/>
+            <a:ext cx="9278088" cy="3678238"/>
+          </a:xfrm>
+          <a:prstGeom prst="rect">
+            <a:avLst/>
+          </a:prstGeom>
+        </p:spPr>
+      </p:pic>
+      <p:sp>
+        <p:nvSpPr>
+          <p:cNvPr id="5" name="Espace réservé du numéro de diapositive 4">
+            <a:extLst>
+              <a:ext uri="{FF2B5EF4-FFF2-40B4-BE49-F238E27FC236}">
+                <a16:creationId xmlns:a16="http://schemas.microsoft.com/office/drawing/2014/main" id="{F4722C66-4A2C-FB58-F208-478AFCEB2BE5}"/>
+              </a:ext>
+            </a:extLst>
+          </p:cNvPr>
+          <p:cNvSpPr>
+            <a:spLocks noGrp="1"/>
+          </p:cNvSpPr>
+          <p:nvPr>
+            <p:ph type="sldNum" sz="quarter" idx="12"/>
+          </p:nvPr>
+        </p:nvSpPr>
+        <p:spPr/>
+        <p:txBody>
+          <a:bodyPr/>
+          <a:lstStyle/>
+          <a:p>
+            <a:fld id="{682819AE-B619-487D-9152-CB0FE4E70819}" type="slidenum">
+              <a:rPr lang="fr-FR" smtClean="0"/>
+              <a:t>20</a:t>
+            </a:fld>
+            <a:endParaRPr lang="fr-FR"/>
+          </a:p>
+        </p:txBody>
+      </p:sp>
+      <p:sp>
+        <p:nvSpPr>
+          <p:cNvPr id="4" name="ZoneTexte 3">
+            <a:extLst>
+              <a:ext uri="{FF2B5EF4-FFF2-40B4-BE49-F238E27FC236}">
+                <a16:creationId xmlns:a16="http://schemas.microsoft.com/office/drawing/2014/main" id="{C2DEA719-CA2C-CF92-0F7C-E764234ADC73}"/>
+              </a:ext>
+            </a:extLst>
+          </p:cNvPr>
+          <p:cNvSpPr txBox="1"/>
+          <p:nvPr/>
+        </p:nvSpPr>
+        <p:spPr>
+          <a:xfrm>
+            <a:off x="-1" y="6488668"/>
+            <a:ext cx="12192000" cy="338554"/>
+          </a:xfrm>
+          <a:prstGeom prst="rect">
+            <a:avLst/>
+          </a:prstGeom>
+          <a:noFill/>
+        </p:spPr>
+        <p:txBody>
+          <a:bodyPr wrap="square" rtlCol="0">
+            <a:spAutoFit/>
+          </a:bodyPr>
+          <a:lstStyle/>
+          <a:p>
+            <a:pPr algn="ctr"/>
+            <a:r>
+              <a:rPr lang="fr-FR" sz="1600" dirty="0">
+                <a:solidFill>
+                  <a:schemeClr val="bg1">
+                    <a:lumMod val="85000"/>
+                  </a:schemeClr>
+                </a:solidFill>
+              </a:rPr>
+              <a:t>Introduction</a:t>
+            </a:r>
+            <a:r>
+              <a:rPr lang="fr-FR" sz="1600" dirty="0"/>
+              <a:t> </a:t>
+            </a:r>
+            <a:r>
+              <a:rPr lang="fr-FR" sz="1600" dirty="0">
+                <a:solidFill>
+                  <a:schemeClr val="bg1">
+                    <a:lumMod val="85000"/>
+                  </a:schemeClr>
+                </a:solidFill>
+                <a:sym typeface="Wingdings" panose="05000000000000000000" pitchFamily="2" charset="2"/>
+              </a:rPr>
+              <a:t> Description  </a:t>
+            </a:r>
+            <a:r>
+              <a:rPr lang="fr-FR" sz="1600" dirty="0">
+                <a:solidFill>
+                  <a:schemeClr val="bg1">
+                    <a:lumMod val="85000"/>
+                  </a:schemeClr>
+                </a:solidFill>
+              </a:rPr>
+              <a:t>Analyses </a:t>
+            </a:r>
+            <a:r>
+              <a:rPr lang="fr-FR" sz="1600" dirty="0">
+                <a:solidFill>
+                  <a:schemeClr val="bg1">
+                    <a:lumMod val="85000"/>
+                  </a:schemeClr>
+                </a:solidFill>
+                <a:sym typeface="Wingdings" panose="05000000000000000000" pitchFamily="2" charset="2"/>
+              </a:rPr>
+              <a:t> </a:t>
+            </a:r>
+            <a:r>
+              <a:rPr lang="fr-FR" sz="1600" dirty="0" err="1">
+                <a:solidFill>
+                  <a:schemeClr val="bg1">
+                    <a:lumMod val="85000"/>
+                  </a:schemeClr>
+                </a:solidFill>
+                <a:sym typeface="Wingdings" panose="05000000000000000000" pitchFamily="2" charset="2"/>
+              </a:rPr>
+              <a:t>Feature</a:t>
+            </a:r>
+            <a:r>
+              <a:rPr lang="fr-FR" sz="1600" dirty="0">
+                <a:solidFill>
+                  <a:schemeClr val="bg1">
+                    <a:lumMod val="85000"/>
+                  </a:schemeClr>
+                </a:solidFill>
+                <a:sym typeface="Wingdings" panose="05000000000000000000" pitchFamily="2" charset="2"/>
+              </a:rPr>
+              <a:t> engineering  Modélisation </a:t>
+            </a:r>
+            <a:r>
+              <a:rPr lang="fr-FR" sz="1600" dirty="0" err="1">
+                <a:solidFill>
+                  <a:schemeClr val="bg1">
+                    <a:lumMod val="85000"/>
+                  </a:schemeClr>
+                </a:solidFill>
+                <a:sym typeface="Wingdings" panose="05000000000000000000" pitchFamily="2" charset="2"/>
+              </a:rPr>
+              <a:t>Feature</a:t>
+            </a:r>
+            <a:r>
+              <a:rPr lang="fr-FR" sz="1600" dirty="0">
+                <a:solidFill>
+                  <a:schemeClr val="bg1">
+                    <a:lumMod val="85000"/>
+                  </a:schemeClr>
+                </a:solidFill>
+                <a:sym typeface="Wingdings" panose="05000000000000000000" pitchFamily="2" charset="2"/>
+              </a:rPr>
+              <a:t> importance  Déploiement  Suivi  </a:t>
+            </a:r>
+            <a:r>
+              <a:rPr lang="fr-FR" sz="1600" dirty="0">
+                <a:sym typeface="Wingdings" panose="05000000000000000000" pitchFamily="2" charset="2"/>
+              </a:rPr>
+              <a:t>Exemple</a:t>
+            </a:r>
+            <a:endParaRPr lang="fr-FR" sz="1600" dirty="0"/>
+          </a:p>
+        </p:txBody>
+      </p:sp>
+    </p:spTree>
+    <p:extLst>
+      <p:ext uri="{BB962C8B-B14F-4D97-AF65-F5344CB8AC3E}">
+        <p14:creationId xmlns:p14="http://schemas.microsoft.com/office/powerpoint/2010/main" val="1535257299"/>
       </p:ext>
     </p:extLst>
   </p:cSld>

--- a/Chaumaz_Ludovic_6_presentation_102025.pptx
+++ b/Chaumaz_Ludovic_6_presentation_102025.pptx
@@ -216,7 +216,7 @@
           <a:p>
             <a:fld id="{73FE8E35-F60A-4488-AAF8-000CBC3CB0C8}" type="datetimeFigureOut">
               <a:rPr lang="fr-FR" smtClean="0"/>
-              <a:t>09/01/2026</a:t>
+              <a:t>12/01/2026</a:t>
             </a:fld>
             <a:endParaRPr lang="fr-FR"/>
           </a:p>
@@ -728,7 +728,7 @@
           <a:p>
             <a:fld id="{85A8AEA9-4A83-4514-8314-CAAC6BB424E7}" type="datetime1">
               <a:rPr lang="fr-FR" smtClean="0"/>
-              <a:t>09/01/2026</a:t>
+              <a:t>12/01/2026</a:t>
             </a:fld>
             <a:endParaRPr lang="fr-FR"/>
           </a:p>
@@ -990,7 +990,7 @@
           <a:p>
             <a:fld id="{B098F633-EE6D-44A7-9E75-72C2FD5B7BAB}" type="datetime1">
               <a:rPr lang="fr-FR" smtClean="0"/>
-              <a:t>09/01/2026</a:t>
+              <a:t>12/01/2026</a:t>
             </a:fld>
             <a:endParaRPr lang="fr-FR"/>
           </a:p>
@@ -1225,7 +1225,7 @@
           <a:p>
             <a:fld id="{D1404B51-B437-4C22-9E27-0FFAA42698D9}" type="datetime1">
               <a:rPr lang="fr-FR" smtClean="0"/>
-              <a:t>09/01/2026</a:t>
+              <a:t>12/01/2026</a:t>
             </a:fld>
             <a:endParaRPr lang="fr-FR"/>
           </a:p>
@@ -1465,7 +1465,7 @@
           <a:p>
             <a:fld id="{65D6E619-AA96-4370-814B-B7263EDE5BEE}" type="datetime1">
               <a:rPr lang="fr-FR" smtClean="0"/>
-              <a:t>09/01/2026</a:t>
+              <a:t>12/01/2026</a:t>
             </a:fld>
             <a:endParaRPr lang="fr-FR"/>
           </a:p>
@@ -1772,7 +1772,7 @@
           <a:p>
             <a:fld id="{207AFFE8-C243-437F-ACCD-2DE4DA4F5631}" type="datetime1">
               <a:rPr lang="fr-FR" smtClean="0"/>
-              <a:t>09/01/2026</a:t>
+              <a:t>12/01/2026</a:t>
             </a:fld>
             <a:endParaRPr lang="fr-FR"/>
           </a:p>
@@ -2074,7 +2074,7 @@
           <a:p>
             <a:fld id="{09D56D03-5254-4E0A-91BD-3F14E781E4E2}" type="datetime1">
               <a:rPr lang="fr-FR" smtClean="0"/>
-              <a:t>09/01/2026</a:t>
+              <a:t>12/01/2026</a:t>
             </a:fld>
             <a:endParaRPr lang="fr-FR"/>
           </a:p>
@@ -2496,7 +2496,7 @@
           <a:p>
             <a:fld id="{0C393EB4-4823-4B53-B0B9-58F9E25A8EE9}" type="datetime1">
               <a:rPr lang="fr-FR" smtClean="0"/>
-              <a:t>09/01/2026</a:t>
+              <a:t>12/01/2026</a:t>
             </a:fld>
             <a:endParaRPr lang="fr-FR"/>
           </a:p>
@@ -2591,7 +2591,7 @@
           <a:p>
             <a:fld id="{E9058721-5E39-4BBC-9BF8-C6E60922CA88}" type="datetime1">
               <a:rPr lang="fr-FR" smtClean="0"/>
-              <a:t>09/01/2026</a:t>
+              <a:t>12/01/2026</a:t>
             </a:fld>
             <a:endParaRPr lang="fr-FR"/>
           </a:p>
@@ -2753,7 +2753,7 @@
           <a:p>
             <a:fld id="{745F4260-FCD6-49A1-B353-AD20383AEFA7}" type="datetime1">
               <a:rPr lang="fr-FR" smtClean="0"/>
-              <a:t>09/01/2026</a:t>
+              <a:t>12/01/2026</a:t>
             </a:fld>
             <a:endParaRPr lang="fr-FR"/>
           </a:p>
@@ -3131,7 +3131,7 @@
           <a:p>
             <a:fld id="{28C70CC8-C2E2-4F25-AD41-5746C43C3AF6}" type="datetime1">
               <a:rPr lang="fr-FR" smtClean="0"/>
-              <a:t>09/01/2026</a:t>
+              <a:t>12/01/2026</a:t>
             </a:fld>
             <a:endParaRPr lang="fr-FR"/>
           </a:p>
@@ -3420,7 +3420,7 @@
           <a:p>
             <a:fld id="{C61480EA-1F7B-4118-88E7-7DD22ACFAD7A}" type="datetime1">
               <a:rPr lang="fr-FR" smtClean="0"/>
-              <a:t>09/01/2026</a:t>
+              <a:t>12/01/2026</a:t>
             </a:fld>
             <a:endParaRPr lang="fr-FR"/>
           </a:p>
@@ -3631,7 +3631,7 @@
           <a:p>
             <a:fld id="{C366350D-C3F6-47FE-AE80-E681493CF550}" type="datetime1">
               <a:rPr lang="fr-FR" smtClean="0"/>
-              <a:t>09/01/2026</a:t>
+              <a:t>12/01/2026</a:t>
             </a:fld>
             <a:endParaRPr lang="fr-FR"/>
           </a:p>
@@ -9860,39 +9860,6 @@
           </a:p>
         </p:txBody>
       </p:sp>
-      <p:pic>
-        <p:nvPicPr>
-          <p:cNvPr id="10" name="Espace réservé du contenu 9">
-            <a:extLst>
-              <a:ext uri="{FF2B5EF4-FFF2-40B4-BE49-F238E27FC236}">
-                <a16:creationId xmlns:a16="http://schemas.microsoft.com/office/drawing/2014/main" id="{52B4D3C0-31E9-F469-EDD4-8226876B0970}"/>
-              </a:ext>
-            </a:extLst>
-          </p:cNvPr>
-          <p:cNvPicPr>
-            <a:picLocks noGrp="1" noChangeAspect="1"/>
-          </p:cNvPicPr>
-          <p:nvPr>
-            <p:ph sz="half" idx="1"/>
-          </p:nvPr>
-        </p:nvPicPr>
-        <p:blipFill>
-          <a:blip r:embed="rId2"/>
-          <a:srcRect t="5810"/>
-          <a:stretch>
-            <a:fillRect/>
-          </a:stretch>
-        </p:blipFill>
-        <p:spPr>
-          <a:xfrm>
-            <a:off x="772420" y="2438400"/>
-            <a:ext cx="5040109" cy="3422650"/>
-          </a:xfrm>
-          <a:prstGeom prst="rect">
-            <a:avLst/>
-          </a:prstGeom>
-        </p:spPr>
-      </p:pic>
       <p:sp>
         <p:nvSpPr>
           <p:cNvPr id="5" name="Espace réservé du numéro de diapositive 4">
@@ -10057,10 +10024,10 @@
       </p:sp>
       <p:pic>
         <p:nvPicPr>
-          <p:cNvPr id="14" name="Espace réservé du contenu 13">
-            <a:extLst>
-              <a:ext uri="{FF2B5EF4-FFF2-40B4-BE49-F238E27FC236}">
-                <a16:creationId xmlns:a16="http://schemas.microsoft.com/office/drawing/2014/main" id="{40FA2246-B0C2-F843-2042-79809336B30B}"/>
+          <p:cNvPr id="8" name="Espace réservé du contenu 7" descr="Une image contenant texte, capture d’écran, diagramme, Rectangle&#10;&#10;Le contenu généré par l’IA peut être incorrect.">
+            <a:extLst>
+              <a:ext uri="{FF2B5EF4-FFF2-40B4-BE49-F238E27FC236}">
+                <a16:creationId xmlns:a16="http://schemas.microsoft.com/office/drawing/2014/main" id="{3CC17515-2449-3310-791E-09BB31667A53}"/>
               </a:ext>
             </a:extLst>
           </p:cNvPr>
@@ -10068,20 +10035,51 @@
             <a:picLocks noGrp="1" noChangeAspect="1"/>
           </p:cNvPicPr>
           <p:nvPr>
-            <p:ph sz="half" idx="2"/>
+            <p:ph sz="half" idx="1"/>
           </p:nvPr>
         </p:nvPicPr>
         <p:blipFill>
-          <a:blip r:embed="rId3"/>
-          <a:srcRect t="5810"/>
+          <a:blip r:embed="rId2"/>
           <a:stretch>
             <a:fillRect/>
           </a:stretch>
         </p:blipFill>
         <p:spPr>
           <a:xfrm>
-            <a:off x="7172456" y="2438400"/>
-            <a:ext cx="3454138" cy="3422650"/>
+            <a:off x="782287" y="2238917"/>
+            <a:ext cx="5020376" cy="3610479"/>
+          </a:xfrm>
+          <a:prstGeom prst="rect">
+            <a:avLst/>
+          </a:prstGeom>
+        </p:spPr>
+      </p:pic>
+      <p:pic>
+        <p:nvPicPr>
+          <p:cNvPr id="13" name="Espace réservé du contenu 12" descr="Une image contenant texte, capture d’écran, Police, cercle&#10;&#10;Le contenu généré par l’IA peut être incorrect.">
+            <a:extLst>
+              <a:ext uri="{FF2B5EF4-FFF2-40B4-BE49-F238E27FC236}">
+                <a16:creationId xmlns:a16="http://schemas.microsoft.com/office/drawing/2014/main" id="{D36C8B8B-8A3E-A99D-E513-9272AE5803E9}"/>
+              </a:ext>
+            </a:extLst>
+          </p:cNvPr>
+          <p:cNvPicPr>
+            <a:picLocks noGrp="1" noChangeAspect="1"/>
+          </p:cNvPicPr>
+          <p:nvPr>
+            <p:ph sz="half" idx="2"/>
+          </p:nvPr>
+        </p:nvPicPr>
+        <p:blipFill>
+          <a:blip r:embed="rId3"/>
+          <a:stretch>
+            <a:fillRect/>
+          </a:stretch>
+        </p:blipFill>
+        <p:spPr>
+          <a:xfrm>
+            <a:off x="7453511" y="2227263"/>
+            <a:ext cx="2892027" cy="3633787"/>
           </a:xfrm>
           <a:prstGeom prst="rect">
             <a:avLst/>
